--- a/Kisan360_SIH26132_Idea_PPT_v3.pptx
+++ b/Kisan360_SIH26132_Idea_PPT_v3.pptx
@@ -261,7 +261,7 @@
             <a:fld id="{C4D5ADD5-2BBC-4A94-8F86-D9013941F742}" type="datetimeFigureOut">
               <a:rPr lang="en-US"/>
               <a:pPr/>
-              <a:t>9/13/2026</a:t>
+              <a:t>9/12/2026</a:t>
             </a:fld>
             <a:endParaRPr lang="en-US"/>
           </a:p>
@@ -1534,7 +1534,7 @@
           <a:p>
             <a:fld id="{E60792E3-D524-454C-8AFD-A91972900BCB}" type="datetime1">
               <a:rPr lang="en-US" smtClean="0"/>
-              <a:t>9/13/2026</a:t>
+              <a:t>9/12/2026</a:t>
             </a:fld>
             <a:endParaRPr lang="en-US"/>
           </a:p>
@@ -1716,7 +1716,7 @@
           <a:p>
             <a:fld id="{053C3A68-6922-42D3-8905-ECC2D82A3469}" type="datetime1">
               <a:rPr lang="en-US" smtClean="0"/>
-              <a:t>9/13/2026</a:t>
+              <a:t>9/12/2026</a:t>
             </a:fld>
             <a:endParaRPr lang="en-US"/>
           </a:p>
@@ -1908,7 +1908,7 @@
           <a:p>
             <a:fld id="{CB69E9F4-7604-4950-A8B2-8ACDEDB1506E}" type="datetime1">
               <a:rPr lang="en-US" smtClean="0"/>
-              <a:t>9/13/2026</a:t>
+              <a:t>9/12/2026</a:t>
             </a:fld>
             <a:endParaRPr lang="en-US"/>
           </a:p>
@@ -2090,7 +2090,7 @@
           <a:p>
             <a:fld id="{708B7524-32A2-4C20-A58C-BC3BAA1042FC}" type="datetime1">
               <a:rPr lang="en-US" smtClean="0"/>
-              <a:t>9/13/2026</a:t>
+              <a:t>9/12/2026</a:t>
             </a:fld>
             <a:endParaRPr lang="en-US"/>
           </a:p>
@@ -2349,7 +2349,7 @@
           <a:p>
             <a:fld id="{1E994447-D6B2-43BB-A877-57F1A267B999}" type="datetime1">
               <a:rPr lang="en-US" smtClean="0"/>
-              <a:t>9/13/2026</a:t>
+              <a:t>9/12/2026</a:t>
             </a:fld>
             <a:endParaRPr lang="en-US"/>
           </a:p>
@@ -2648,7 +2648,7 @@
           <a:p>
             <a:fld id="{68920E16-BD35-483C-AA6B-346FC7E46DEA}" type="datetime1">
               <a:rPr lang="en-US" smtClean="0"/>
-              <a:t>9/13/2026</a:t>
+              <a:t>9/12/2026</a:t>
             </a:fld>
             <a:endParaRPr lang="en-US"/>
           </a:p>
@@ -3081,7 +3081,7 @@
           <a:p>
             <a:fld id="{2FEAC6F8-5103-4FC0-A69E-5C6AE6469DA8}" type="datetime1">
               <a:rPr lang="en-US" smtClean="0"/>
-              <a:t>9/13/2026</a:t>
+              <a:t>9/12/2026</a:t>
             </a:fld>
             <a:endParaRPr lang="en-US"/>
           </a:p>
@@ -3212,7 +3212,7 @@
           <a:p>
             <a:fld id="{C60C6921-0627-4C8F-83D5-0CF936D2FFDD}" type="datetime1">
               <a:rPr lang="en-US" smtClean="0"/>
-              <a:t>9/13/2026</a:t>
+              <a:t>9/12/2026</a:t>
             </a:fld>
             <a:endParaRPr lang="en-US"/>
           </a:p>
@@ -3321,7 +3321,7 @@
           <a:p>
             <a:fld id="{2FF08AD7-8103-40F8-983C-E2BA6BB9CBE0}" type="datetime1">
               <a:rPr lang="en-US" smtClean="0"/>
-              <a:t>9/13/2026</a:t>
+              <a:t>9/12/2026</a:t>
             </a:fld>
             <a:endParaRPr lang="en-US"/>
           </a:p>
@@ -3610,7 +3610,7 @@
           <a:p>
             <a:fld id="{DF8C06B4-9380-4A4D-AF49-A3596E17DAF5}" type="datetime1">
               <a:rPr lang="en-US" smtClean="0"/>
-              <a:t>9/13/2026</a:t>
+              <a:t>9/12/2026</a:t>
             </a:fld>
             <a:endParaRPr lang="en-US"/>
           </a:p>
@@ -3879,7 +3879,7 @@
           <a:p>
             <a:fld id="{EF7FDEF1-C582-4E22-9E77-D68326471F28}" type="datetime1">
               <a:rPr lang="en-US" smtClean="0"/>
-              <a:t>9/13/2026</a:t>
+              <a:t>9/12/2026</a:t>
             </a:fld>
             <a:endParaRPr lang="en-US"/>
           </a:p>
@@ -4122,7 +4122,7 @@
           <a:p>
             <a:fld id="{780A9602-A9A9-453F-AEF1-37B5837E02CD}" type="datetime1">
               <a:rPr lang="en-US" smtClean="0"/>
-              <a:t>9/13/2026</a:t>
+              <a:t>9/12/2026</a:t>
             </a:fld>
             <a:endParaRPr lang="en-US"/>
           </a:p>
@@ -5689,9 +5689,9 @@
               <a:t>Team ID : </a:t>
             </a:r>
             <a:r>
-              <a:rPr sz="1400" b="1" dirty="0">
-                <a:solidFill>
-                  <a:srgbClr val="DC2626"/>
+              <a:rPr sz="1400" dirty="0" b="1">
+                <a:solidFill>
+                  <a:srgbClr val="D97706"/>
                 </a:solidFill>
                 <a:latin typeface="Arial"/>
               </a:rPr>
@@ -6353,14 +6353,14 @@
           <a:noFill/>
         </p:spPr>
         <p:txBody>
-          <a:bodyPr wrap="square" lIns="0" tIns="0" rIns="0" bIns="0" anchor="t">
+          <a:bodyPr wrap="square" anchor="t" lIns="0" rIns="0" tIns="0" bIns="0">
             <a:spAutoFit/>
           </a:bodyPr>
           <a:lstStyle/>
           <a:p>
             <a:pPr algn="l"/>
             <a:r>
-              <a:rPr sz="2400" b="1" i="1">
+              <a:rPr sz="1500" b="1" i="1">
                 <a:solidFill>
                   <a:srgbClr val="047857"/>
                 </a:solidFill>
@@ -6382,14 +6382,6 @@
 <file path=ppt/slides/slide2.xml><?xml version="1.0" encoding="utf-8"?>
 <p:sld xmlns:a="http://schemas.openxmlformats.org/drawingml/2006/main" xmlns:r="http://schemas.openxmlformats.org/officeDocument/2006/relationships" xmlns:p="http://schemas.openxmlformats.org/presentationml/2006/main">
   <p:cSld>
-    <p:bg>
-      <p:bgPr>
-        <a:solidFill>
-          <a:srgbClr val="FFFFFF"/>
-        </a:solidFill>
-        <a:effectLst/>
-      </p:bgPr>
-    </p:bg>
     <p:spTree>
       <p:nvGrpSpPr>
         <p:cNvPr id="1" name=""/>
@@ -6406,19 +6398,112 @@
       </p:grpSpPr>
       <p:sp>
         <p:nvSpPr>
-          <p:cNvPr id="2" name="TextBox 1"/>
-          <p:cNvSpPr txBox="1"/>
+          <p:cNvPr id="9" name="Rectangle 8"/>
+          <p:cNvSpPr>
+            <a:spLocks noChangeArrowheads="1"/>
+          </p:cNvSpPr>
           <p:nvPr/>
         </p:nvSpPr>
-        <p:spPr>
-          <a:xfrm>
-            <a:off x="457200" y="274320"/>
-            <a:ext cx="8229600" cy="274320"/>
+        <p:spPr bwMode="auto">
+          <a:xfrm>
+            <a:off x="0" y="6354762"/>
+            <a:ext cx="12191999" cy="503238"/>
+          </a:xfrm>
+          <a:prstGeom prst="rect">
+            <a:avLst/>
+          </a:prstGeom>
+          <a:solidFill>
+            <a:srgbClr val="0070C0"/>
+          </a:solidFill>
+          <a:ln w="9525">
+            <a:noFill/>
+            <a:miter lim="800000"/>
+            <a:headEnd/>
+            <a:tailEnd/>
+          </a:ln>
+          <a:effectLst>
+            <a:outerShdw dist="23000" dir="5400000" rotWithShape="0">
+              <a:srgbClr val="808080">
+                <a:alpha val="34999"/>
+              </a:srgbClr>
+            </a:outerShdw>
+          </a:effectLst>
+        </p:spPr>
+        <p:txBody>
+          <a:bodyPr anchor="ctr"/>
+          <a:lstStyle/>
+          <a:p>
+            <a:pPr algn="ctr" fontAlgn="auto">
+              <a:spcBef>
+                <a:spcPts val="0"/>
+              </a:spcBef>
+              <a:spcAft>
+                <a:spcPts val="0"/>
+              </a:spcAft>
+              <a:defRPr/>
+            </a:pPr>
+            <a:endParaRPr lang="en-US" dirty="0">
+              <a:solidFill>
+                <a:schemeClr val="accent2">
+                  <a:lumMod val="75000"/>
+                </a:schemeClr>
+              </a:solidFill>
+              <a:latin typeface="+mn-lt"/>
+              <a:ea typeface="+mn-ea"/>
+            </a:endParaRPr>
+          </a:p>
+        </p:txBody>
+      </p:sp>
+      <p:sp>
+        <p:nvSpPr>
+          <p:cNvPr id="15361" name="Title 1"/>
+          <p:cNvSpPr>
+            <a:spLocks noGrp="1"/>
+          </p:cNvSpPr>
+          <p:nvPr>
+            <p:ph type="title"/>
+          </p:nvPr>
+        </p:nvSpPr>
+        <p:spPr>
+          <a:xfrm>
+            <a:off x="960120" y="0"/>
+            <a:ext cx="8366760" cy="1143000"/>
+          </a:xfrm>
+        </p:spPr>
+        <p:txBody>
+          <a:bodyPr/>
+          <a:lstStyle/>
+          <a:p>
+            <a:r>
+              <a:rPr dirty="0" sz="3000"/>
+              <a:t>Kisan360: net-realization engine + market linkage</a:t>
+            </a:r>
+          </a:p>
+        </p:txBody>
+      </p:sp>
+      <p:sp>
+        <p:nvSpPr>
+          <p:cNvPr id="15362" name="TextBox 8"/>
+          <p:cNvSpPr txBox="1">
+            <a:spLocks noChangeArrowheads="1"/>
+          </p:cNvSpPr>
+          <p:nvPr/>
+        </p:nvSpPr>
+        <p:spPr bwMode="auto">
+          <a:xfrm>
+            <a:off x="274320" y="1143000"/>
+            <a:ext cx="6400800" cy="4937760"/>
           </a:xfrm>
           <a:prstGeom prst="rect">
             <a:avLst/>
           </a:prstGeom>
           <a:noFill/>
+          <a:ln w="9525">
+            <a:noFill/>
+            <a:miter lim="800000"/>
+            <a:headEnd/>
+            <a:tailEnd/>
+          </a:ln>
         </p:spPr>
         <p:txBody>
           <a:bodyPr wrap="square">
@@ -6426,73 +6511,71 @@
           </a:bodyPr>
           <a:lstStyle/>
           <a:p>
-            <a:pPr algn="l"/>
-            <a:r>
-              <a:rPr sz="900" b="1">
+            <a:pPr marL="342900" indent="-342900">
+              <a:spcAft>
+                <a:spcPts val="400"/>
+              </a:spcAft>
+              <a:buFont typeface="Wingdings" panose="05000000000000000000" pitchFamily="2" charset="2"/>
+              <a:buChar char="v"/>
+            </a:pPr>
+            <a:r>
+              <a:rPr sz="1100" b="1">
                 <a:solidFill>
                   <a:srgbClr val="047857"/>
                 </a:solidFill>
               </a:rPr>
-              <a:t>THE PROBLEM &amp; WHAT WE BUILT</a:t>
-            </a:r>
-          </a:p>
-        </p:txBody>
-      </p:sp>
-      <p:sp>
-        <p:nvSpPr>
-          <p:cNvPr id="3" name="TextBox 2"/>
-          <p:cNvSpPr txBox="1"/>
-          <p:nvPr/>
-        </p:nvSpPr>
-        <p:spPr>
-          <a:xfrm>
-            <a:off x="457200" y="548640"/>
-            <a:ext cx="5029200" cy="548640"/>
-          </a:xfrm>
-          <a:prstGeom prst="rect">
-            <a:avLst/>
-          </a:prstGeom>
-          <a:noFill/>
-        </p:spPr>
-        <p:txBody>
-          <a:bodyPr wrap="square">
-            <a:spAutoFit/>
-          </a:bodyPr>
-          <a:lstStyle/>
-          <a:p>
-            <a:pPr algn="l"/>
-            <a:r>
-              <a:rPr sz="2200" b="1">
-                <a:solidFill>
-                  <a:srgbClr val="1C1917"/>
-                </a:solidFill>
-              </a:rPr>
-              <a:t>Farmers lose 20-40% because they can't see the real price.</a:t>
-            </a:r>
-          </a:p>
-        </p:txBody>
-      </p:sp>
-      <p:sp>
-        <p:nvSpPr>
-          <p:cNvPr id="4" name="TextBox 3"/>
-          <p:cNvSpPr txBox="1"/>
-          <p:nvPr/>
-        </p:nvSpPr>
-        <p:spPr>
-          <a:xfrm>
-            <a:off x="457200" y="1280160"/>
-            <a:ext cx="5029200" cy="1645920"/>
-          </a:xfrm>
-          <a:prstGeom prst="rect">
-            <a:avLst/>
-          </a:prstGeom>
-          <a:noFill/>
-        </p:spPr>
-        <p:txBody>
-          <a:bodyPr wrap="square">
-            <a:spAutoFit/>
-          </a:bodyPr>
-          <a:lstStyle/>
+              <a:t>Idea in one line</a:t>
+            </a:r>
+            <a:endParaRPr lang="en-US" sz="3200" u="sng" dirty="0">
+              <a:solidFill>
+                <a:schemeClr val="tx2"/>
+              </a:solidFill>
+              <a:latin typeface="Arial" pitchFamily="34" charset="0"/>
+              <a:cs typeface="Arial" pitchFamily="34" charset="0"/>
+            </a:endParaRPr>
+          </a:p>
+          <a:p>
+            <a:pPr lvl="1">
+              <a:spcAft>
+                <a:spcPts val="500"/>
+              </a:spcAft>
+            </a:pPr>
+          </a:p>
+          <a:p>
+            <a:pPr>
+              <a:spcAft>
+                <a:spcPts val="500"/>
+              </a:spcAft>
+            </a:pPr>
+          </a:p>
+          <a:p>
+            <a:pPr lvl="1">
+              <a:spcAft>
+                <a:spcPts val="500"/>
+              </a:spcAft>
+            </a:pPr>
+          </a:p>
+          <a:p>
+            <a:pPr lvl="1">
+              <a:spcAft>
+                <a:spcPts val="500"/>
+              </a:spcAft>
+            </a:pPr>
+          </a:p>
+          <a:p>
+            <a:pPr>
+              <a:spcAft>
+                <a:spcPts val="500"/>
+              </a:spcAft>
+            </a:pPr>
+          </a:p>
+          <a:p>
+            <a:pPr lvl="1">
+              <a:spcAft>
+                <a:spcPts val="500"/>
+              </a:spcAft>
+            </a:pPr>
+          </a:p>
           <a:p>
             <a:pPr>
               <a:spcAft>
@@ -6500,12 +6583,12 @@
               </a:spcAft>
             </a:pPr>
             <a:r>
-              <a:rPr sz="1100" b="1">
+              <a:rPr sz="400" b="0">
                 <a:solidFill>
                   <a:srgbClr val="1C1917"/>
                 </a:solidFill>
               </a:rPr>
-              <a:t>86% of Indian farms are small &amp; marginal (&lt;2 ha)</a:t>
+              <a:t/>
             </a:r>
           </a:p>
           <a:p>
@@ -6517,10 +6600,10 @@
             <a:r>
               <a:rPr sz="1000" b="0">
                 <a:solidFill>
-                  <a:srgbClr val="57534E"/>
+                  <a:srgbClr val="1C1917"/>
                 </a:solidFill>
               </a:rPr>
-              <a:t>They sell at the nearest mandi out of compulsion</a:t>
+              <a:t>Kisan360 shows where a lot will actually realize the most — not just the highest headline mandi price — then connects that decision to buyers, offers and payment.</a:t>
             </a:r>
           </a:p>
           <a:p>
@@ -6530,12 +6613,12 @@
               </a:spcAft>
             </a:pPr>
             <a:r>
-              <a:rPr sz="1000" b="0">
-                <a:solidFill>
-                  <a:srgbClr val="57534E"/>
+              <a:rPr sz="400" b="0">
+                <a:solidFill>
+                  <a:srgbClr val="1C1917"/>
                 </a:solidFill>
               </a:rPr>
-              <a:t>Headline price minus transport/loading/fees = actual take-home</a:t>
+              <a:t/>
             </a:r>
           </a:p>
           <a:p>
@@ -6545,71 +6628,14 @@
               </a:spcAft>
             </a:pPr>
             <a:r>
-              <a:rPr sz="1000" b="0">
-                <a:solidFill>
-                  <a:srgbClr val="57534E"/>
+              <a:rPr sz="1100" b="1">
+                <a:solidFill>
+                  <a:srgbClr val="047857"/>
                 </a:solidFill>
               </a:rPr>
-              <a:t>The highest price can leave less money in your pocket</a:t>
-            </a:r>
-          </a:p>
-        </p:txBody>
-      </p:sp>
-      <p:sp>
-        <p:nvSpPr>
-          <p:cNvPr id="5" name="TextBox 4"/>
-          <p:cNvSpPr txBox="1"/>
-          <p:nvPr/>
-        </p:nvSpPr>
-        <p:spPr>
-          <a:xfrm>
-            <a:off x="457200" y="2743200"/>
-            <a:ext cx="5029200" cy="274320"/>
-          </a:xfrm>
-          <a:prstGeom prst="rect">
-            <a:avLst/>
-          </a:prstGeom>
-          <a:noFill/>
-        </p:spPr>
-        <p:txBody>
-          <a:bodyPr wrap="square">
-            <a:spAutoFit/>
-          </a:bodyPr>
-          <a:lstStyle/>
-          <a:p>
-            <a:pPr algn="l"/>
-            <a:r>
-              <a:rPr sz="900" b="1">
-                <a:solidFill>
-                  <a:srgbClr val="047857"/>
-                </a:solidFill>
-              </a:rPr>
-              <a:t>WHAT KISAN360 DOES</a:t>
-            </a:r>
-          </a:p>
-        </p:txBody>
-      </p:sp>
-      <p:sp>
-        <p:nvSpPr>
-          <p:cNvPr id="6" name="TextBox 5"/>
-          <p:cNvSpPr txBox="1"/>
-          <p:nvPr/>
-        </p:nvSpPr>
-        <p:spPr>
-          <a:xfrm>
-            <a:off x="457200" y="3017520"/>
-            <a:ext cx="5029200" cy="1645920"/>
-          </a:xfrm>
-          <a:prstGeom prst="rect">
-            <a:avLst/>
-          </a:prstGeom>
-          <a:noFill/>
-        </p:spPr>
-        <p:txBody>
-          <a:bodyPr wrap="square">
-            <a:spAutoFit/>
-          </a:bodyPr>
-          <a:lstStyle/>
+              <a:t>The problem (PS 26132)</a:t>
+            </a:r>
+          </a:p>
           <a:p>
             <a:pPr>
               <a:spcAft>
@@ -6617,12 +6643,12 @@
               </a:spcAft>
             </a:pPr>
             <a:r>
-              <a:rPr sz="1100" b="1">
+              <a:rPr sz="400" b="0">
                 <a:solidFill>
                   <a:srgbClr val="1C1917"/>
                 </a:solidFill>
               </a:rPr>
-              <a:t>5-step selling journey: prices -&gt; compare -&gt; decide -&gt; trade -&gt; receipt</a:t>
+              <a:t/>
             </a:r>
           </a:p>
           <a:p>
@@ -6634,10 +6660,10 @@
             <a:r>
               <a:rPr sz="1000" b="0">
                 <a:solidFill>
-                  <a:srgbClr val="57534E"/>
+                  <a:srgbClr val="1C1917"/>
                 </a:solidFill>
               </a:rPr>
-              <a:t>Live AGMARKNET data across 70 Maharashtra mandis, 33 crops</a:t>
+              <a:t>~86% of holdings are small &amp; marginal — they distress-sell at harvest with weak bargaining power.</a:t>
             </a:r>
           </a:p>
           <a:p>
@@ -6649,10 +6675,10 @@
             <a:r>
               <a:rPr sz="1000" b="0">
                 <a:solidFill>
-                  <a:srgbClr val="57534E"/>
+                  <a:srgbClr val="1C1917"/>
                 </a:solidFill>
               </a:rPr>
-              <a:t>Deterministic net-realization calculator: every cost item documented</a:t>
+              <a:t>The highest mandi price can leave the farmer with less money after transport, loading, and fees.</a:t>
             </a:r>
           </a:p>
           <a:p>
@@ -6662,38 +6688,272 @@
               </a:spcAft>
             </a:pPr>
             <a:r>
+              <a:rPr sz="400" b="0">
+                <a:solidFill>
+                  <a:srgbClr val="1C1917"/>
+                </a:solidFill>
+              </a:rPr>
+              <a:t/>
+            </a:r>
+          </a:p>
+          <a:p>
+            <a:pPr>
+              <a:spcAft>
+                <a:spcPts val="400"/>
+              </a:spcAft>
+            </a:pPr>
+            <a:r>
+              <a:rPr sz="1100" b="1">
+                <a:solidFill>
+                  <a:srgbClr val="047857"/>
+                </a:solidFill>
+              </a:rPr>
+              <a:t>Why it wins</a:t>
+            </a:r>
+          </a:p>
+          <a:p>
+            <a:pPr>
+              <a:spcAft>
+                <a:spcPts val="400"/>
+              </a:spcAft>
+            </a:pPr>
+            <a:r>
+              <a:rPr sz="400" b="0">
+                <a:solidFill>
+                  <a:srgbClr val="1C1917"/>
+                </a:solidFill>
+              </a:rPr>
+              <a:t/>
+            </a:r>
+          </a:p>
+          <a:p>
+            <a:pPr>
+              <a:spcAft>
+                <a:spcPts val="400"/>
+              </a:spcAft>
+            </a:pPr>
+            <a:r>
               <a:rPr sz="1000" b="0">
                 <a:solidFill>
-                  <a:srgbClr val="57534E"/>
+                  <a:srgbClr val="1C1917"/>
                 </a:solidFill>
               </a:rPr>
-              <a:t>AI crop grading on the farmer's phone (99.2% accuracy, TF.js)</a:t>
-            </a:r>
-          </a:p>
-        </p:txBody>
-      </p:sp>
-      <p:sp>
-        <p:nvSpPr>
-          <p:cNvPr id="7" name="Rectangle 6"/>
-          <p:cNvSpPr/>
+              <a:t>Deterministic net ranking. Buyer coverage. Lot → offer → escrow → receipt. FPO pooling. AGMARK grading with trained vision model.</a:t>
+            </a:r>
+          </a:p>
+        </p:txBody>
+      </p:sp>
+      <p:sp>
+        <p:nvSpPr>
+          <p:cNvPr id="6" name="Slide Number Placeholder 5"/>
+          <p:cNvSpPr>
+            <a:spLocks noGrp="1"/>
+          </p:cNvSpPr>
+          <p:nvPr>
+            <p:ph type="sldNum" sz="quarter" idx="12"/>
+          </p:nvPr>
+        </p:nvSpPr>
+        <p:spPr/>
+        <p:txBody>
+          <a:bodyPr/>
+          <a:lstStyle/>
+          <a:p>
+            <a:fld id="{677C3CE7-23F7-4828-823C-E0205DF2CF97}" type="slidenum">
+              <a:rPr lang="en-US" b="1" smtClean="0">
+                <a:solidFill>
+                  <a:schemeClr val="bg1"/>
+                </a:solidFill>
+              </a:rPr>
+              <a:pPr/>
+              <a:t>2</a:t>
+            </a:fld>
+            <a:endParaRPr lang="en-US" b="1" dirty="0">
+              <a:solidFill>
+                <a:schemeClr val="bg1"/>
+              </a:solidFill>
+            </a:endParaRPr>
+          </a:p>
+        </p:txBody>
+      </p:sp>
+      <p:sp>
+        <p:nvSpPr>
+          <p:cNvPr id="7" name="Footer Placeholder 6"/>
+          <p:cNvSpPr>
+            <a:spLocks noGrp="1"/>
+          </p:cNvSpPr>
+          <p:nvPr>
+            <p:ph type="ftr" sz="quarter" idx="11"/>
+          </p:nvPr>
+        </p:nvSpPr>
+        <p:spPr>
+          <a:xfrm>
+            <a:off x="4648200" y="6356353"/>
+            <a:ext cx="3204000" cy="365125"/>
+          </a:xfrm>
+        </p:spPr>
+        <p:txBody>
+          <a:bodyPr/>
+          <a:lstStyle/>
+          <a:p>
+            <a:pPr>
+              <a:defRPr/>
+            </a:pPr>
+            <a:r>
+              <a:rPr lang="en-US">
+                <a:solidFill>
+                  <a:schemeClr val="bg1"/>
+                </a:solidFill>
+              </a:rPr>
+              <a:t>@SIH Idea submission- Template</a:t>
+            </a:r>
+            <a:endParaRPr lang="en-US" dirty="0">
+              <a:solidFill>
+                <a:schemeClr val="bg1"/>
+              </a:solidFill>
+            </a:endParaRPr>
+          </a:p>
+        </p:txBody>
+      </p:sp>
+      <p:pic>
+        <p:nvPicPr>
+          <p:cNvPr id="11" name="Picture 10"/>
+          <p:cNvPicPr>
+            <a:picLocks noChangeAspect="1"/>
+          </p:cNvPicPr>
           <p:nvPr/>
-        </p:nvSpPr>
-        <p:spPr>
-          <a:xfrm>
-            <a:off x="457200" y="4572000"/>
-            <a:ext cx="2377440" cy="1097280"/>
+        </p:nvPicPr>
+        <p:blipFill>
+          <a:blip r:embed="rId3">
+            <a:extLst>
+              <a:ext uri="{28A0092B-C50C-407E-A947-70E740481C1C}">
+                <a14:useLocalDpi xmlns:a14="http://schemas.microsoft.com/office/drawing/2010/main" val="0"/>
+              </a:ext>
+            </a:extLst>
+          </a:blip>
+          <a:stretch>
+            <a:fillRect/>
+          </a:stretch>
+        </p:blipFill>
+        <p:spPr>
+          <a:xfrm>
+            <a:off x="9780086" y="1500"/>
+            <a:ext cx="2249850" cy="1062337"/>
           </a:xfrm>
           <a:prstGeom prst="rect">
             <a:avLst/>
           </a:prstGeom>
-          <a:solidFill>
-            <a:srgbClr val="ECFDF5"/>
-          </a:solidFill>
+        </p:spPr>
+      </p:pic>
+      <p:pic>
+        <p:nvPicPr>
+          <p:cNvPr id="15363" name="Picture 15362" descr="kisan360-mark.png"/>
+          <p:cNvPicPr>
+            <a:picLocks noChangeAspect="1"/>
+          </p:cNvPicPr>
+          <p:nvPr/>
+        </p:nvPicPr>
+        <p:blipFill>
+          <a:blip r:embed="rId4"/>
+          <a:stretch>
+            <a:fillRect/>
+          </a:stretch>
+        </p:blipFill>
+        <p:spPr>
+          <a:xfrm>
+            <a:off x="162064" y="213182"/>
+            <a:ext cx="655816" cy="655816"/>
+          </a:xfrm>
+          <a:prstGeom prst="rect">
+            <a:avLst/>
+          </a:prstGeom>
+        </p:spPr>
+      </p:pic>
+      <p:pic>
+        <p:nvPicPr>
+          <p:cNvPr id="15364" name="Picture 15363" descr="shot_dashboard.png"/>
+          <p:cNvPicPr>
+            <a:picLocks noChangeAspect="1"/>
+          </p:cNvPicPr>
+          <p:nvPr/>
+        </p:nvPicPr>
+        <p:blipFill>
+          <a:blip r:embed="rId5"/>
+          <a:stretch>
+            <a:fillRect/>
+          </a:stretch>
+        </p:blipFill>
+        <p:spPr>
+          <a:xfrm>
+            <a:off x="7223760" y="1234440"/>
+            <a:ext cx="4572000" cy="2571750"/>
+          </a:xfrm>
+          <a:prstGeom prst="rect">
+            <a:avLst/>
+          </a:prstGeom>
           <a:ln w="12700">
             <a:solidFill>
-              <a:srgbClr val="D1FAE5"/>
+              <a:srgbClr val="D6D3D1"/>
             </a:solidFill>
           </a:ln>
+        </p:spPr>
+      </p:pic>
+      <p:sp>
+        <p:nvSpPr>
+          <p:cNvPr id="15365" name="TextBox 15364"/>
+          <p:cNvSpPr txBox="1"/>
+          <p:nvPr/>
+        </p:nvSpPr>
+        <p:spPr>
+          <a:xfrm>
+            <a:off x="7223760" y="3822191"/>
+            <a:ext cx="4572000" cy="292608"/>
+          </a:xfrm>
+          <a:prstGeom prst="rect">
+            <a:avLst/>
+          </a:prstGeom>
+          <a:noFill/>
+        </p:spPr>
+        <p:txBody>
+          <a:bodyPr wrap="square">
+            <a:spAutoFit/>
+          </a:bodyPr>
+          <a:lstStyle/>
+          <a:p>
+            <a:r>
+              <a:rPr sz="1000" i="1">
+                <a:solidFill>
+                  <a:srgbClr val="5B5B5B"/>
+                </a:solidFill>
+                <a:latin typeface="Arial"/>
+              </a:rPr>
+              <a:t>Live product: crop · district · quantity → one question — “where should I sell?”</a:t>
+            </a:r>
+          </a:p>
+        </p:txBody>
+      </p:sp>
+      <p:sp>
+        <p:nvSpPr>
+          <p:cNvPr id="15366" name="Rounded Rectangle 15365"/>
+          <p:cNvSpPr/>
+          <p:nvPr/>
+        </p:nvSpPr>
+        <p:spPr>
+          <a:xfrm>
+            <a:off x="6720840" y="4187952"/>
+            <a:ext cx="5074920" cy="2066543"/>
+          </a:xfrm>
+          <a:prstGeom prst="roundRect">
+            <a:avLst>
+              <a:gd name="adj" fmla="val 6000"/>
+            </a:avLst>
+          </a:prstGeom>
+          <a:solidFill>
+            <a:srgbClr val="1F3864"/>
+          </a:solidFill>
+          <a:ln>
+            <a:noFill/>
+          </a:ln>
+          <a:effectLst/>
         </p:spPr>
         <p:style>
           <a:lnRef idx="1">
@@ -6719,14 +6979,14 @@
       </p:sp>
       <p:sp>
         <p:nvSpPr>
-          <p:cNvPr id="8" name="TextBox 7"/>
+          <p:cNvPr id="15367" name="TextBox 15366"/>
           <p:cNvSpPr txBox="1"/>
           <p:nvPr/>
         </p:nvSpPr>
         <p:spPr>
           <a:xfrm>
-            <a:off x="594360" y="4663440"/>
-            <a:ext cx="2103120" cy="457200"/>
+            <a:off x="6949440" y="4306824"/>
+            <a:ext cx="4617720" cy="256032"/>
           </a:xfrm>
           <a:prstGeom prst="rect">
             <a:avLst/>
@@ -6734,80 +6994,47 @@
           <a:noFill/>
         </p:spPr>
         <p:txBody>
-          <a:bodyPr wrap="square">
+          <a:bodyPr wrap="square" anchor="t" lIns="0" rIns="0" tIns="0" bIns="0">
             <a:spAutoFit/>
           </a:bodyPr>
           <a:lstStyle/>
           <a:p>
-            <a:pPr algn="ctr"/>
-            <a:r>
-              <a:rPr sz="2800" b="1">
-                <a:solidFill>
-                  <a:srgbClr val="047857"/>
-                </a:solidFill>
+            <a:pPr algn="l"/>
+            <a:r>
+              <a:rPr sz="950" b="1">
+                <a:solidFill>
+                  <a:srgbClr val="9FB3D1"/>
+                </a:solidFill>
+                <a:latin typeface="Calibri"/>
               </a:rPr>
-              <a:t>86%</a:t>
-            </a:r>
-          </a:p>
-        </p:txBody>
-      </p:sp>
-      <p:sp>
-        <p:nvSpPr>
-          <p:cNvPr id="9" name="TextBox 8"/>
-          <p:cNvSpPr txBox="1"/>
-          <p:nvPr/>
-        </p:nvSpPr>
-        <p:spPr>
-          <a:xfrm>
-            <a:off x="594360" y="5120640"/>
-            <a:ext cx="2103120" cy="457200"/>
-          </a:xfrm>
-          <a:prstGeom prst="rect">
-            <a:avLst/>
-          </a:prstGeom>
-          <a:noFill/>
-        </p:spPr>
-        <p:txBody>
-          <a:bodyPr wrap="square">
-            <a:spAutoFit/>
-          </a:bodyPr>
-          <a:lstStyle/>
-          <a:p>
-            <a:pPr algn="ctr"/>
-            <a:r>
-              <a:rPr sz="900" b="0">
-                <a:solidFill>
-                  <a:srgbClr val="57534E"/>
-                </a:solidFill>
-              </a:rPr>
-              <a:t>Small farmers
-(&lt;2 ha)</a:t>
-            </a:r>
-          </a:p>
-        </p:txBody>
-      </p:sp>
-      <p:sp>
-        <p:nvSpPr>
-          <p:cNvPr id="10" name="Rectangle 9"/>
+              <a:t>HOW KISAN360 RANKS  ·  ONION · NAGPUR · 10 q  (LIVE)</a:t>
+            </a:r>
+          </a:p>
+        </p:txBody>
+      </p:sp>
+      <p:sp>
+        <p:nvSpPr>
+          <p:cNvPr id="15368" name="Rounded Rectangle 15367"/>
           <p:cNvSpPr/>
           <p:nvPr/>
         </p:nvSpPr>
         <p:spPr>
           <a:xfrm>
-            <a:off x="3063240" y="4572000"/>
-            <a:ext cx="2377440" cy="1097280"/>
-          </a:xfrm>
-          <a:prstGeom prst="rect">
-            <a:avLst/>
+            <a:off x="6949440" y="4608576"/>
+            <a:ext cx="1417319" cy="713232"/>
+          </a:xfrm>
+          <a:prstGeom prst="roundRect">
+            <a:avLst>
+              <a:gd name="adj" fmla="val 8000"/>
+            </a:avLst>
           </a:prstGeom>
           <a:solidFill>
-            <a:srgbClr val="ECFDF5"/>
+            <a:srgbClr val="2A4574"/>
           </a:solidFill>
-          <a:ln w="12700">
-            <a:solidFill>
-              <a:srgbClr val="D1FAE5"/>
-            </a:solidFill>
+          <a:ln>
+            <a:noFill/>
           </a:ln>
+          <a:effectLst/>
         </p:spPr>
         <p:style>
           <a:lnRef idx="1">
@@ -6833,14 +7060,14 @@
       </p:sp>
       <p:sp>
         <p:nvSpPr>
-          <p:cNvPr id="11" name="TextBox 10"/>
+          <p:cNvPr id="15369" name="TextBox 15368"/>
           <p:cNvSpPr txBox="1"/>
           <p:nvPr/>
         </p:nvSpPr>
         <p:spPr>
           <a:xfrm>
-            <a:off x="3200400" y="4663440"/>
-            <a:ext cx="2103120" cy="457200"/>
+            <a:off x="6949440" y="4690872"/>
+            <a:ext cx="1417319" cy="182880"/>
           </a:xfrm>
           <a:prstGeom prst="rect">
             <a:avLst/>
@@ -6848,33 +7075,34 @@
           <a:noFill/>
         </p:spPr>
         <p:txBody>
-          <a:bodyPr wrap="square">
+          <a:bodyPr wrap="square" anchor="t" lIns="0" rIns="0" tIns="0" bIns="0">
             <a:spAutoFit/>
           </a:bodyPr>
           <a:lstStyle/>
           <a:p>
             <a:pPr algn="ctr"/>
             <a:r>
-              <a:rPr sz="2800" b="1">
-                <a:solidFill>
-                  <a:srgbClr val="047857"/>
-                </a:solidFill>
+              <a:rPr sz="800" b="1">
+                <a:solidFill>
+                  <a:srgbClr val="FFFFFF"/>
+                </a:solidFill>
+                <a:latin typeface="Calibri"/>
               </a:rPr>
-              <a:t>70</a:t>
-            </a:r>
-          </a:p>
-        </p:txBody>
-      </p:sp>
-      <p:sp>
-        <p:nvSpPr>
-          <p:cNvPr id="12" name="TextBox 11"/>
+              <a:t>HEADLINE</a:t>
+            </a:r>
+          </a:p>
+        </p:txBody>
+      </p:sp>
+      <p:sp>
+        <p:nvSpPr>
+          <p:cNvPr id="15370" name="TextBox 15369"/>
           <p:cNvSpPr txBox="1"/>
           <p:nvPr/>
         </p:nvSpPr>
         <p:spPr>
           <a:xfrm>
-            <a:off x="3200400" y="5120640"/>
-            <a:ext cx="2103120" cy="457200"/>
+            <a:off x="6949440" y="4892040"/>
+            <a:ext cx="1417319" cy="347472"/>
           </a:xfrm>
           <a:prstGeom prst="rect">
             <a:avLst/>
@@ -6882,46 +7110,47 @@
           <a:noFill/>
         </p:spPr>
         <p:txBody>
-          <a:bodyPr wrap="square">
+          <a:bodyPr wrap="square" anchor="t" lIns="0" rIns="0" tIns="0" bIns="0">
             <a:spAutoFit/>
           </a:bodyPr>
           <a:lstStyle/>
           <a:p>
             <a:pPr algn="ctr"/>
             <a:r>
-              <a:rPr sz="900" b="0">
-                <a:solidFill>
-                  <a:srgbClr val="57534E"/>
-                </a:solidFill>
+              <a:rPr sz="1400" b="1">
+                <a:solidFill>
+                  <a:srgbClr val="FFFFFF"/>
+                </a:solidFill>
+                <a:latin typeface="Calibri"/>
               </a:rPr>
-              <a:t>Maharashtra
-mandis live</a:t>
-            </a:r>
-          </a:p>
-        </p:txBody>
-      </p:sp>
-      <p:sp>
-        <p:nvSpPr>
-          <p:cNvPr id="13" name="Rectangle 12"/>
+              <a:t>₹5,000/q</a:t>
+            </a:r>
+          </a:p>
+        </p:txBody>
+      </p:sp>
+      <p:sp>
+        <p:nvSpPr>
+          <p:cNvPr id="15371" name="Rounded Rectangle 15370"/>
           <p:cNvSpPr/>
           <p:nvPr/>
         </p:nvSpPr>
         <p:spPr>
           <a:xfrm>
-            <a:off x="5669280" y="4572000"/>
-            <a:ext cx="2377440" cy="1097280"/>
-          </a:xfrm>
-          <a:prstGeom prst="rect">
-            <a:avLst/>
+            <a:off x="8549640" y="4608576"/>
+            <a:ext cx="1417319" cy="713232"/>
+          </a:xfrm>
+          <a:prstGeom prst="roundRect">
+            <a:avLst>
+              <a:gd name="adj" fmla="val 8000"/>
+            </a:avLst>
           </a:prstGeom>
           <a:solidFill>
-            <a:srgbClr val="ECFDF5"/>
+            <a:srgbClr val="5C3B12"/>
           </a:solidFill>
-          <a:ln w="12700">
-            <a:solidFill>
-              <a:srgbClr val="D1FAE5"/>
-            </a:solidFill>
+          <a:ln>
+            <a:noFill/>
           </a:ln>
+          <a:effectLst/>
         </p:spPr>
         <p:style>
           <a:lnRef idx="1">
@@ -6947,14 +7176,14 @@
       </p:sp>
       <p:sp>
         <p:nvSpPr>
-          <p:cNvPr id="14" name="TextBox 13"/>
+          <p:cNvPr id="15372" name="TextBox 15371"/>
           <p:cNvSpPr txBox="1"/>
           <p:nvPr/>
         </p:nvSpPr>
         <p:spPr>
           <a:xfrm>
-            <a:off x="5806440" y="4663440"/>
-            <a:ext cx="2103120" cy="457200"/>
+            <a:off x="8549640" y="4690872"/>
+            <a:ext cx="1417319" cy="182880"/>
           </a:xfrm>
           <a:prstGeom prst="rect">
             <a:avLst/>
@@ -6962,33 +7191,34 @@
           <a:noFill/>
         </p:spPr>
         <p:txBody>
-          <a:bodyPr wrap="square">
+          <a:bodyPr wrap="square" anchor="t" lIns="0" rIns="0" tIns="0" bIns="0">
             <a:spAutoFit/>
           </a:bodyPr>
           <a:lstStyle/>
           <a:p>
             <a:pPr algn="ctr"/>
             <a:r>
-              <a:rPr sz="2800" b="1">
-                <a:solidFill>
-                  <a:srgbClr val="047857"/>
-                </a:solidFill>
+              <a:rPr sz="800" b="1">
+                <a:solidFill>
+                  <a:srgbClr val="F79646"/>
+                </a:solidFill>
+                <a:latin typeface="Calibri"/>
               </a:rPr>
-              <a:t>33</a:t>
-            </a:r>
-          </a:p>
-        </p:txBody>
-      </p:sp>
-      <p:sp>
-        <p:nvSpPr>
-          <p:cNvPr id="15" name="TextBox 14"/>
+              <a:t>COSTS</a:t>
+            </a:r>
+          </a:p>
+        </p:txBody>
+      </p:sp>
+      <p:sp>
+        <p:nvSpPr>
+          <p:cNvPr id="15373" name="TextBox 15372"/>
           <p:cNvSpPr txBox="1"/>
           <p:nvPr/>
         </p:nvSpPr>
         <p:spPr>
           <a:xfrm>
-            <a:off x="5806440" y="5120640"/>
-            <a:ext cx="2103120" cy="457200"/>
+            <a:off x="8549640" y="4892040"/>
+            <a:ext cx="1417319" cy="347472"/>
           </a:xfrm>
           <a:prstGeom prst="rect">
             <a:avLst/>
@@ -6996,46 +7226,47 @@
           <a:noFill/>
         </p:spPr>
         <p:txBody>
-          <a:bodyPr wrap="square">
+          <a:bodyPr wrap="square" anchor="t" lIns="0" rIns="0" tIns="0" bIns="0">
             <a:spAutoFit/>
           </a:bodyPr>
           <a:lstStyle/>
           <a:p>
             <a:pPr algn="ctr"/>
             <a:r>
-              <a:rPr sz="900" b="0">
-                <a:solidFill>
-                  <a:srgbClr val="57534E"/>
-                </a:solidFill>
+              <a:rPr sz="1400" b="1">
+                <a:solidFill>
+                  <a:srgbClr val="F79646"/>
+                </a:solidFill>
+                <a:latin typeface="Calibri"/>
               </a:rPr>
-              <a:t>Crops
-tracked</a:t>
-            </a:r>
-          </a:p>
-        </p:txBody>
-      </p:sp>
-      <p:sp>
-        <p:nvSpPr>
-          <p:cNvPr id="16" name="Rectangle 15"/>
+              <a:t>−₹957/q</a:t>
+            </a:r>
+          </a:p>
+        </p:txBody>
+      </p:sp>
+      <p:sp>
+        <p:nvSpPr>
+          <p:cNvPr id="15374" name="Rounded Rectangle 15373"/>
           <p:cNvSpPr/>
           <p:nvPr/>
         </p:nvSpPr>
         <p:spPr>
           <a:xfrm>
-            <a:off x="8275320" y="4572000"/>
-            <a:ext cx="2377440" cy="1097280"/>
-          </a:xfrm>
-          <a:prstGeom prst="rect">
-            <a:avLst/>
+            <a:off x="10149840" y="4608576"/>
+            <a:ext cx="1417319" cy="713232"/>
+          </a:xfrm>
+          <a:prstGeom prst="roundRect">
+            <a:avLst>
+              <a:gd name="adj" fmla="val 8000"/>
+            </a:avLst>
           </a:prstGeom>
           <a:solidFill>
-            <a:srgbClr val="ECFDF5"/>
+            <a:srgbClr val="047857"/>
           </a:solidFill>
-          <a:ln w="12700">
-            <a:solidFill>
-              <a:srgbClr val="D1FAE5"/>
-            </a:solidFill>
+          <a:ln>
+            <a:noFill/>
           </a:ln>
+          <a:effectLst/>
         </p:spPr>
         <p:style>
           <a:lnRef idx="1">
@@ -7061,14 +7292,14 @@
       </p:sp>
       <p:sp>
         <p:nvSpPr>
-          <p:cNvPr id="17" name="TextBox 16"/>
+          <p:cNvPr id="15375" name="TextBox 15374"/>
           <p:cNvSpPr txBox="1"/>
           <p:nvPr/>
         </p:nvSpPr>
         <p:spPr>
           <a:xfrm>
-            <a:off x="8412480" y="4663440"/>
-            <a:ext cx="2103120" cy="457200"/>
+            <a:off x="10149840" y="4690872"/>
+            <a:ext cx="1417319" cy="182880"/>
           </a:xfrm>
           <a:prstGeom prst="rect">
             <a:avLst/>
@@ -7076,33 +7307,34 @@
           <a:noFill/>
         </p:spPr>
         <p:txBody>
-          <a:bodyPr wrap="square">
+          <a:bodyPr wrap="square" anchor="t" lIns="0" rIns="0" tIns="0" bIns="0">
             <a:spAutoFit/>
           </a:bodyPr>
           <a:lstStyle/>
           <a:p>
             <a:pPr algn="ctr"/>
             <a:r>
-              <a:rPr sz="2800" b="1">
-                <a:solidFill>
-                  <a:srgbClr val="047857"/>
-                </a:solidFill>
+              <a:rPr sz="800" b="1">
+                <a:solidFill>
+                  <a:srgbClr val="FFFFFF"/>
+                </a:solidFill>
+                <a:latin typeface="Calibri"/>
               </a:rPr>
-              <a:t>3</a:t>
-            </a:r>
-          </a:p>
-        </p:txBody>
-      </p:sp>
-      <p:sp>
-        <p:nvSpPr>
-          <p:cNvPr id="18" name="TextBox 17"/>
+              <a:t>NET (EST.)</a:t>
+            </a:r>
+          </a:p>
+        </p:txBody>
+      </p:sp>
+      <p:sp>
+        <p:nvSpPr>
+          <p:cNvPr id="15376" name="TextBox 15375"/>
           <p:cNvSpPr txBox="1"/>
           <p:nvPr/>
         </p:nvSpPr>
         <p:spPr>
           <a:xfrm>
-            <a:off x="8412480" y="5120640"/>
-            <a:ext cx="2103120" cy="457200"/>
+            <a:off x="10149840" y="4892040"/>
+            <a:ext cx="1417319" cy="347472"/>
           </a:xfrm>
           <a:prstGeom prst="rect">
             <a:avLst/>
@@ -7110,48 +7342,115 @@
           <a:noFill/>
         </p:spPr>
         <p:txBody>
-          <a:bodyPr wrap="square">
+          <a:bodyPr wrap="square" anchor="t" lIns="0" rIns="0" tIns="0" bIns="0">
             <a:spAutoFit/>
           </a:bodyPr>
           <a:lstStyle/>
           <a:p>
             <a:pPr algn="ctr"/>
             <a:r>
-              <a:rPr sz="900" b="0">
-                <a:solidFill>
-                  <a:srgbClr val="57534E"/>
-                </a:solidFill>
+              <a:rPr sz="1400" b="1">
+                <a:solidFill>
+                  <a:srgbClr val="FFFFFF"/>
+                </a:solidFill>
+                <a:latin typeface="Calibri"/>
               </a:rPr>
-              <a:t>Languages
-(MR/HI/EN)</a:t>
-            </a:r>
-          </a:p>
-        </p:txBody>
-      </p:sp>
-      <p:pic>
-        <p:nvPicPr>
-          <p:cNvPr id="19" name="Picture 18" descr="ppt-landing.png"/>
-          <p:cNvPicPr>
-            <a:picLocks noChangeAspect="1"/>
-          </p:cNvPicPr>
+              <a:t>₹4,043/q</a:t>
+            </a:r>
+          </a:p>
+        </p:txBody>
+      </p:sp>
+      <p:sp>
+        <p:nvSpPr>
+          <p:cNvPr id="15377" name="TextBox 15376"/>
+          <p:cNvSpPr txBox="1"/>
           <p:nvPr/>
-        </p:nvPicPr>
-        <p:blipFill>
-          <a:blip r:embed="rId6"/>
-          <a:stretch>
-            <a:fillRect/>
-          </a:stretch>
-        </p:blipFill>
-        <p:spPr>
-          <a:xfrm>
-            <a:off x="6217920" y="457200"/>
-            <a:ext cx="4572000" cy="5486400"/>
+        </p:nvSpPr>
+        <p:spPr>
+          <a:xfrm>
+            <a:off x="6949440" y="5413248"/>
+            <a:ext cx="4617720" cy="237744"/>
           </a:xfrm>
           <a:prstGeom prst="rect">
             <a:avLst/>
           </a:prstGeom>
-        </p:spPr>
-      </p:pic>
+          <a:noFill/>
+        </p:spPr>
+        <p:txBody>
+          <a:bodyPr wrap="square" anchor="t" lIns="0" rIns="0" tIns="0" bIns="0">
+            <a:spAutoFit/>
+          </a:bodyPr>
+          <a:lstStyle/>
+          <a:p>
+            <a:pPr algn="l"/>
+            <a:r>
+              <a:rPr sz="1200">
+                <a:solidFill>
+                  <a:srgbClr val="D6E0F0"/>
+                </a:solidFill>
+                <a:latin typeface="Calibri"/>
+              </a:rPr>
+              <a:t>10 q × ₹4,043/q = </a:t>
+            </a:r>
+            <a:r>
+              <a:rPr sz="1200" b="1">
+                <a:solidFill>
+                  <a:srgbClr val="3FCB94"/>
+                </a:solidFill>
+                <a:latin typeface="Calibri"/>
+              </a:rPr>
+              <a:t>₹40,432</a:t>
+            </a:r>
+            <a:r>
+              <a:rPr sz="1200">
+                <a:solidFill>
+                  <a:srgbClr val="D6E0F0"/>
+                </a:solidFill>
+                <a:latin typeface="Calibri"/>
+              </a:rPr>
+              <a:t>  for this lot</a:t>
+            </a:r>
+          </a:p>
+        </p:txBody>
+      </p:sp>
+      <p:sp>
+        <p:nvSpPr>
+          <p:cNvPr id="15378" name="TextBox 15377"/>
+          <p:cNvSpPr txBox="1"/>
+          <p:nvPr/>
+        </p:nvSpPr>
+        <p:spPr>
+          <a:xfrm>
+            <a:off x="6949440" y="5687568"/>
+            <a:ext cx="4617720" cy="502920"/>
+          </a:xfrm>
+          <a:prstGeom prst="rect">
+            <a:avLst/>
+          </a:prstGeom>
+          <a:noFill/>
+        </p:spPr>
+        <p:txBody>
+          <a:bodyPr wrap="square" anchor="t" lIns="0" rIns="0" tIns="0" bIns="0">
+            <a:spAutoFit/>
+          </a:bodyPr>
+          <a:lstStyle/>
+          <a:p>
+            <a:pPr algn="l">
+              <a:lnSpc>
+                <a:spcPct val="105000"/>
+              </a:lnSpc>
+            </a:pPr>
+            <a:r>
+              <a:rPr sz="900" b="0">
+                <a:solidFill>
+                  <a:srgbClr val="57534E"/>
+                </a:solidFill>
+              </a:rPr>
+              <a:t>Same mandi tops both price and take-home today. Edge vs next-best (APMC Bhusaval): +₹770/q.</a:t>
+            </a:r>
+          </a:p>
+        </p:txBody>
+      </p:sp>
     </p:spTree>
   </p:cSld>
   <p:clrMapOvr>
@@ -7163,14 +7462,6 @@
 <file path=ppt/slides/slide3.xml><?xml version="1.0" encoding="utf-8"?>
 <p:sld xmlns:a="http://schemas.openxmlformats.org/drawingml/2006/main" xmlns:r="http://schemas.openxmlformats.org/officeDocument/2006/relationships" xmlns:p="http://schemas.openxmlformats.org/presentationml/2006/main">
   <p:cSld>
-    <p:bg>
-      <p:bgPr>
-        <a:solidFill>
-          <a:srgbClr val="FFFFFF"/>
-        </a:solidFill>
-        <a:effectLst/>
-      </p:bgPr>
-    </p:bg>
     <p:spTree>
       <p:nvGrpSpPr>
         <p:cNvPr id="1" name=""/>
@@ -7187,88 +7478,286 @@
       </p:grpSpPr>
       <p:sp>
         <p:nvSpPr>
-          <p:cNvPr id="2" name="TextBox 1"/>
-          <p:cNvSpPr txBox="1"/>
+          <p:cNvPr id="10" name="Rectangle 9">
+            <a:extLst>
+              <a:ext uri="{FF2B5EF4-FFF2-40B4-BE49-F238E27FC236}">
+                <a16:creationId xmlns:a16="http://schemas.microsoft.com/office/drawing/2014/main" id="{AD4F69D3-EEB0-4C4C-9434-B9960FB5854C}"/>
+              </a:ext>
+            </a:extLst>
+          </p:cNvPr>
+          <p:cNvSpPr>
+            <a:spLocks noChangeArrowheads="1"/>
+          </p:cNvSpPr>
           <p:nvPr/>
         </p:nvSpPr>
-        <p:spPr>
-          <a:xfrm>
-            <a:off x="457200" y="274320"/>
-            <a:ext cx="8229600" cy="274320"/>
+        <p:spPr bwMode="auto">
+          <a:xfrm>
+            <a:off x="0" y="6354762"/>
+            <a:ext cx="12191999" cy="503238"/>
           </a:xfrm>
           <a:prstGeom prst="rect">
             <a:avLst/>
           </a:prstGeom>
-          <a:noFill/>
-        </p:spPr>
-        <p:txBody>
-          <a:bodyPr wrap="square">
-            <a:spAutoFit/>
-          </a:bodyPr>
+          <a:solidFill>
+            <a:srgbClr val="0070C0"/>
+          </a:solidFill>
+          <a:ln w="9525">
+            <a:noFill/>
+            <a:miter lim="800000"/>
+            <a:headEnd/>
+            <a:tailEnd/>
+          </a:ln>
+          <a:effectLst>
+            <a:outerShdw dist="23000" dir="5400000" rotWithShape="0">
+              <a:srgbClr val="808080">
+                <a:alpha val="34999"/>
+              </a:srgbClr>
+            </a:outerShdw>
+          </a:effectLst>
+        </p:spPr>
+        <p:txBody>
+          <a:bodyPr anchor="ctr"/>
           <a:lstStyle/>
           <a:p>
-            <a:pPr algn="l"/>
-            <a:r>
-              <a:rPr sz="900" b="1">
-                <a:solidFill>
-                  <a:srgbClr val="047857"/>
+            <a:pPr algn="ctr" fontAlgn="auto">
+              <a:spcBef>
+                <a:spcPts val="0"/>
+              </a:spcBef>
+              <a:spcAft>
+                <a:spcPts val="0"/>
+              </a:spcAft>
+              <a:defRPr/>
+            </a:pPr>
+            <a:endParaRPr lang="en-US" dirty="0">
+              <a:solidFill>
+                <a:schemeClr val="accent2">
+                  <a:lumMod val="75000"/>
+                </a:schemeClr>
+              </a:solidFill>
+              <a:latin typeface="+mn-lt"/>
+              <a:ea typeface="+mn-ea"/>
+            </a:endParaRPr>
+          </a:p>
+        </p:txBody>
+      </p:sp>
+      <p:sp>
+        <p:nvSpPr>
+          <p:cNvPr id="17409" name="Title 1"/>
+          <p:cNvSpPr>
+            <a:spLocks noGrp="1"/>
+          </p:cNvSpPr>
+          <p:nvPr>
+            <p:ph type="title"/>
+          </p:nvPr>
+        </p:nvSpPr>
+        <p:spPr>
+          <a:xfrm>
+            <a:off x="609904" y="-47548"/>
+            <a:ext cx="8778240" cy="1143000"/>
+          </a:xfrm>
+        </p:spPr>
+        <p:txBody>
+          <a:bodyPr/>
+          <a:lstStyle/>
+          <a:p>
+            <a:r>
+              <a:rPr sz="3400"/>
+              <a:t>TECHNICAL APPROACH</a:t>
+            </a:r>
+          </a:p>
+        </p:txBody>
+      </p:sp>
+      <p:sp>
+        <p:nvSpPr>
+          <p:cNvPr id="6" name="Slide Number Placeholder 5"/>
+          <p:cNvSpPr>
+            <a:spLocks noGrp="1"/>
+          </p:cNvSpPr>
+          <p:nvPr>
+            <p:ph type="sldNum" sz="quarter" idx="12"/>
+          </p:nvPr>
+        </p:nvSpPr>
+        <p:spPr/>
+        <p:txBody>
+          <a:bodyPr/>
+          <a:lstStyle/>
+          <a:p>
+            <a:fld id="{677C3CE7-23F7-4828-823C-E0205DF2CF97}" type="slidenum">
+              <a:rPr lang="en-US" b="1">
+                <a:solidFill>
+                  <a:schemeClr val="bg1"/>
                 </a:solidFill>
               </a:rPr>
-              <a:t>HOW IT WORKS</a:t>
-            </a:r>
-          </a:p>
-        </p:txBody>
-      </p:sp>
-      <p:sp>
-        <p:nvSpPr>
-          <p:cNvPr id="3" name="TextBox 2"/>
-          <p:cNvSpPr txBox="1"/>
+              <a:pPr/>
+              <a:t>3</a:t>
+            </a:fld>
+            <a:endParaRPr lang="en-US" b="1" dirty="0">
+              <a:solidFill>
+                <a:schemeClr val="bg1"/>
+              </a:solidFill>
+            </a:endParaRPr>
+          </a:p>
+        </p:txBody>
+      </p:sp>
+      <p:sp>
+        <p:nvSpPr>
+          <p:cNvPr id="7" name="Footer Placeholder 6"/>
+          <p:cNvSpPr>
+            <a:spLocks noGrp="1"/>
+          </p:cNvSpPr>
+          <p:nvPr>
+            <p:ph type="ftr" sz="quarter" idx="11"/>
+          </p:nvPr>
+        </p:nvSpPr>
+        <p:spPr>
+          <a:xfrm>
+            <a:off x="4648200" y="6356353"/>
+            <a:ext cx="3204000" cy="365125"/>
+          </a:xfrm>
+        </p:spPr>
+        <p:txBody>
+          <a:bodyPr/>
+          <a:lstStyle/>
+          <a:p>
+            <a:pPr>
+              <a:defRPr/>
+            </a:pPr>
+            <a:r>
+              <a:rPr lang="en-US">
+                <a:solidFill>
+                  <a:schemeClr val="bg1"/>
+                </a:solidFill>
+              </a:rPr>
+              <a:t>@SIH Idea submission- Template</a:t>
+            </a:r>
+            <a:endParaRPr lang="en-US" dirty="0">
+              <a:solidFill>
+                <a:schemeClr val="bg1"/>
+              </a:solidFill>
+            </a:endParaRPr>
+          </a:p>
+        </p:txBody>
+      </p:sp>
+      <p:sp>
+        <p:nvSpPr>
+          <p:cNvPr id="11" name="Oval 10" descr="Your startup LOGO">
+            <a:extLst>
+              <a:ext uri="{FF2B5EF4-FFF2-40B4-BE49-F238E27FC236}">
+                <a16:creationId xmlns:a16="http://schemas.microsoft.com/office/drawing/2014/main" id="{5DBCE864-823D-4A13-9607-5DA1F0ED5FB8}"/>
+              </a:ext>
+              <a:ext uri="{C183D7F6-B498-43B3-948B-1728B52AA6E4}">
+                <adec:decorative xmlns:adec="http://schemas.microsoft.com/office/drawing/2017/decorative" val="0"/>
+              </a:ext>
+            </a:extLst>
+          </p:cNvPr>
+          <p:cNvSpPr/>
           <p:nvPr/>
         </p:nvSpPr>
         <p:spPr>
           <a:xfrm>
-            <a:off x="457200" y="548640"/>
-            <a:ext cx="10058400" cy="548640"/>
+            <a:off x="329773" y="252246"/>
+            <a:ext cx="1417320" cy="807334"/>
+          </a:xfrm>
+          <a:prstGeom prst="ellipse">
+            <a:avLst/>
+          </a:prstGeom>
+        </p:spPr>
+        <p:style>
+          <a:lnRef idx="2">
+            <a:schemeClr val="accent4"/>
+          </a:lnRef>
+          <a:fillRef idx="1">
+            <a:schemeClr val="lt1"/>
+          </a:fillRef>
+          <a:effectRef idx="0">
+            <a:schemeClr val="accent4"/>
+          </a:effectRef>
+          <a:fontRef idx="minor">
+            <a:schemeClr val="dk1"/>
+          </a:fontRef>
+        </p:style>
+        <p:txBody>
+          <a:bodyPr rtlCol="0" anchor="ctr" wrap="none"/>
+          <a:lstStyle/>
+          <a:p>
+            <a:pPr algn="ctr"/>
+            <a:r>
+              <a:rPr sz="1300"/>
+              <a:t>Kisan360</a:t>
+            </a:r>
+          </a:p>
+        </p:txBody>
+      </p:sp>
+      <p:pic>
+        <p:nvPicPr>
+          <p:cNvPr id="12" name="Picture 11"/>
+          <p:cNvPicPr>
+            <a:picLocks noChangeAspect="1"/>
+          </p:cNvPicPr>
+          <p:nvPr/>
+        </p:nvPicPr>
+        <p:blipFill>
+          <a:blip r:embed="rId3">
+            <a:extLst>
+              <a:ext uri="{28A0092B-C50C-407E-A947-70E740481C1C}">
+                <a14:useLocalDpi xmlns:a14="http://schemas.microsoft.com/office/drawing/2010/main" val="0"/>
+              </a:ext>
+            </a:extLst>
+          </a:blip>
+          <a:stretch>
+            <a:fillRect/>
+          </a:stretch>
+        </p:blipFill>
+        <p:spPr>
+          <a:xfrm>
+            <a:off x="9780086" y="1500"/>
+            <a:ext cx="2249850" cy="1062337"/>
           </a:xfrm>
           <a:prstGeom prst="rect">
             <a:avLst/>
           </a:prstGeom>
-          <a:noFill/>
-        </p:spPr>
-        <p:txBody>
-          <a:bodyPr wrap="square">
-            <a:spAutoFit/>
-          </a:bodyPr>
-          <a:lstStyle/>
-          <a:p>
-            <a:pPr algn="l"/>
-            <a:r>
-              <a:rPr sz="2200" b="1">
-                <a:solidFill>
-                  <a:srgbClr val="1C1917"/>
-                </a:solidFill>
-              </a:rPr>
-              <a:t>The farmer's selling journey — from confusion to cash</a:t>
-            </a:r>
-          </a:p>
-        </p:txBody>
-      </p:sp>
-      <p:sp>
-        <p:nvSpPr>
-          <p:cNvPr id="4" name="Oval 3"/>
+        </p:spPr>
+      </p:pic>
+      <p:pic>
+        <p:nvPicPr>
+          <p:cNvPr id="17411" name="Picture 17410" descr="kisan360-mark.png"/>
+          <p:cNvPicPr>
+            <a:picLocks noChangeAspect="1"/>
+          </p:cNvPicPr>
+          <p:nvPr/>
+        </p:nvPicPr>
+        <p:blipFill>
+          <a:blip r:embed="rId4"/>
+          <a:stretch>
+            <a:fillRect/>
+          </a:stretch>
+        </p:blipFill>
+        <p:spPr>
+          <a:xfrm>
+            <a:off x="11631168" y="6327648"/>
+            <a:ext cx="411480" cy="411480"/>
+          </a:xfrm>
+          <a:prstGeom prst="rect">
+            <a:avLst/>
+          </a:prstGeom>
+        </p:spPr>
+      </p:pic>
+      <p:sp>
+        <p:nvSpPr>
+          <p:cNvPr id="17412" name="Rounded Rectangle 17411"/>
           <p:cNvSpPr/>
           <p:nvPr/>
         </p:nvSpPr>
         <p:spPr>
           <a:xfrm>
-            <a:off x="1005840" y="1371600"/>
-            <a:ext cx="457200" cy="457200"/>
-          </a:xfrm>
-          <a:prstGeom prst="ellipse">
+            <a:off x="685800" y="1234440"/>
+            <a:ext cx="1481328" cy="731520"/>
+          </a:xfrm>
+          <a:prstGeom prst="roundRect">
             <a:avLst/>
           </a:prstGeom>
           <a:solidFill>
-            <a:srgbClr val="047857"/>
+            <a:srgbClr val="1F3864"/>
           </a:solidFill>
           <a:ln>
             <a:noFill/>
@@ -7289,164 +7778,73 @@
           </a:fontRef>
         </p:style>
         <p:txBody>
-          <a:bodyPr rtlCol="0" anchor="ctr" wrap="none"/>
+          <a:bodyPr wrap="square" rtlCol="0" anchor="ctr"/>
           <a:lstStyle/>
           <a:p>
             <a:pPr algn="ctr"/>
             <a:r>
-              <a:rPr sz="1800" b="1">
+              <a:rPr sz="1200" b="1">
                 <a:solidFill>
                   <a:srgbClr val="FFFFFF"/>
                 </a:solidFill>
+                <a:latin typeface="Arial"/>
               </a:rPr>
-              <a:t>1</a:t>
-            </a:r>
-          </a:p>
-        </p:txBody>
-      </p:sp>
-      <p:sp>
-        <p:nvSpPr>
-          <p:cNvPr id="5" name="TextBox 4"/>
-          <p:cNvSpPr txBox="1"/>
+              <a:t>AGMARKNET</a:t>
+            </a:r>
+          </a:p>
+        </p:txBody>
+      </p:sp>
+      <p:cxnSp>
+        <p:nvCxnSpPr>
+          <p:cNvPr id="17413" name="Connector 17412"/>
+          <p:cNvCxnSpPr/>
           <p:nvPr/>
-        </p:nvSpPr>
-        <p:spPr>
-          <a:xfrm>
-            <a:off x="365760" y="1920240"/>
-            <a:ext cx="1828800" cy="274320"/>
-          </a:xfrm>
-          <a:prstGeom prst="rect">
+        </p:nvCxnSpPr>
+        <p:spPr>
+          <a:xfrm>
+            <a:off x="2167128" y="1600200"/>
+            <a:ext cx="292608" cy="0"/>
+          </a:xfrm>
+          <a:prstGeom prst="line">
             <a:avLst/>
           </a:prstGeom>
-          <a:noFill/>
-        </p:spPr>
-        <p:txBody>
-          <a:bodyPr wrap="square">
-            <a:spAutoFit/>
-          </a:bodyPr>
-          <a:lstStyle/>
-          <a:p>
-            <a:pPr algn="ctr"/>
-            <a:r>
-              <a:rPr sz="1300" b="1">
-                <a:solidFill>
-                  <a:srgbClr val="1C1917"/>
-                </a:solidFill>
-              </a:rPr>
-              <a:t>INFORM</a:t>
-            </a:r>
-          </a:p>
-        </p:txBody>
-      </p:sp>
-      <p:sp>
-        <p:nvSpPr>
-          <p:cNvPr id="6" name="TextBox 5"/>
-          <p:cNvSpPr txBox="1"/>
-          <p:nvPr/>
-        </p:nvSpPr>
-        <p:spPr>
-          <a:xfrm>
-            <a:off x="365760" y="2240280"/>
-            <a:ext cx="1828800" cy="548640"/>
-          </a:xfrm>
-          <a:prstGeom prst="rect">
-            <a:avLst/>
-          </a:prstGeom>
-          <a:noFill/>
-        </p:spPr>
-        <p:txBody>
-          <a:bodyPr wrap="square">
-            <a:spAutoFit/>
-          </a:bodyPr>
-          <a:lstStyle/>
-          <a:p>
-            <a:pPr algn="ctr"/>
-            <a:r>
-              <a:rPr sz="900" b="0">
-                <a:solidFill>
-                  <a:srgbClr val="57534E"/>
-                </a:solidFill>
-              </a:rPr>
-              <a:t>See live mandi
-prices on dashboard</a:t>
-            </a:r>
-          </a:p>
-        </p:txBody>
-      </p:sp>
-      <p:pic>
-        <p:nvPicPr>
-          <p:cNvPr id="7" name="Picture 6" descr="ppt-dashboard.png"/>
-          <p:cNvPicPr>
-            <a:picLocks noChangeAspect="1"/>
-          </p:cNvPicPr>
-          <p:nvPr/>
-        </p:nvPicPr>
-        <p:blipFill>
-          <a:blip r:embed="rId6"/>
-          <a:stretch>
-            <a:fillRect/>
-          </a:stretch>
-        </p:blipFill>
-        <p:spPr>
-          <a:xfrm>
-            <a:off x="411480" y="2834640"/>
-            <a:ext cx="1737360" cy="1280160"/>
-          </a:xfrm>
-          <a:prstGeom prst="rect">
-            <a:avLst/>
-          </a:prstGeom>
-        </p:spPr>
-      </p:pic>
-      <p:sp>
-        <p:nvSpPr>
-          <p:cNvPr id="8" name="TextBox 7"/>
-          <p:cNvSpPr txBox="1"/>
-          <p:nvPr/>
-        </p:nvSpPr>
-        <p:spPr>
-          <a:xfrm>
-            <a:off x="2240280" y="1463040"/>
-            <a:ext cx="274320" cy="274320"/>
-          </a:xfrm>
-          <a:prstGeom prst="rect">
-            <a:avLst/>
-          </a:prstGeom>
-          <a:noFill/>
-        </p:spPr>
-        <p:txBody>
-          <a:bodyPr wrap="square">
-            <a:spAutoFit/>
-          </a:bodyPr>
-          <a:lstStyle/>
-          <a:p>
-            <a:pPr algn="ctr"/>
-            <a:r>
-              <a:rPr sz="1600" b="1">
-                <a:solidFill>
-                  <a:srgbClr val="047857"/>
-                </a:solidFill>
-              </a:rPr>
-              <a:t>-&gt;</a:t>
-            </a:r>
-          </a:p>
-        </p:txBody>
-      </p:sp>
-      <p:sp>
-        <p:nvSpPr>
-          <p:cNvPr id="9" name="Oval 8"/>
+          <a:ln w="28575">
+            <a:solidFill>
+              <a:srgbClr val="1F3864"/>
+            </a:solidFill>
+          </a:ln>
+        </p:spPr>
+        <p:style>
+          <a:lnRef idx="2">
+            <a:schemeClr val="accent1"/>
+          </a:lnRef>
+          <a:fillRef idx="0">
+            <a:schemeClr val="accent1"/>
+          </a:fillRef>
+          <a:effectRef idx="1">
+            <a:schemeClr val="accent1"/>
+          </a:effectRef>
+          <a:fontRef idx="minor">
+            <a:schemeClr val="tx1"/>
+          </a:fontRef>
+        </p:style>
+      </p:cxnSp>
+      <p:sp>
+        <p:nvSpPr>
+          <p:cNvPr id="17414" name="Rounded Rectangle 17413"/>
           <p:cNvSpPr/>
           <p:nvPr/>
         </p:nvSpPr>
         <p:spPr>
           <a:xfrm>
-            <a:off x="3108960" y="1371600"/>
-            <a:ext cx="457200" cy="457200"/>
-          </a:xfrm>
-          <a:prstGeom prst="ellipse">
+            <a:off x="2459736" y="1234440"/>
+            <a:ext cx="1481328" cy="731520"/>
+          </a:xfrm>
+          <a:prstGeom prst="roundRect">
             <a:avLst/>
           </a:prstGeom>
           <a:solidFill>
-            <a:srgbClr val="047857"/>
+            <a:srgbClr val="1F3864"/>
           </a:solidFill>
           <a:ln>
             <a:noFill/>
@@ -7467,160 +7865,69 @@
           </a:fontRef>
         </p:style>
         <p:txBody>
-          <a:bodyPr rtlCol="0" anchor="ctr" wrap="none"/>
+          <a:bodyPr wrap="square" rtlCol="0" anchor="ctr"/>
           <a:lstStyle/>
           <a:p>
             <a:pPr algn="ctr"/>
             <a:r>
-              <a:rPr sz="1800" b="1">
+              <a:rPr sz="1200" b="1">
                 <a:solidFill>
                   <a:srgbClr val="FFFFFF"/>
                 </a:solidFill>
+                <a:latin typeface="Arial"/>
               </a:rPr>
-              <a:t>2</a:t>
-            </a:r>
-          </a:p>
-        </p:txBody>
-      </p:sp>
-      <p:sp>
-        <p:nvSpPr>
-          <p:cNvPr id="10" name="TextBox 9"/>
-          <p:cNvSpPr txBox="1"/>
+              <a:t>Cache</a:t>
+            </a:r>
+          </a:p>
+        </p:txBody>
+      </p:sp>
+      <p:cxnSp>
+        <p:nvCxnSpPr>
+          <p:cNvPr id="17415" name="Connector 17414"/>
+          <p:cNvCxnSpPr/>
           <p:nvPr/>
-        </p:nvSpPr>
-        <p:spPr>
-          <a:xfrm>
-            <a:off x="2468880" y="1920240"/>
-            <a:ext cx="1828800" cy="274320"/>
-          </a:xfrm>
-          <a:prstGeom prst="rect">
+        </p:nvCxnSpPr>
+        <p:spPr>
+          <a:xfrm>
+            <a:off x="3941064" y="1600200"/>
+            <a:ext cx="292608" cy="0"/>
+          </a:xfrm>
+          <a:prstGeom prst="line">
             <a:avLst/>
           </a:prstGeom>
-          <a:noFill/>
-        </p:spPr>
-        <p:txBody>
-          <a:bodyPr wrap="square">
-            <a:spAutoFit/>
-          </a:bodyPr>
-          <a:lstStyle/>
-          <a:p>
-            <a:pPr algn="ctr"/>
-            <a:r>
-              <a:rPr sz="1300" b="1">
-                <a:solidFill>
-                  <a:srgbClr val="1C1917"/>
-                </a:solidFill>
-              </a:rPr>
-              <a:t>COMPARE</a:t>
-            </a:r>
-          </a:p>
-        </p:txBody>
-      </p:sp>
-      <p:sp>
-        <p:nvSpPr>
-          <p:cNvPr id="11" name="TextBox 10"/>
-          <p:cNvSpPr txBox="1"/>
-          <p:nvPr/>
-        </p:nvSpPr>
-        <p:spPr>
-          <a:xfrm>
-            <a:off x="2468880" y="2240280"/>
-            <a:ext cx="1828800" cy="548640"/>
-          </a:xfrm>
-          <a:prstGeom prst="rect">
-            <a:avLst/>
-          </a:prstGeom>
-          <a:noFill/>
-        </p:spPr>
-        <p:txBody>
-          <a:bodyPr wrap="square">
-            <a:spAutoFit/>
-          </a:bodyPr>
-          <a:lstStyle/>
-          <a:p>
-            <a:pPr algn="ctr"/>
-            <a:r>
-              <a:rPr sz="900" b="0">
-                <a:solidFill>
-                  <a:srgbClr val="57534E"/>
-                </a:solidFill>
-              </a:rPr>
-              <a:t>Net-realization ranks
-mandis by take-home</a:t>
-            </a:r>
-          </a:p>
-        </p:txBody>
-      </p:sp>
-      <p:pic>
-        <p:nvPicPr>
-          <p:cNvPr id="12" name="Picture 11" descr="ppt-netreal.png"/>
-          <p:cNvPicPr>
-            <a:picLocks noChangeAspect="1"/>
-          </p:cNvPicPr>
-          <p:nvPr/>
-        </p:nvPicPr>
-        <p:blipFill>
-          <a:blip r:embed="rId7"/>
-          <a:stretch>
-            <a:fillRect/>
-          </a:stretch>
-        </p:blipFill>
-        <p:spPr>
-          <a:xfrm>
-            <a:off x="2514600" y="2834640"/>
-            <a:ext cx="1737360" cy="1280160"/>
-          </a:xfrm>
-          <a:prstGeom prst="rect">
-            <a:avLst/>
-          </a:prstGeom>
-        </p:spPr>
-      </p:pic>
-      <p:sp>
-        <p:nvSpPr>
-          <p:cNvPr id="13" name="TextBox 12"/>
-          <p:cNvSpPr txBox="1"/>
-          <p:nvPr/>
-        </p:nvSpPr>
-        <p:spPr>
-          <a:xfrm>
-            <a:off x="4343400" y="1463040"/>
-            <a:ext cx="274320" cy="274320"/>
-          </a:xfrm>
-          <a:prstGeom prst="rect">
-            <a:avLst/>
-          </a:prstGeom>
-          <a:noFill/>
-        </p:spPr>
-        <p:txBody>
-          <a:bodyPr wrap="square">
-            <a:spAutoFit/>
-          </a:bodyPr>
-          <a:lstStyle/>
-          <a:p>
-            <a:pPr algn="ctr"/>
-            <a:r>
-              <a:rPr sz="1600" b="1">
-                <a:solidFill>
-                  <a:srgbClr val="047857"/>
-                </a:solidFill>
-              </a:rPr>
-              <a:t>-&gt;</a:t>
-            </a:r>
-          </a:p>
-        </p:txBody>
-      </p:sp>
-      <p:sp>
-        <p:nvSpPr>
-          <p:cNvPr id="14" name="Oval 13"/>
+          <a:ln w="28575">
+            <a:solidFill>
+              <a:srgbClr val="1F3864"/>
+            </a:solidFill>
+          </a:ln>
+        </p:spPr>
+        <p:style>
+          <a:lnRef idx="2">
+            <a:schemeClr val="accent1"/>
+          </a:lnRef>
+          <a:fillRef idx="0">
+            <a:schemeClr val="accent1"/>
+          </a:fillRef>
+          <a:effectRef idx="1">
+            <a:schemeClr val="accent1"/>
+          </a:effectRef>
+          <a:fontRef idx="minor">
+            <a:schemeClr val="tx1"/>
+          </a:fontRef>
+        </p:style>
+      </p:cxnSp>
+      <p:sp>
+        <p:nvSpPr>
+          <p:cNvPr id="17416" name="Rounded Rectangle 17415"/>
           <p:cNvSpPr/>
           <p:nvPr/>
         </p:nvSpPr>
         <p:spPr>
           <a:xfrm>
-            <a:off x="5212080" y="1371600"/>
-            <a:ext cx="457200" cy="457200"/>
-          </a:xfrm>
-          <a:prstGeom prst="ellipse">
+            <a:off x="4233672" y="1234440"/>
+            <a:ext cx="1481328" cy="731520"/>
+          </a:xfrm>
+          <a:prstGeom prst="roundRect">
             <a:avLst/>
           </a:prstGeom>
           <a:solidFill>
@@ -7645,160 +7952,69 @@
           </a:fontRef>
         </p:style>
         <p:txBody>
-          <a:bodyPr rtlCol="0" anchor="ctr" wrap="none"/>
+          <a:bodyPr wrap="square" rtlCol="0" anchor="ctr"/>
           <a:lstStyle/>
           <a:p>
             <a:pPr algn="ctr"/>
             <a:r>
-              <a:rPr sz="1800" b="1">
+              <a:rPr sz="1200" b="1">
                 <a:solidFill>
                   <a:srgbClr val="FFFFFF"/>
                 </a:solidFill>
+                <a:latin typeface="Arial"/>
               </a:rPr>
-              <a:t>3</a:t>
-            </a:r>
-          </a:p>
-        </p:txBody>
-      </p:sp>
-      <p:sp>
-        <p:nvSpPr>
-          <p:cNvPr id="15" name="TextBox 14"/>
-          <p:cNvSpPr txBox="1"/>
+              <a:t>Net Engine</a:t>
+            </a:r>
+          </a:p>
+        </p:txBody>
+      </p:sp>
+      <p:cxnSp>
+        <p:nvCxnSpPr>
+          <p:cNvPr id="17417" name="Connector 17416"/>
+          <p:cNvCxnSpPr/>
           <p:nvPr/>
-        </p:nvSpPr>
-        <p:spPr>
-          <a:xfrm>
-            <a:off x="4572000" y="1920240"/>
-            <a:ext cx="1828800" cy="274320"/>
-          </a:xfrm>
-          <a:prstGeom prst="rect">
+        </p:nvCxnSpPr>
+        <p:spPr>
+          <a:xfrm>
+            <a:off x="5715000" y="1600200"/>
+            <a:ext cx="292608" cy="0"/>
+          </a:xfrm>
+          <a:prstGeom prst="line">
             <a:avLst/>
           </a:prstGeom>
-          <a:noFill/>
-        </p:spPr>
-        <p:txBody>
-          <a:bodyPr wrap="square">
-            <a:spAutoFit/>
-          </a:bodyPr>
-          <a:lstStyle/>
-          <a:p>
-            <a:pPr algn="ctr"/>
-            <a:r>
-              <a:rPr sz="1300" b="1">
-                <a:solidFill>
-                  <a:srgbClr val="1C1917"/>
-                </a:solidFill>
-              </a:rPr>
-              <a:t>DECIDE</a:t>
-            </a:r>
-          </a:p>
-        </p:txBody>
-      </p:sp>
-      <p:sp>
-        <p:nvSpPr>
-          <p:cNvPr id="16" name="TextBox 15"/>
-          <p:cNvSpPr txBox="1"/>
-          <p:nvPr/>
-        </p:nvSpPr>
-        <p:spPr>
-          <a:xfrm>
-            <a:off x="4572000" y="2240280"/>
-            <a:ext cx="1828800" cy="548640"/>
-          </a:xfrm>
-          <a:prstGeom prst="rect">
-            <a:avLst/>
-          </a:prstGeom>
-          <a:noFill/>
-        </p:spPr>
-        <p:txBody>
-          <a:bodyPr wrap="square">
-            <a:spAutoFit/>
-          </a:bodyPr>
-          <a:lstStyle/>
-          <a:p>
-            <a:pPr algn="ctr"/>
-            <a:r>
-              <a:rPr sz="900" b="0">
-                <a:solidFill>
-                  <a:srgbClr val="57534E"/>
-                </a:solidFill>
-              </a:rPr>
-              <a:t>Sell now / store /
-FPO pool</a:t>
-            </a:r>
-          </a:p>
-        </p:txBody>
-      </p:sp>
-      <p:pic>
-        <p:nvPicPr>
-          <p:cNvPr id="17" name="Picture 16" descr="ppt-grade.png"/>
-          <p:cNvPicPr>
-            <a:picLocks noChangeAspect="1"/>
-          </p:cNvPicPr>
-          <p:nvPr/>
-        </p:nvPicPr>
-        <p:blipFill>
-          <a:blip r:embed="rId8"/>
-          <a:stretch>
-            <a:fillRect/>
-          </a:stretch>
-        </p:blipFill>
-        <p:spPr>
-          <a:xfrm>
-            <a:off x="4617720" y="2834640"/>
-            <a:ext cx="1737360" cy="1280160"/>
-          </a:xfrm>
-          <a:prstGeom prst="rect">
-            <a:avLst/>
-          </a:prstGeom>
-        </p:spPr>
-      </p:pic>
-      <p:sp>
-        <p:nvSpPr>
-          <p:cNvPr id="18" name="TextBox 17"/>
-          <p:cNvSpPr txBox="1"/>
-          <p:nvPr/>
-        </p:nvSpPr>
-        <p:spPr>
-          <a:xfrm>
-            <a:off x="6446520" y="1463040"/>
-            <a:ext cx="274320" cy="274320"/>
-          </a:xfrm>
-          <a:prstGeom prst="rect">
-            <a:avLst/>
-          </a:prstGeom>
-          <a:noFill/>
-        </p:spPr>
-        <p:txBody>
-          <a:bodyPr wrap="square">
-            <a:spAutoFit/>
-          </a:bodyPr>
-          <a:lstStyle/>
-          <a:p>
-            <a:pPr algn="ctr"/>
-            <a:r>
-              <a:rPr sz="1600" b="1">
-                <a:solidFill>
-                  <a:srgbClr val="047857"/>
-                </a:solidFill>
-              </a:rPr>
-              <a:t>-&gt;</a:t>
-            </a:r>
-          </a:p>
-        </p:txBody>
-      </p:sp>
-      <p:sp>
-        <p:nvSpPr>
-          <p:cNvPr id="19" name="Oval 18"/>
+          <a:ln w="28575">
+            <a:solidFill>
+              <a:srgbClr val="1F3864"/>
+            </a:solidFill>
+          </a:ln>
+        </p:spPr>
+        <p:style>
+          <a:lnRef idx="2">
+            <a:schemeClr val="accent1"/>
+          </a:lnRef>
+          <a:fillRef idx="0">
+            <a:schemeClr val="accent1"/>
+          </a:fillRef>
+          <a:effectRef idx="1">
+            <a:schemeClr val="accent1"/>
+          </a:effectRef>
+          <a:fontRef idx="minor">
+            <a:schemeClr val="tx1"/>
+          </a:fontRef>
+        </p:style>
+      </p:cxnSp>
+      <p:sp>
+        <p:nvSpPr>
+          <p:cNvPr id="17418" name="Rounded Rectangle 17417"/>
           <p:cNvSpPr/>
           <p:nvPr/>
         </p:nvSpPr>
         <p:spPr>
           <a:xfrm>
-            <a:off x="7315200" y="1371600"/>
-            <a:ext cx="457200" cy="457200"/>
-          </a:xfrm>
-          <a:prstGeom prst="ellipse">
+            <a:off x="6007608" y="1234440"/>
+            <a:ext cx="1481328" cy="731520"/>
+          </a:xfrm>
+          <a:prstGeom prst="roundRect">
             <a:avLst/>
           </a:prstGeom>
           <a:solidFill>
@@ -7823,160 +8039,69 @@
           </a:fontRef>
         </p:style>
         <p:txBody>
-          <a:bodyPr rtlCol="0" anchor="ctr" wrap="none"/>
+          <a:bodyPr wrap="square" rtlCol="0" anchor="ctr"/>
           <a:lstStyle/>
           <a:p>
             <a:pPr algn="ctr"/>
             <a:r>
-              <a:rPr sz="1800" b="1">
+              <a:rPr sz="1200" b="1">
                 <a:solidFill>
                   <a:srgbClr val="FFFFFF"/>
                 </a:solidFill>
+                <a:latin typeface="Arial"/>
               </a:rPr>
-              <a:t>4</a:t>
-            </a:r>
-          </a:p>
-        </p:txBody>
-      </p:sp>
-      <p:sp>
-        <p:nvSpPr>
-          <p:cNvPr id="20" name="TextBox 19"/>
-          <p:cNvSpPr txBox="1"/>
+              <a:t>Pathways</a:t>
+            </a:r>
+          </a:p>
+        </p:txBody>
+      </p:sp>
+      <p:cxnSp>
+        <p:nvCxnSpPr>
+          <p:cNvPr id="17419" name="Connector 17418"/>
+          <p:cNvCxnSpPr/>
           <p:nvPr/>
-        </p:nvSpPr>
-        <p:spPr>
-          <a:xfrm>
-            <a:off x="6675120" y="1920240"/>
-            <a:ext cx="1828800" cy="274320"/>
-          </a:xfrm>
-          <a:prstGeom prst="rect">
+        </p:nvCxnSpPr>
+        <p:spPr>
+          <a:xfrm>
+            <a:off x="7488936" y="1600200"/>
+            <a:ext cx="292608" cy="0"/>
+          </a:xfrm>
+          <a:prstGeom prst="line">
             <a:avLst/>
           </a:prstGeom>
-          <a:noFill/>
-        </p:spPr>
-        <p:txBody>
-          <a:bodyPr wrap="square">
-            <a:spAutoFit/>
-          </a:bodyPr>
-          <a:lstStyle/>
-          <a:p>
-            <a:pPr algn="ctr"/>
-            <a:r>
-              <a:rPr sz="1300" b="1">
-                <a:solidFill>
-                  <a:srgbClr val="1C1917"/>
-                </a:solidFill>
-              </a:rPr>
-              <a:t>CONNECT</a:t>
-            </a:r>
-          </a:p>
-        </p:txBody>
-      </p:sp>
-      <p:sp>
-        <p:nvSpPr>
-          <p:cNvPr id="21" name="TextBox 20"/>
-          <p:cNvSpPr txBox="1"/>
-          <p:nvPr/>
-        </p:nvSpPr>
-        <p:spPr>
-          <a:xfrm>
-            <a:off x="6675120" y="2240280"/>
-            <a:ext cx="1828800" cy="548640"/>
-          </a:xfrm>
-          <a:prstGeom prst="rect">
-            <a:avLst/>
-          </a:prstGeom>
-          <a:noFill/>
-        </p:spPr>
-        <p:txBody>
-          <a:bodyPr wrap="square">
-            <a:spAutoFit/>
-          </a:bodyPr>
-          <a:lstStyle/>
-          <a:p>
-            <a:pPr algn="ctr"/>
-            <a:r>
-              <a:rPr sz="900" b="0">
-                <a:solidFill>
-                  <a:srgbClr val="57534E"/>
-                </a:solidFill>
-              </a:rPr>
-              <a:t>Buyer matching with
-trust tiers</a:t>
-            </a:r>
-          </a:p>
-        </p:txBody>
-      </p:sp>
-      <p:pic>
-        <p:nvPicPr>
-          <p:cNvPr id="22" name="Picture 21" descr="ppt-trade.png"/>
-          <p:cNvPicPr>
-            <a:picLocks noChangeAspect="1"/>
-          </p:cNvPicPr>
-          <p:nvPr/>
-        </p:nvPicPr>
-        <p:blipFill>
-          <a:blip r:embed="rId9"/>
-          <a:stretch>
-            <a:fillRect/>
-          </a:stretch>
-        </p:blipFill>
-        <p:spPr>
-          <a:xfrm>
-            <a:off x="6720840" y="2834640"/>
-            <a:ext cx="1737360" cy="1280160"/>
-          </a:xfrm>
-          <a:prstGeom prst="rect">
-            <a:avLst/>
-          </a:prstGeom>
-        </p:spPr>
-      </p:pic>
-      <p:sp>
-        <p:nvSpPr>
-          <p:cNvPr id="23" name="TextBox 22"/>
-          <p:cNvSpPr txBox="1"/>
-          <p:nvPr/>
-        </p:nvSpPr>
-        <p:spPr>
-          <a:xfrm>
-            <a:off x="8549640" y="1463040"/>
-            <a:ext cx="274320" cy="274320"/>
-          </a:xfrm>
-          <a:prstGeom prst="rect">
-            <a:avLst/>
-          </a:prstGeom>
-          <a:noFill/>
-        </p:spPr>
-        <p:txBody>
-          <a:bodyPr wrap="square">
-            <a:spAutoFit/>
-          </a:bodyPr>
-          <a:lstStyle/>
-          <a:p>
-            <a:pPr algn="ctr"/>
-            <a:r>
-              <a:rPr sz="1600" b="1">
-                <a:solidFill>
-                  <a:srgbClr val="047857"/>
-                </a:solidFill>
-              </a:rPr>
-              <a:t>-&gt;</a:t>
-            </a:r>
-          </a:p>
-        </p:txBody>
-      </p:sp>
-      <p:sp>
-        <p:nvSpPr>
-          <p:cNvPr id="24" name="Oval 23"/>
+          <a:ln w="28575">
+            <a:solidFill>
+              <a:srgbClr val="1F3864"/>
+            </a:solidFill>
+          </a:ln>
+        </p:spPr>
+        <p:style>
+          <a:lnRef idx="2">
+            <a:schemeClr val="accent1"/>
+          </a:lnRef>
+          <a:fillRef idx="0">
+            <a:schemeClr val="accent1"/>
+          </a:fillRef>
+          <a:effectRef idx="1">
+            <a:schemeClr val="accent1"/>
+          </a:effectRef>
+          <a:fontRef idx="minor">
+            <a:schemeClr val="tx1"/>
+          </a:fontRef>
+        </p:style>
+      </p:cxnSp>
+      <p:sp>
+        <p:nvSpPr>
+          <p:cNvPr id="17420" name="Rounded Rectangle 17419"/>
           <p:cNvSpPr/>
           <p:nvPr/>
         </p:nvSpPr>
         <p:spPr>
           <a:xfrm>
-            <a:off x="9418320" y="1371600"/>
-            <a:ext cx="457200" cy="457200"/>
-          </a:xfrm>
-          <a:prstGeom prst="ellipse">
+            <a:off x="7781544" y="1234440"/>
+            <a:ext cx="1481328" cy="731520"/>
+          </a:xfrm>
+          <a:prstGeom prst="roundRect">
             <a:avLst/>
           </a:prstGeom>
           <a:solidFill>
@@ -8001,31 +8126,299 @@
           </a:fontRef>
         </p:style>
         <p:txBody>
-          <a:bodyPr rtlCol="0" anchor="ctr" wrap="none"/>
+          <a:bodyPr wrap="square" rtlCol="0" anchor="ctr"/>
           <a:lstStyle/>
           <a:p>
             <a:pPr algn="ctr"/>
             <a:r>
-              <a:rPr sz="1800" b="1">
+              <a:rPr sz="1200" b="1">
                 <a:solidFill>
                   <a:srgbClr val="FFFFFF"/>
                 </a:solidFill>
+                <a:latin typeface="Arial"/>
               </a:rPr>
-              <a:t>5</a:t>
-            </a:r>
-          </a:p>
-        </p:txBody>
-      </p:sp>
-      <p:sp>
-        <p:nvSpPr>
-          <p:cNvPr id="25" name="TextBox 24"/>
+              <a:t>Trade</a:t>
+            </a:r>
+          </a:p>
+        </p:txBody>
+      </p:sp>
+      <p:cxnSp>
+        <p:nvCxnSpPr>
+          <p:cNvPr id="17421" name="Connector 17420"/>
+          <p:cNvCxnSpPr/>
+          <p:nvPr/>
+        </p:nvCxnSpPr>
+        <p:spPr>
+          <a:xfrm>
+            <a:off x="9262872" y="1600200"/>
+            <a:ext cx="292608" cy="0"/>
+          </a:xfrm>
+          <a:prstGeom prst="line">
+            <a:avLst/>
+          </a:prstGeom>
+          <a:ln w="28575">
+            <a:solidFill>
+              <a:srgbClr val="1F3864"/>
+            </a:solidFill>
+          </a:ln>
+        </p:spPr>
+        <p:style>
+          <a:lnRef idx="2">
+            <a:schemeClr val="accent1"/>
+          </a:lnRef>
+          <a:fillRef idx="0">
+            <a:schemeClr val="accent1"/>
+          </a:fillRef>
+          <a:effectRef idx="1">
+            <a:schemeClr val="accent1"/>
+          </a:effectRef>
+          <a:fontRef idx="minor">
+            <a:schemeClr val="tx1"/>
+          </a:fontRef>
+        </p:style>
+      </p:cxnSp>
+      <p:sp>
+        <p:nvSpPr>
+          <p:cNvPr id="17422" name="Rounded Rectangle 17421"/>
+          <p:cNvSpPr/>
+          <p:nvPr/>
+        </p:nvSpPr>
+        <p:spPr>
+          <a:xfrm>
+            <a:off x="9555480" y="1234440"/>
+            <a:ext cx="1481328" cy="731520"/>
+          </a:xfrm>
+          <a:prstGeom prst="roundRect">
+            <a:avLst/>
+          </a:prstGeom>
+          <a:solidFill>
+            <a:srgbClr val="1F3864"/>
+          </a:solidFill>
+          <a:ln>
+            <a:noFill/>
+          </a:ln>
+        </p:spPr>
+        <p:style>
+          <a:lnRef idx="1">
+            <a:schemeClr val="accent1"/>
+          </a:lnRef>
+          <a:fillRef idx="3">
+            <a:schemeClr val="accent1"/>
+          </a:fillRef>
+          <a:effectRef idx="2">
+            <a:schemeClr val="accent1"/>
+          </a:effectRef>
+          <a:fontRef idx="minor">
+            <a:schemeClr val="lt1"/>
+          </a:fontRef>
+        </p:style>
+        <p:txBody>
+          <a:bodyPr wrap="square" rtlCol="0" anchor="ctr"/>
+          <a:lstStyle/>
+          <a:p>
+            <a:pPr algn="ctr"/>
+            <a:r>
+              <a:rPr sz="1200" b="1">
+                <a:solidFill>
+                  <a:srgbClr val="FFFFFF"/>
+                </a:solidFill>
+                <a:latin typeface="Arial"/>
+              </a:rPr>
+              <a:t>Receipt</a:t>
+            </a:r>
+          </a:p>
+        </p:txBody>
+      </p:sp>
+      <p:sp>
+        <p:nvSpPr>
+          <p:cNvPr id="17423" name="Rounded Rectangle 17422"/>
+          <p:cNvSpPr/>
+          <p:nvPr/>
+        </p:nvSpPr>
+        <p:spPr>
+          <a:xfrm>
+            <a:off x="7415784" y="2240280"/>
+            <a:ext cx="1554480" cy="685800"/>
+          </a:xfrm>
+          <a:prstGeom prst="roundRect">
+            <a:avLst/>
+          </a:prstGeom>
+          <a:solidFill>
+            <a:srgbClr val="FFFFFF"/>
+          </a:solidFill>
+          <a:ln w="19050">
+            <a:solidFill>
+              <a:srgbClr val="047857"/>
+            </a:solidFill>
+          </a:ln>
+        </p:spPr>
+        <p:style>
+          <a:lnRef idx="1">
+            <a:schemeClr val="accent1"/>
+          </a:lnRef>
+          <a:fillRef idx="3">
+            <a:schemeClr val="accent1"/>
+          </a:fillRef>
+          <a:effectRef idx="2">
+            <a:schemeClr val="accent1"/>
+          </a:effectRef>
+          <a:fontRef idx="minor">
+            <a:schemeClr val="lt1"/>
+          </a:fontRef>
+        </p:style>
+        <p:txBody>
+          <a:bodyPr wrap="square" rtlCol="0" anchor="ctr"/>
+          <a:lstStyle/>
+          <a:p>
+            <a:pPr algn="ctr"/>
+            <a:r>
+              <a:rPr sz="1000">
+                <a:solidFill>
+                  <a:srgbClr val="047857"/>
+                </a:solidFill>
+                <a:latin typeface="Arial"/>
+              </a:rPr>
+              <a:t>Grade AI
+AGMARK + vision</a:t>
+            </a:r>
+          </a:p>
+        </p:txBody>
+      </p:sp>
+      <p:cxnSp>
+        <p:nvCxnSpPr>
+          <p:cNvPr id="17424" name="Connector 17423"/>
+          <p:cNvCxnSpPr/>
+          <p:nvPr/>
+        </p:nvCxnSpPr>
+        <p:spPr>
+          <a:xfrm flipV="1">
+            <a:off x="8193024" y="1965960"/>
+            <a:ext cx="329184" cy="274320"/>
+          </a:xfrm>
+          <a:prstGeom prst="line">
+            <a:avLst/>
+          </a:prstGeom>
+          <a:ln w="19050">
+            <a:solidFill>
+              <a:srgbClr val="047857"/>
+            </a:solidFill>
+          </a:ln>
+        </p:spPr>
+        <p:style>
+          <a:lnRef idx="2">
+            <a:schemeClr val="accent1"/>
+          </a:lnRef>
+          <a:fillRef idx="0">
+            <a:schemeClr val="accent1"/>
+          </a:fillRef>
+          <a:effectRef idx="1">
+            <a:schemeClr val="accent1"/>
+          </a:effectRef>
+          <a:fontRef idx="minor">
+            <a:schemeClr val="tx1"/>
+          </a:fontRef>
+        </p:style>
+      </p:cxnSp>
+      <p:sp>
+        <p:nvSpPr>
+          <p:cNvPr id="17425" name="Rounded Rectangle 17424"/>
+          <p:cNvSpPr/>
+          <p:nvPr/>
+        </p:nvSpPr>
+        <p:spPr>
+          <a:xfrm>
+            <a:off x="9336024" y="2240280"/>
+            <a:ext cx="1554480" cy="685800"/>
+          </a:xfrm>
+          <a:prstGeom prst="roundRect">
+            <a:avLst/>
+          </a:prstGeom>
+          <a:solidFill>
+            <a:srgbClr val="FFFFFF"/>
+          </a:solidFill>
+          <a:ln w="19050">
+            <a:solidFill>
+              <a:srgbClr val="047857"/>
+            </a:solidFill>
+          </a:ln>
+        </p:spPr>
+        <p:style>
+          <a:lnRef idx="1">
+            <a:schemeClr val="accent1"/>
+          </a:lnRef>
+          <a:fillRef idx="3">
+            <a:schemeClr val="accent1"/>
+          </a:fillRef>
+          <a:effectRef idx="2">
+            <a:schemeClr val="accent1"/>
+          </a:effectRef>
+          <a:fontRef idx="minor">
+            <a:schemeClr val="lt1"/>
+          </a:fontRef>
+        </p:style>
+        <p:txBody>
+          <a:bodyPr wrap="square" rtlCol="0" anchor="ctr"/>
+          <a:lstStyle/>
+          <a:p>
+            <a:pPr algn="ctr"/>
+            <a:r>
+              <a:rPr sz="1000">
+                <a:solidFill>
+                  <a:srgbClr val="047857"/>
+                </a:solidFill>
+                <a:latin typeface="Arial"/>
+              </a:rPr>
+              <a:t>FPO Pool
+50 q bulk</a:t>
+            </a:r>
+          </a:p>
+        </p:txBody>
+      </p:sp>
+      <p:cxnSp>
+        <p:nvCxnSpPr>
+          <p:cNvPr id="17426" name="Connector 17425"/>
+          <p:cNvCxnSpPr/>
+          <p:nvPr/>
+        </p:nvCxnSpPr>
+        <p:spPr>
+          <a:xfrm flipH="1" flipV="1">
+            <a:off x="8522208" y="1965960"/>
+            <a:ext cx="1591056" cy="274320"/>
+          </a:xfrm>
+          <a:prstGeom prst="line">
+            <a:avLst/>
+          </a:prstGeom>
+          <a:ln w="19050">
+            <a:solidFill>
+              <a:srgbClr val="047857"/>
+            </a:solidFill>
+          </a:ln>
+        </p:spPr>
+        <p:style>
+          <a:lnRef idx="2">
+            <a:schemeClr val="accent1"/>
+          </a:lnRef>
+          <a:fillRef idx="0">
+            <a:schemeClr val="accent1"/>
+          </a:fillRef>
+          <a:effectRef idx="1">
+            <a:schemeClr val="accent1"/>
+          </a:effectRef>
+          <a:fontRef idx="minor">
+            <a:schemeClr val="tx1"/>
+          </a:fontRef>
+        </p:style>
+      </p:cxnSp>
+      <p:sp>
+        <p:nvSpPr>
+          <p:cNvPr id="17427" name="TextBox 17426"/>
           <p:cNvSpPr txBox="1"/>
           <p:nvPr/>
         </p:nvSpPr>
         <p:spPr>
           <a:xfrm>
-            <a:off x="8778240" y="1920240"/>
-            <a:ext cx="1828800" cy="274320"/>
+            <a:off x="685800" y="2999232"/>
+            <a:ext cx="10789920" cy="548640"/>
           </a:xfrm>
           <a:prstGeom prst="rect">
             <a:avLst/>
@@ -8038,28 +8431,28 @@
           </a:bodyPr>
           <a:lstStyle/>
           <a:p>
-            <a:pPr algn="ctr"/>
-            <a:r>
-              <a:rPr sz="1300" b="1">
-                <a:solidFill>
-                  <a:srgbClr val="1C1917"/>
-                </a:solidFill>
+            <a:r>
+              <a:rPr sz="1100" i="1">
+                <a:solidFill>
+                  <a:srgbClr val="5B5B5B"/>
+                </a:solidFill>
+                <a:latin typeface="Arial"/>
               </a:rPr>
-              <a:t>EXECUTE</a:t>
-            </a:r>
-          </a:p>
-        </p:txBody>
-      </p:sp>
-      <p:sp>
-        <p:nvSpPr>
-          <p:cNvPr id="26" name="TextBox 25"/>
+              <a:t>Data flow: every figure carries source + timestamp + assumption tags; simulated parts are labeled.</a:t>
+            </a:r>
+          </a:p>
+        </p:txBody>
+      </p:sp>
+      <p:sp>
+        <p:nvSpPr>
+          <p:cNvPr id="17428" name="TextBox 17427"/>
           <p:cNvSpPr txBox="1"/>
           <p:nvPr/>
         </p:nvSpPr>
         <p:spPr>
           <a:xfrm>
-            <a:off x="8778240" y="2240280"/>
-            <a:ext cx="1828800" cy="548640"/>
+            <a:off x="274320" y="3429000"/>
+            <a:ext cx="6035040" cy="2743200"/>
           </a:xfrm>
           <a:prstGeom prst="rect">
             <a:avLst/>
@@ -8072,53 +8465,149 @@
           </a:bodyPr>
           <a:lstStyle/>
           <a:p>
-            <a:pPr algn="ctr"/>
-            <a:r>
-              <a:rPr sz="900" b="0">
-                <a:solidFill>
-                  <a:srgbClr val="57534E"/>
+            <a:pPr>
+              <a:spcAft>
+                <a:spcPts val="400"/>
+              </a:spcAft>
+            </a:pPr>
+            <a:r>
+              <a:rPr sz="1100" b="1">
+                <a:solidFill>
+                  <a:srgbClr val="047857"/>
                 </a:solidFill>
               </a:rPr>
-              <a:t>Offer -&gt; escrow
--&gt; receipt</a:t>
+              <a:t>Tech stack</a:t>
+            </a:r>
+          </a:p>
+          <a:p>
+            <a:pPr lvl="1">
+              <a:spcAft>
+                <a:spcPts val="500"/>
+              </a:spcAft>
+            </a:pPr>
+          </a:p>
+          <a:p>
+            <a:pPr lvl="1">
+              <a:spcAft>
+                <a:spcPts val="500"/>
+              </a:spcAft>
+            </a:pPr>
+          </a:p>
+          <a:p>
+            <a:pPr lvl="1">
+              <a:spcAft>
+                <a:spcPts val="500"/>
+              </a:spcAft>
+            </a:pPr>
+          </a:p>
+          <a:p>
+            <a:pPr lvl="1">
+              <a:spcAft>
+                <a:spcPts val="500"/>
+              </a:spcAft>
+            </a:pPr>
+          </a:p>
+          <a:p>
+            <a:pPr>
+              <a:spcAft>
+                <a:spcPts val="400"/>
+              </a:spcAft>
+            </a:pPr>
+            <a:r>
+              <a:rPr sz="300" b="0">
+                <a:solidFill>
+                  <a:srgbClr val="1C1917"/>
+                </a:solidFill>
+              </a:rPr>
+              <a:t/>
+            </a:r>
+          </a:p>
+          <a:p>
+            <a:pPr>
+              <a:spcAft>
+                <a:spcPts val="400"/>
+              </a:spcAft>
+            </a:pPr>
+            <a:r>
+              <a:rPr sz="1000" b="0">
+                <a:solidFill>
+                  <a:srgbClr val="1C1917"/>
+                </a:solidFill>
+              </a:rPr>
+              <a:t>React + Vite + Tailwind + TF.js (in-browser freshness grader).</a:t>
+            </a:r>
+          </a:p>
+          <a:p>
+            <a:pPr>
+              <a:spcAft>
+                <a:spcPts val="400"/>
+              </a:spcAft>
+            </a:pPr>
+            <a:r>
+              <a:rPr sz="1000" b="0">
+                <a:solidFill>
+                  <a:srgbClr val="1C1917"/>
+                </a:solidFill>
+              </a:rPr>
+              <a:t>Node/Express API — 22 routes; Python FastAPI: net-realization, disease CNN, advisory RAG.</a:t>
+            </a:r>
+          </a:p>
+          <a:p>
+            <a:pPr>
+              <a:spcAft>
+                <a:spcPts val="400"/>
+              </a:spcAft>
+            </a:pPr>
+            <a:r>
+              <a:rPr sz="1000" b="0">
+                <a:solidFill>
+                  <a:srgbClr val="1C1917"/>
+                </a:solidFill>
+              </a:rPr>
+              <a:t>AGMARKNET live + stamped snapshot; MongoDB Atlas with memory fallback; Groq LLM explains only.</a:t>
             </a:r>
           </a:p>
         </p:txBody>
       </p:sp>
       <p:pic>
         <p:nvPicPr>
-          <p:cNvPr id="27" name="Picture 26" descr="ppt-trade.png"/>
+          <p:cNvPr id="17429" name="Picture 17428" descr="shot_netreal.png"/>
           <p:cNvPicPr>
             <a:picLocks noChangeAspect="1"/>
           </p:cNvPicPr>
           <p:nvPr/>
         </p:nvPicPr>
         <p:blipFill>
-          <a:blip r:embed="rId9"/>
+          <a:blip r:embed="rId5"/>
           <a:stretch>
             <a:fillRect/>
           </a:stretch>
         </p:blipFill>
         <p:spPr>
           <a:xfrm>
-            <a:off x="8823960" y="2834640"/>
-            <a:ext cx="1737360" cy="1280160"/>
+            <a:off x="6720840" y="3383280"/>
+            <a:ext cx="4480560" cy="2520315"/>
           </a:xfrm>
           <a:prstGeom prst="rect">
             <a:avLst/>
           </a:prstGeom>
+          <a:ln w="12700">
+            <a:solidFill>
+              <a:srgbClr val="D6D3D1"/>
+            </a:solidFill>
+          </a:ln>
         </p:spPr>
       </p:pic>
       <p:sp>
         <p:nvSpPr>
-          <p:cNvPr id="28" name="TextBox 27"/>
+          <p:cNvPr id="17430" name="TextBox 17429"/>
           <p:cNvSpPr txBox="1"/>
           <p:nvPr/>
         </p:nvSpPr>
         <p:spPr>
           <a:xfrm>
-            <a:off x="457200" y="5303520"/>
-            <a:ext cx="10058400" cy="457200"/>
+            <a:off x="6720840" y="5925312"/>
+            <a:ext cx="4480560" cy="548640"/>
           </a:xfrm>
           <a:prstGeom prst="rect">
             <a:avLst/>
@@ -8131,14 +8620,167 @@
           </a:bodyPr>
           <a:lstStyle/>
           <a:p>
+            <a:r>
+              <a:rPr sz="1100" i="1">
+                <a:solidFill>
+                  <a:srgbClr val="5B5B5B"/>
+                </a:solidFill>
+                <a:latin typeface="Arial"/>
+              </a:rPr>
+              <a:t>Live engine: APMC Vita nets ₹40,432 on the 10 q lot — ranked by take-home, evidence attached.</a:t>
+            </a:r>
+          </a:p>
+        </p:txBody>
+      </p:sp>
+      <p:sp>
+        <p:nvSpPr>
+          <p:cNvPr id="17431" name="Rounded Rectangle 17430"/>
+          <p:cNvSpPr/>
+          <p:nvPr/>
+        </p:nvSpPr>
+        <p:spPr>
+          <a:xfrm>
+            <a:off x="731520" y="3100000"/>
+            <a:ext cx="1400000" cy="350000"/>
+          </a:xfrm>
+          <a:prstGeom prst="roundRect">
+            <a:avLst/>
+          </a:prstGeom>
+          <a:solidFill>
+            <a:srgbClr val="047857"/>
+          </a:solidFill>
+          <a:ln>
+            <a:noFill/>
+          </a:ln>
+        </p:spPr>
+        <p:style>
+          <a:lnRef idx="1">
+            <a:schemeClr val="accent1"/>
+          </a:lnRef>
+          <a:fillRef idx="3">
+            <a:schemeClr val="accent1"/>
+          </a:fillRef>
+          <a:effectRef idx="2">
+            <a:schemeClr val="accent1"/>
+          </a:effectRef>
+          <a:fontRef idx="minor">
+            <a:schemeClr val="lt1"/>
+          </a:fontRef>
+        </p:style>
+        <p:txBody>
+          <a:bodyPr rtlCol="0" anchor="ctr" wrap="none"/>
+          <a:lstStyle/>
+          <a:p>
             <a:pPr algn="ctr"/>
             <a:r>
-              <a:rPr sz="900" b="0">
-                <a:solidFill>
-                  <a:srgbClr val="57534E"/>
+              <a:rPr sz="1100" b="1">
+                <a:solidFill>
+                  <a:srgbClr val="FFFFFF"/>
                 </a:solidFill>
               </a:rPr>
-              <a:t>Every number carries source + timestamp + assumption tags. Simulated parts are labeled 'DEMO'.</a:t>
+              <a:t>TRL 6</a:t>
+            </a:r>
+          </a:p>
+        </p:txBody>
+      </p:sp>
+      <p:sp>
+        <p:nvSpPr>
+          <p:cNvPr id="17432" name="Rounded Rectangle 17431"/>
+          <p:cNvSpPr/>
+          <p:nvPr/>
+        </p:nvSpPr>
+        <p:spPr>
+          <a:xfrm>
+            <a:off x="2560320" y="3100000"/>
+            <a:ext cx="1400000" cy="350000"/>
+          </a:xfrm>
+          <a:prstGeom prst="roundRect">
+            <a:avLst/>
+          </a:prstGeom>
+          <a:solidFill>
+            <a:srgbClr val="047857"/>
+          </a:solidFill>
+          <a:ln>
+            <a:noFill/>
+          </a:ln>
+        </p:spPr>
+        <p:style>
+          <a:lnRef idx="1">
+            <a:schemeClr val="accent1"/>
+          </a:lnRef>
+          <a:fillRef idx="3">
+            <a:schemeClr val="accent1"/>
+          </a:fillRef>
+          <a:effectRef idx="2">
+            <a:schemeClr val="accent1"/>
+          </a:effectRef>
+          <a:fontRef idx="minor">
+            <a:schemeClr val="lt1"/>
+          </a:fontRef>
+        </p:style>
+        <p:txBody>
+          <a:bodyPr rtlCol="0" anchor="ctr" wrap="none"/>
+          <a:lstStyle/>
+          <a:p>
+            <a:pPr algn="ctr"/>
+            <a:r>
+              <a:rPr sz="1100" b="1">
+                <a:solidFill>
+                  <a:srgbClr val="FFFFFF"/>
+                </a:solidFill>
+              </a:rPr>
+              <a:t>577 tests · 0 failures</a:t>
+            </a:r>
+          </a:p>
+        </p:txBody>
+      </p:sp>
+      <p:sp>
+        <p:nvSpPr>
+          <p:cNvPr id="17433" name="Rounded Rectangle 17432"/>
+          <p:cNvSpPr/>
+          <p:nvPr/>
+        </p:nvSpPr>
+        <p:spPr>
+          <a:xfrm>
+            <a:off x="4389120" y="3100000"/>
+            <a:ext cx="1400000" cy="350000"/>
+          </a:xfrm>
+          <a:prstGeom prst="roundRect">
+            <a:avLst/>
+          </a:prstGeom>
+          <a:solidFill>
+            <a:srgbClr val="047857"/>
+          </a:solidFill>
+          <a:ln>
+            <a:noFill/>
+          </a:ln>
+        </p:spPr>
+        <p:style>
+          <a:lnRef idx="1">
+            <a:schemeClr val="accent1"/>
+          </a:lnRef>
+          <a:fillRef idx="3">
+            <a:schemeClr val="accent1"/>
+          </a:fillRef>
+          <a:effectRef idx="2">
+            <a:schemeClr val="accent1"/>
+          </a:effectRef>
+          <a:fontRef idx="minor">
+            <a:schemeClr val="lt1"/>
+          </a:fontRef>
+        </p:style>
+        <p:txBody>
+          <a:bodyPr rtlCol="0" anchor="ctr" wrap="none"/>
+          <a:lstStyle/>
+          <a:p>
+            <a:pPr algn="ctr"/>
+            <a:r>
+              <a:rPr sz="1100" b="1">
+                <a:solidFill>
+                  <a:srgbClr val="FFFFFF"/>
+                </a:solidFill>
+              </a:rPr>
+              <a:t>22 API routes</a:t>
             </a:r>
           </a:p>
         </p:txBody>
@@ -8154,14 +8796,6 @@
 <file path=ppt/slides/slide4.xml><?xml version="1.0" encoding="utf-8"?>
 <p:sld xmlns:a="http://schemas.openxmlformats.org/drawingml/2006/main" xmlns:r="http://schemas.openxmlformats.org/officeDocument/2006/relationships" xmlns:p="http://schemas.openxmlformats.org/presentationml/2006/main">
   <p:cSld>
-    <p:bg>
-      <p:bgPr>
-        <a:solidFill>
-          <a:srgbClr val="FFFFFF"/>
-        </a:solidFill>
-        <a:effectLst/>
-      </p:bgPr>
-    </p:bg>
     <p:spTree>
       <p:nvGrpSpPr>
         <p:cNvPr id="1" name=""/>
@@ -8178,19 +8812,133 @@
       </p:grpSpPr>
       <p:sp>
         <p:nvSpPr>
-          <p:cNvPr id="2" name="TextBox 1"/>
-          <p:cNvSpPr txBox="1"/>
+          <p:cNvPr id="10" name="Rectangle 9">
+            <a:extLst>
+              <a:ext uri="{FF2B5EF4-FFF2-40B4-BE49-F238E27FC236}">
+                <a16:creationId xmlns:a16="http://schemas.microsoft.com/office/drawing/2014/main" id="{AD4F69D3-EEB0-4C4C-9434-B9960FB5854C}"/>
+              </a:ext>
+            </a:extLst>
+          </p:cNvPr>
+          <p:cNvSpPr>
+            <a:spLocks noChangeArrowheads="1"/>
+          </p:cNvSpPr>
           <p:nvPr/>
         </p:nvSpPr>
-        <p:spPr>
-          <a:xfrm>
-            <a:off x="457200" y="274320"/>
-            <a:ext cx="8229600" cy="274320"/>
+        <p:spPr bwMode="auto">
+          <a:xfrm>
+            <a:off x="0" y="6354762"/>
+            <a:ext cx="12191999" cy="503238"/>
+          </a:xfrm>
+          <a:prstGeom prst="rect">
+            <a:avLst/>
+          </a:prstGeom>
+          <a:solidFill>
+            <a:srgbClr val="0070C0"/>
+          </a:solidFill>
+          <a:ln w="9525">
+            <a:noFill/>
+            <a:miter lim="800000"/>
+            <a:headEnd/>
+            <a:tailEnd/>
+          </a:ln>
+          <a:effectLst>
+            <a:outerShdw dist="23000" dir="5400000" rotWithShape="0">
+              <a:srgbClr val="808080">
+                <a:alpha val="34999"/>
+              </a:srgbClr>
+            </a:outerShdw>
+          </a:effectLst>
+        </p:spPr>
+        <p:txBody>
+          <a:bodyPr anchor="ctr"/>
+          <a:lstStyle/>
+          <a:p>
+            <a:pPr marL="0" marR="0" lvl="0" indent="0" algn="ctr" defTabSz="457200" rtl="0" eaLnBrk="1" fontAlgn="auto" latinLnBrk="0" hangingPunct="1">
+              <a:lnSpc>
+                <a:spcPct val="100000"/>
+              </a:lnSpc>
+              <a:spcBef>
+                <a:spcPts val="0"/>
+              </a:spcBef>
+              <a:spcAft>
+                <a:spcPts val="0"/>
+              </a:spcAft>
+              <a:buClrTx/>
+              <a:buSzTx/>
+              <a:buFontTx/>
+              <a:buNone/>
+              <a:tabLst/>
+              <a:defRPr/>
+            </a:pPr>
+            <a:endParaRPr kumimoji="0" lang="en-US" sz="1800" b="0" i="0" u="none" strike="noStrike" kern="1200" cap="none" spc="0" normalizeH="0" baseline="0" noProof="0" dirty="0">
+              <a:ln>
+                <a:noFill/>
+              </a:ln>
+              <a:solidFill>
+                <a:srgbClr val="C0504D">
+                  <a:lumMod val="75000"/>
+                </a:srgbClr>
+              </a:solidFill>
+              <a:effectLst/>
+              <a:uLnTx/>
+              <a:uFillTx/>
+              <a:latin typeface="Calibri"/>
+              <a:ea typeface="ＭＳ Ｐゴシック" pitchFamily="1" charset="-128"/>
+              <a:cs typeface="+mn-cs"/>
+            </a:endParaRPr>
+          </a:p>
+        </p:txBody>
+      </p:sp>
+      <p:sp>
+        <p:nvSpPr>
+          <p:cNvPr id="17409" name="Title 1"/>
+          <p:cNvSpPr>
+            <a:spLocks noGrp="1"/>
+          </p:cNvSpPr>
+          <p:nvPr>
+            <p:ph type="title"/>
+          </p:nvPr>
+        </p:nvSpPr>
+        <p:spPr>
+          <a:xfrm>
+            <a:off x="609904" y="-47548"/>
+            <a:ext cx="8778240" cy="1143000"/>
+          </a:xfrm>
+        </p:spPr>
+        <p:txBody>
+          <a:bodyPr/>
+          <a:lstStyle/>
+          <a:p>
+            <a:r>
+              <a:rPr dirty="0" sz="3000"/>
+              <a:t>FEASIBILITY AND VIABILITY</a:t>
+            </a:r>
+          </a:p>
+        </p:txBody>
+      </p:sp>
+      <p:sp>
+        <p:nvSpPr>
+          <p:cNvPr id="17410" name="TextBox 8"/>
+          <p:cNvSpPr txBox="1">
+            <a:spLocks noChangeArrowheads="1"/>
+          </p:cNvSpPr>
+          <p:nvPr/>
+        </p:nvSpPr>
+        <p:spPr bwMode="auto">
+          <a:xfrm>
+            <a:off x="274320" y="1234440"/>
+            <a:ext cx="6675120" cy="3840480"/>
           </a:xfrm>
           <a:prstGeom prst="rect">
             <a:avLst/>
           </a:prstGeom>
           <a:noFill/>
+          <a:ln w="9525">
+            <a:noFill/>
+            <a:miter lim="800000"/>
+            <a:headEnd/>
+            <a:tailEnd/>
+          </a:ln>
         </p:spPr>
         <p:txBody>
           <a:bodyPr wrap="square">
@@ -8198,28 +8946,588 @@
           </a:bodyPr>
           <a:lstStyle/>
           <a:p>
-            <a:pPr algn="l"/>
-            <a:r>
-              <a:rPr sz="900" b="1">
+            <a:pPr marR="0" algn="just" defTabSz="457200" rtl="0" eaLnBrk="1" fontAlgn="base" latinLnBrk="0" hangingPunct="1">
+              <a:lnSpc>
+                <a:spcPct val="100000"/>
+              </a:lnSpc>
+              <a:spcBef>
+                <a:spcPct val="0"/>
+              </a:spcBef>
+              <a:spcAft>
+                <a:spcPts val="400"/>
+              </a:spcAft>
+              <a:buClrTx/>
+              <a:buSzTx/>
+              <a:tabLst/>
+              <a:defRPr/>
+            </a:pPr>
+            <a:r>
+              <a:rPr sz="1200" b="1">
                 <a:solidFill>
                   <a:srgbClr val="047857"/>
                 </a:solidFill>
               </a:rPr>
-              <a:t>TECHNICAL DEPTH</a:t>
-            </a:r>
-          </a:p>
-        </p:txBody>
-      </p:sp>
-      <p:sp>
-        <p:nvSpPr>
-          <p:cNvPr id="3" name="TextBox 2"/>
+              <a:t>Feasibility — prototype runs today</a:t>
+            </a:r>
+            <a:endParaRPr kumimoji="0" lang="en-US" sz="2800" b="0" i="0" u="none" strike="noStrike" kern="1200" cap="none" spc="0" normalizeH="0" baseline="0" noProof="0" dirty="0">
+              <a:ln>
+                <a:noFill/>
+              </a:ln>
+              <a:solidFill>
+                <a:prstClr val="black"/>
+              </a:solidFill>
+              <a:effectLst/>
+              <a:uLnTx/>
+              <a:uFillTx/>
+              <a:latin typeface="Arial" pitchFamily="34" charset="0"/>
+              <a:ea typeface="ＭＳ Ｐゴシック" pitchFamily="1" charset="-128"/>
+              <a:cs typeface="Arial" pitchFamily="34" charset="0"/>
+            </a:endParaRPr>
+          </a:p>
+          <a:p>
+            <a:pPr lvl="1">
+              <a:spcAft>
+                <a:spcPts val="500"/>
+              </a:spcAft>
+            </a:pPr>
+          </a:p>
+          <a:p>
+            <a:pPr>
+              <a:spcAft>
+                <a:spcPts val="500"/>
+              </a:spcAft>
+            </a:pPr>
+          </a:p>
+          <a:p>
+            <a:pPr lvl="1">
+              <a:spcAft>
+                <a:spcPts val="500"/>
+              </a:spcAft>
+            </a:pPr>
+          </a:p>
+          <a:p>
+            <a:pPr lvl="1">
+              <a:spcAft>
+                <a:spcPts val="500"/>
+              </a:spcAft>
+            </a:pPr>
+          </a:p>
+          <a:p>
+            <a:pPr lvl="1">
+              <a:spcAft>
+                <a:spcPts val="500"/>
+              </a:spcAft>
+            </a:pPr>
+          </a:p>
+          <a:p>
+            <a:pPr>
+              <a:spcAft>
+                <a:spcPts val="400"/>
+              </a:spcAft>
+            </a:pPr>
+            <a:r>
+              <a:rPr sz="400" b="0">
+                <a:solidFill>
+                  <a:srgbClr val="1C1917"/>
+                </a:solidFill>
+              </a:rPr>
+              <a:t/>
+            </a:r>
+          </a:p>
+          <a:p>
+            <a:pPr>
+              <a:spcAft>
+                <a:spcPts val="400"/>
+              </a:spcAft>
+            </a:pPr>
+            <a:r>
+              <a:rPr sz="1000" b="0">
+                <a:solidFill>
+                  <a:srgbClr val="1C1917"/>
+                </a:solidFill>
+              </a:rPr>
+              <a:t>Full journey clickable: dashboard → ranking → lot → offer → buyer accept → payment → receipt.</a:t>
+            </a:r>
+          </a:p>
+          <a:p>
+            <a:pPr>
+              <a:spcAft>
+                <a:spcPts val="400"/>
+              </a:spcAft>
+            </a:pPr>
+            <a:r>
+              <a:rPr sz="1000" b="0">
+                <a:solidFill>
+                  <a:srgbClr val="1C1917"/>
+                </a:solidFill>
+              </a:rPr>
+              <a:t>Deployable per-district over AGMARKNET/eNAM, nothing to replace.</a:t>
+            </a:r>
+          </a:p>
+          <a:p>
+            <a:pPr>
+              <a:spcAft>
+                <a:spcPts val="400"/>
+              </a:spcAft>
+            </a:pPr>
+            <a:r>
+              <a:rPr sz="600" b="0">
+                <a:solidFill>
+                  <a:srgbClr val="1C1917"/>
+                </a:solidFill>
+              </a:rPr>
+              <a:t/>
+            </a:r>
+          </a:p>
+          <a:p>
+            <a:pPr>
+              <a:spcAft>
+                <a:spcPts val="400"/>
+              </a:spcAft>
+            </a:pPr>
+            <a:r>
+              <a:rPr sz="1100" b="1">
+                <a:solidFill>
+                  <a:srgbClr val="047857"/>
+                </a:solidFill>
+              </a:rPr>
+              <a:t>Risks — and where the screen says so</a:t>
+            </a:r>
+          </a:p>
+          <a:p>
+            <a:pPr>
+              <a:spcAft>
+                <a:spcPts val="400"/>
+              </a:spcAft>
+            </a:pPr>
+            <a:r>
+              <a:rPr sz="400" b="0">
+                <a:solidFill>
+                  <a:srgbClr val="1C1917"/>
+                </a:solidFill>
+              </a:rPr>
+              <a:t/>
+            </a:r>
+          </a:p>
+          <a:p>
+            <a:pPr>
+              <a:spcAft>
+                <a:spcPts val="400"/>
+              </a:spcAft>
+            </a:pPr>
+            <a:r>
+              <a:rPr sz="1000" b="0">
+                <a:solidFill>
+                  <a:srgbClr val="1C1917"/>
+                </a:solidFill>
+              </a:rPr>
+              <a:t>1. AGMARKNET API down → stamped snapshot fallback, UI badge says "CACHED"</a:t>
+            </a:r>
+          </a:p>
+          <a:p>
+            <a:pPr>
+              <a:spcAft>
+                <a:spcPts val="400"/>
+              </a:spcAft>
+            </a:pPr>
+            <a:r>
+              <a:rPr sz="900" b="0">
+                <a:solidFill>
+                  <a:srgbClr val="57534E"/>
+                </a:solidFill>
+              </a:rPr>
+              <a:t>   → visible on every price card as source + age</a:t>
+            </a:r>
+          </a:p>
+          <a:p>
+            <a:pPr>
+              <a:spcAft>
+                <a:spcPts val="400"/>
+              </a:spcAft>
+            </a:pPr>
+            <a:r>
+              <a:rPr sz="300" b="0">
+                <a:solidFill>
+                  <a:srgbClr val="1C1917"/>
+                </a:solidFill>
+              </a:rPr>
+              <a:t/>
+            </a:r>
+          </a:p>
+          <a:p>
+            <a:pPr>
+              <a:spcAft>
+                <a:spcPts val="400"/>
+              </a:spcAft>
+            </a:pPr>
+            <a:r>
+              <a:rPr sz="1000" b="0">
+                <a:solidFill>
+                  <a:srgbClr val="1C1917"/>
+                </a:solidFill>
+              </a:rPr>
+              <a:t>2. Transport/storage costs are assumptions → every assumption tagged on-screen</a:t>
+            </a:r>
+          </a:p>
+          <a:p>
+            <a:pPr>
+              <a:spcAft>
+                <a:spcPts val="400"/>
+              </a:spcAft>
+            </a:pPr>
+            <a:r>
+              <a:rPr sz="900" b="0">
+                <a:solidFill>
+                  <a:srgbClr val="57534E"/>
+                </a:solidFill>
+              </a:rPr>
+              <a:t>   → "Assumption" label next to each cost item in the calculator</a:t>
+            </a:r>
+          </a:p>
+          <a:p>
+            <a:pPr>
+              <a:spcAft>
+                <a:spcPts val="400"/>
+              </a:spcAft>
+            </a:pPr>
+            <a:r>
+              <a:rPr sz="300" b="0">
+                <a:solidFill>
+                  <a:srgbClr val="1C1917"/>
+                </a:solidFill>
+              </a:rPr>
+              <a:t/>
+            </a:r>
+          </a:p>
+          <a:p>
+            <a:pPr>
+              <a:spcAft>
+                <a:spcPts val="400"/>
+              </a:spcAft>
+            </a:pPr>
+            <a:r>
+              <a:rPr sz="1000" b="0">
+                <a:solidFill>
+                  <a:srgbClr val="1C1917"/>
+                </a:solidFill>
+              </a:rPr>
+              <a:t>3. Buyers &amp; payments are simulated → 4-tier trust labels + "SIMULATED" banners</a:t>
+            </a:r>
+          </a:p>
+          <a:p>
+            <a:pPr>
+              <a:spcAft>
+                <a:spcPts val="400"/>
+              </a:spcAft>
+            </a:pPr>
+            <a:r>
+              <a:rPr sz="900" b="0">
+                <a:solidFill>
+                  <a:srgbClr val="57534E"/>
+                </a:solidFill>
+              </a:rPr>
+              <a:t>   → red SIMULATED badge on every payment and offer card</a:t>
+            </a:r>
+          </a:p>
+        </p:txBody>
+      </p:sp>
+      <p:sp>
+        <p:nvSpPr>
+          <p:cNvPr id="6" name="Slide Number Placeholder 5"/>
+          <p:cNvSpPr>
+            <a:spLocks noGrp="1"/>
+          </p:cNvSpPr>
+          <p:nvPr>
+            <p:ph type="sldNum" sz="quarter" idx="12"/>
+          </p:nvPr>
+        </p:nvSpPr>
+        <p:spPr/>
+        <p:txBody>
+          <a:bodyPr/>
+          <a:lstStyle/>
+          <a:p>
+            <a:pPr marL="0" marR="0" lvl="0" indent="0" algn="r" defTabSz="457200" rtl="0" eaLnBrk="1" fontAlgn="base" latinLnBrk="0" hangingPunct="1">
+              <a:lnSpc>
+                <a:spcPct val="100000"/>
+              </a:lnSpc>
+              <a:spcBef>
+                <a:spcPct val="0"/>
+              </a:spcBef>
+              <a:spcAft>
+                <a:spcPct val="0"/>
+              </a:spcAft>
+              <a:buClrTx/>
+              <a:buSzTx/>
+              <a:buFontTx/>
+              <a:buNone/>
+              <a:tabLst/>
+              <a:defRPr/>
+            </a:pPr>
+            <a:fld id="{677C3CE7-23F7-4828-823C-E0205DF2CF97}" type="slidenum">
+              <a:rPr kumimoji="0" lang="en-US" sz="1200" b="1" i="0" u="none" strike="noStrike" kern="1200" cap="none" spc="0" normalizeH="0" baseline="0" noProof="0">
+                <a:ln>
+                  <a:noFill/>
+                </a:ln>
+                <a:solidFill>
+                  <a:prstClr val="white"/>
+                </a:solidFill>
+                <a:effectLst/>
+                <a:uLnTx/>
+                <a:uFillTx/>
+                <a:latin typeface="TradeGothic" pitchFamily="1" charset="0"/>
+                <a:ea typeface="ＭＳ Ｐゴシック" pitchFamily="1" charset="-128"/>
+                <a:cs typeface="+mn-cs"/>
+              </a:rPr>
+              <a:pPr marL="0" marR="0" lvl="0" indent="0" algn="r" defTabSz="457200" rtl="0" eaLnBrk="1" fontAlgn="base" latinLnBrk="0" hangingPunct="1">
+                <a:lnSpc>
+                  <a:spcPct val="100000"/>
+                </a:lnSpc>
+                <a:spcBef>
+                  <a:spcPct val="0"/>
+                </a:spcBef>
+                <a:spcAft>
+                  <a:spcPct val="0"/>
+                </a:spcAft>
+                <a:buClrTx/>
+                <a:buSzTx/>
+                <a:buFontTx/>
+                <a:buNone/>
+                <a:tabLst/>
+                <a:defRPr/>
+              </a:pPr>
+              <a:t>4</a:t>
+            </a:fld>
+            <a:endParaRPr kumimoji="0" lang="en-US" sz="1200" b="1" i="0" u="none" strike="noStrike" kern="1200" cap="none" spc="0" normalizeH="0" baseline="0" noProof="0" dirty="0">
+              <a:ln>
+                <a:noFill/>
+              </a:ln>
+              <a:solidFill>
+                <a:prstClr val="white"/>
+              </a:solidFill>
+              <a:effectLst/>
+              <a:uLnTx/>
+              <a:uFillTx/>
+              <a:latin typeface="TradeGothic" pitchFamily="1" charset="0"/>
+              <a:ea typeface="ＭＳ Ｐゴシック" pitchFamily="1" charset="-128"/>
+              <a:cs typeface="+mn-cs"/>
+            </a:endParaRPr>
+          </a:p>
+        </p:txBody>
+      </p:sp>
+      <p:sp>
+        <p:nvSpPr>
+          <p:cNvPr id="7" name="Footer Placeholder 6"/>
+          <p:cNvSpPr>
+            <a:spLocks noGrp="1"/>
+          </p:cNvSpPr>
+          <p:nvPr>
+            <p:ph type="ftr" sz="quarter" idx="11"/>
+          </p:nvPr>
+        </p:nvSpPr>
+        <p:spPr>
+          <a:xfrm>
+            <a:off x="4648200" y="6356353"/>
+            <a:ext cx="3204000" cy="365125"/>
+          </a:xfrm>
+        </p:spPr>
+        <p:txBody>
+          <a:bodyPr/>
+          <a:lstStyle/>
+          <a:p>
+            <a:pPr marL="0" marR="0" lvl="0" indent="0" algn="ctr" defTabSz="457200" rtl="0" eaLnBrk="1" fontAlgn="auto" latinLnBrk="0" hangingPunct="1">
+              <a:lnSpc>
+                <a:spcPct val="100000"/>
+              </a:lnSpc>
+              <a:spcBef>
+                <a:spcPts val="0"/>
+              </a:spcBef>
+              <a:spcAft>
+                <a:spcPts val="0"/>
+              </a:spcAft>
+              <a:buClrTx/>
+              <a:buSzTx/>
+              <a:buFontTx/>
+              <a:buNone/>
+              <a:tabLst/>
+              <a:defRPr/>
+            </a:pPr>
+            <a:r>
+              <a:rPr kumimoji="0" lang="en-US" sz="1200" b="0" i="0" u="none" strike="noStrike" kern="1200" cap="none" spc="0" normalizeH="0" baseline="0" noProof="0">
+                <a:ln>
+                  <a:noFill/>
+                </a:ln>
+                <a:solidFill>
+                  <a:prstClr val="white"/>
+                </a:solidFill>
+                <a:effectLst/>
+                <a:uLnTx/>
+                <a:uFillTx/>
+                <a:latin typeface="TradeGothic"/>
+                <a:ea typeface="+mn-ea"/>
+                <a:cs typeface="+mn-cs"/>
+              </a:rPr>
+              <a:t>@SIH Idea submission- Template</a:t>
+            </a:r>
+            <a:endParaRPr kumimoji="0" lang="en-US" sz="1200" b="0" i="0" u="none" strike="noStrike" kern="1200" cap="none" spc="0" normalizeH="0" baseline="0" noProof="0" dirty="0">
+              <a:ln>
+                <a:noFill/>
+              </a:ln>
+              <a:solidFill>
+                <a:prstClr val="white"/>
+              </a:solidFill>
+              <a:effectLst/>
+              <a:uLnTx/>
+              <a:uFillTx/>
+              <a:latin typeface="TradeGothic"/>
+              <a:ea typeface="+mn-ea"/>
+              <a:cs typeface="+mn-cs"/>
+            </a:endParaRPr>
+          </a:p>
+        </p:txBody>
+      </p:sp>
+      <p:sp>
+        <p:nvSpPr>
+          <p:cNvPr id="12" name="Oval 11" descr="Your startup LOGO">
+            <a:extLst>
+              <a:ext uri="{FF2B5EF4-FFF2-40B4-BE49-F238E27FC236}">
+                <a16:creationId xmlns:a16="http://schemas.microsoft.com/office/drawing/2014/main" id="{5DBCE864-823D-4A13-9607-5DA1F0ED5FB8}"/>
+              </a:ext>
+              <a:ext uri="{C183D7F6-B498-43B3-948B-1728B52AA6E4}">
+                <adec:decorative xmlns:adec="http://schemas.microsoft.com/office/drawing/2017/decorative" val="0"/>
+              </a:ext>
+            </a:extLst>
+          </p:cNvPr>
+          <p:cNvSpPr/>
+          <p:nvPr/>
+        </p:nvSpPr>
+        <p:spPr>
+          <a:xfrm>
+            <a:off x="329773" y="252246"/>
+            <a:ext cx="1417320" cy="807334"/>
+          </a:xfrm>
+          <a:prstGeom prst="ellipse">
+            <a:avLst/>
+          </a:prstGeom>
+        </p:spPr>
+        <p:style>
+          <a:lnRef idx="2">
+            <a:schemeClr val="accent4"/>
+          </a:lnRef>
+          <a:fillRef idx="1">
+            <a:schemeClr val="lt1"/>
+          </a:fillRef>
+          <a:effectRef idx="0">
+            <a:schemeClr val="accent4"/>
+          </a:effectRef>
+          <a:fontRef idx="minor">
+            <a:schemeClr val="dk1"/>
+          </a:fontRef>
+        </p:style>
+        <p:txBody>
+          <a:bodyPr rtlCol="0" anchor="ctr" wrap="none"/>
+          <a:lstStyle/>
+          <a:p>
+            <a:pPr algn="ctr"/>
+            <a:r>
+              <a:rPr sz="1300"/>
+              <a:t>Kisan360</a:t>
+            </a:r>
+          </a:p>
+        </p:txBody>
+      </p:sp>
+      <p:pic>
+        <p:nvPicPr>
+          <p:cNvPr id="11" name="Picture 10"/>
+          <p:cNvPicPr>
+            <a:picLocks noChangeAspect="1"/>
+          </p:cNvPicPr>
+          <p:nvPr/>
+        </p:nvPicPr>
+        <p:blipFill>
+          <a:blip r:embed="rId3">
+            <a:extLst>
+              <a:ext uri="{28A0092B-C50C-407E-A947-70E740481C1C}">
+                <a14:useLocalDpi xmlns:a14="http://schemas.microsoft.com/office/drawing/2010/main" val="0"/>
+              </a:ext>
+            </a:extLst>
+          </a:blip>
+          <a:stretch>
+            <a:fillRect/>
+          </a:stretch>
+        </p:blipFill>
+        <p:spPr>
+          <a:xfrm>
+            <a:off x="9780086" y="1500"/>
+            <a:ext cx="2249850" cy="1062337"/>
+          </a:xfrm>
+          <a:prstGeom prst="rect">
+            <a:avLst/>
+          </a:prstGeom>
+        </p:spPr>
+      </p:pic>
+      <p:pic>
+        <p:nvPicPr>
+          <p:cNvPr id="17411" name="Picture 17410" descr="kisan360-mark.png"/>
+          <p:cNvPicPr>
+            <a:picLocks noChangeAspect="1"/>
+          </p:cNvPicPr>
+          <p:nvPr/>
+        </p:nvPicPr>
+        <p:blipFill>
+          <a:blip r:embed="rId4"/>
+          <a:stretch>
+            <a:fillRect/>
+          </a:stretch>
+        </p:blipFill>
+        <p:spPr>
+          <a:xfrm>
+            <a:off x="11631168" y="6327648"/>
+            <a:ext cx="411480" cy="411480"/>
+          </a:xfrm>
+          <a:prstGeom prst="rect">
+            <a:avLst/>
+          </a:prstGeom>
+        </p:spPr>
+      </p:pic>
+      <p:pic>
+        <p:nvPicPr>
+          <p:cNvPr id="17412" name="Picture 17411" descr="shot_trade.png"/>
+          <p:cNvPicPr>
+            <a:picLocks noChangeAspect="1"/>
+          </p:cNvPicPr>
+          <p:nvPr/>
+        </p:nvPicPr>
+        <p:blipFill>
+          <a:blip r:embed="rId5"/>
+          <a:stretch>
+            <a:fillRect/>
+          </a:stretch>
+        </p:blipFill>
+        <p:spPr>
+          <a:xfrm>
+            <a:off x="7223760" y="1234440"/>
+            <a:ext cx="4572000" cy="2571750"/>
+          </a:xfrm>
+          <a:prstGeom prst="rect">
+            <a:avLst/>
+          </a:prstGeom>
+          <a:ln w="12700">
+            <a:solidFill>
+              <a:srgbClr val="D6D3D1"/>
+            </a:solidFill>
+          </a:ln>
+        </p:spPr>
+      </p:pic>
+      <p:sp>
+        <p:nvSpPr>
+          <p:cNvPr id="17413" name="TextBox 17412"/>
           <p:cNvSpPr txBox="1"/>
           <p:nvPr/>
         </p:nvSpPr>
         <p:spPr>
           <a:xfrm>
-            <a:off x="457200" y="548640"/>
-            <a:ext cx="10058400" cy="548640"/>
+            <a:off x="7223760" y="3977639"/>
+            <a:ext cx="4572000" cy="457200"/>
           </a:xfrm>
           <a:prstGeom prst="rect">
             <a:avLst/>
@@ -8232,40 +9540,41 @@
           </a:bodyPr>
           <a:lstStyle/>
           <a:p>
-            <a:pPr algn="l"/>
-            <a:r>
-              <a:rPr sz="2200" b="1">
-                <a:solidFill>
-                  <a:srgbClr val="1C1917"/>
-                </a:solidFill>
+            <a:r>
+              <a:rPr sz="1200" i="1">
+                <a:solidFill>
+                  <a:srgbClr val="5B5B5B"/>
+                </a:solidFill>
+                <a:latin typeface="Arial"/>
               </a:rPr>
-              <a:t>Built for correctness, not just demos</a:t>
-            </a:r>
-          </a:p>
-        </p:txBody>
-      </p:sp>
-      <p:sp>
-        <p:nvSpPr>
-          <p:cNvPr id="4" name="Rectangle 3"/>
+              <a:t>Decision tracker (INFORM → SELL) + lots → matched buyers → offers → escrow — one chain.</a:t>
+            </a:r>
+          </a:p>
+        </p:txBody>
+      </p:sp>
+      <p:sp>
+        <p:nvSpPr>
+          <p:cNvPr id="17414" name="Rounded Rectangle 17413"/>
           <p:cNvSpPr/>
           <p:nvPr/>
         </p:nvSpPr>
         <p:spPr>
           <a:xfrm>
-            <a:off x="457200" y="1280160"/>
-            <a:ext cx="2377440" cy="1280160"/>
-          </a:xfrm>
-          <a:prstGeom prst="rect">
-            <a:avLst/>
+            <a:off x="7223760" y="4663440"/>
+            <a:ext cx="4572000" cy="1417320"/>
+          </a:xfrm>
+          <a:prstGeom prst="roundRect">
+            <a:avLst>
+              <a:gd name="adj" fmla="val 8000"/>
+            </a:avLst>
           </a:prstGeom>
           <a:solidFill>
-            <a:srgbClr val="ECFDF5"/>
+            <a:srgbClr val="1F3864"/>
           </a:solidFill>
-          <a:ln w="12700">
-            <a:solidFill>
-              <a:srgbClr val="D1FAE5"/>
-            </a:solidFill>
+          <a:ln>
+            <a:noFill/>
           </a:ln>
+          <a:effectLst/>
         </p:spPr>
         <p:style>
           <a:lnRef idx="1">
@@ -8291,14 +9600,14 @@
       </p:sp>
       <p:sp>
         <p:nvSpPr>
-          <p:cNvPr id="5" name="TextBox 4"/>
+          <p:cNvPr id="17415" name="TextBox 17414"/>
           <p:cNvSpPr txBox="1"/>
           <p:nvPr/>
         </p:nvSpPr>
         <p:spPr>
           <a:xfrm>
-            <a:off x="548640" y="1371600"/>
-            <a:ext cx="2194560" cy="548640"/>
+            <a:off x="7452360" y="4791455"/>
+            <a:ext cx="4114800" cy="237744"/>
           </a:xfrm>
           <a:prstGeom prst="rect">
             <a:avLst/>
@@ -8306,33 +9615,34 @@
           <a:noFill/>
         </p:spPr>
         <p:txBody>
-          <a:bodyPr wrap="square">
+          <a:bodyPr wrap="square" anchor="t" lIns="0" rIns="0" tIns="0" bIns="0">
             <a:spAutoFit/>
           </a:bodyPr>
           <a:lstStyle/>
           <a:p>
-            <a:pPr algn="ctr"/>
-            <a:r>
-              <a:rPr sz="3200" b="1">
-                <a:solidFill>
-                  <a:srgbClr val="047857"/>
-                </a:solidFill>
+            <a:pPr algn="l"/>
+            <a:r>
+              <a:rPr sz="900" b="1">
+                <a:solidFill>
+                  <a:srgbClr val="9FB3D1"/>
+                </a:solidFill>
+                <a:latin typeface="Calibri"/>
               </a:rPr>
-              <a:t>577</a:t>
-            </a:r>
-          </a:p>
-        </p:txBody>
-      </p:sp>
-      <p:sp>
-        <p:nvSpPr>
-          <p:cNvPr id="6" name="TextBox 5"/>
+              <a:t>DECISION TRACKER — INFORM → COMPARE → DECIDE → CONNECT → SELL</a:t>
+            </a:r>
+          </a:p>
+        </p:txBody>
+      </p:sp>
+      <p:sp>
+        <p:nvSpPr>
+          <p:cNvPr id="17416" name="TextBox 17415"/>
           <p:cNvSpPr txBox="1"/>
           <p:nvPr/>
         </p:nvSpPr>
         <p:spPr>
           <a:xfrm>
-            <a:off x="548640" y="1874519"/>
-            <a:ext cx="2194560" cy="548640"/>
+            <a:off x="7452360" y="5102352"/>
+            <a:ext cx="1028700" cy="411480"/>
           </a:xfrm>
           <a:prstGeom prst="rect">
             <a:avLst/>
@@ -8340,79 +9650,34 @@
           <a:noFill/>
         </p:spPr>
         <p:txBody>
-          <a:bodyPr wrap="square">
+          <a:bodyPr wrap="square" anchor="t" lIns="0" rIns="0" tIns="0" bIns="0">
             <a:spAutoFit/>
           </a:bodyPr>
           <a:lstStyle/>
           <a:p>
             <a:pPr algn="ctr"/>
             <a:r>
-              <a:rPr sz="1000" b="0">
-                <a:solidFill>
-                  <a:srgbClr val="57534E"/>
-                </a:solidFill>
+              <a:rPr sz="2400" b="1">
+                <a:solidFill>
+                  <a:srgbClr val="3FCB94"/>
+                </a:solidFill>
+                <a:latin typeface="Calibri"/>
               </a:rPr>
-              <a:t>Backend tests
-0 failures</a:t>
-            </a:r>
-          </a:p>
-        </p:txBody>
-      </p:sp>
-      <p:sp>
-        <p:nvSpPr>
-          <p:cNvPr id="7" name="Rectangle 6"/>
-          <p:cNvSpPr/>
-          <p:nvPr/>
-        </p:nvSpPr>
-        <p:spPr>
-          <a:xfrm>
-            <a:off x="3063240" y="1280160"/>
-            <a:ext cx="2377440" cy="1280160"/>
-          </a:xfrm>
-          <a:prstGeom prst="rect">
-            <a:avLst/>
-          </a:prstGeom>
-          <a:solidFill>
-            <a:srgbClr val="ECFDF5"/>
-          </a:solidFill>
-          <a:ln w="12700">
-            <a:solidFill>
-              <a:srgbClr val="D1FAE5"/>
-            </a:solidFill>
-          </a:ln>
-        </p:spPr>
-        <p:style>
-          <a:lnRef idx="1">
-            <a:schemeClr val="accent1"/>
-          </a:lnRef>
-          <a:fillRef idx="3">
-            <a:schemeClr val="accent1"/>
-          </a:fillRef>
-          <a:effectRef idx="2">
-            <a:schemeClr val="accent1"/>
-          </a:effectRef>
-          <a:fontRef idx="minor">
-            <a:schemeClr val="lt1"/>
-          </a:fontRef>
-        </p:style>
-        <p:txBody>
-          <a:bodyPr rtlCol="0" anchor="ctr"/>
-          <a:lstStyle/>
-          <a:p>
-            <a:pPr algn="ctr"/>
-          </a:p>
-        </p:txBody>
-      </p:sp>
-      <p:sp>
-        <p:nvSpPr>
-          <p:cNvPr id="8" name="TextBox 7"/>
+              <a:t>13</a:t>
+            </a:r>
+          </a:p>
+        </p:txBody>
+      </p:sp>
+      <p:sp>
+        <p:nvSpPr>
+          <p:cNvPr id="17417" name="TextBox 17416"/>
           <p:cNvSpPr txBox="1"/>
           <p:nvPr/>
         </p:nvSpPr>
         <p:spPr>
           <a:xfrm>
-            <a:off x="3154680" y="1371600"/>
-            <a:ext cx="2194560" cy="548640"/>
+            <a:off x="7452360" y="5559552"/>
+            <a:ext cx="1028700" cy="457200"/>
           </a:xfrm>
           <a:prstGeom prst="rect">
             <a:avLst/>
@@ -8420,33 +9685,34 @@
           <a:noFill/>
         </p:spPr>
         <p:txBody>
-          <a:bodyPr wrap="square">
+          <a:bodyPr wrap="square" anchor="t" lIns="0" rIns="0" tIns="0" bIns="0">
             <a:spAutoFit/>
           </a:bodyPr>
           <a:lstStyle/>
           <a:p>
             <a:pPr algn="ctr"/>
             <a:r>
-              <a:rPr sz="3200" b="1">
-                <a:solidFill>
-                  <a:srgbClr val="047857"/>
-                </a:solidFill>
+              <a:rPr sz="850">
+                <a:solidFill>
+                  <a:srgbClr val="D6E0F0"/>
+                </a:solidFill>
+                <a:latin typeface="Calibri"/>
               </a:rPr>
-              <a:t>33</a:t>
-            </a:r>
-          </a:p>
-        </p:txBody>
-      </p:sp>
-      <p:sp>
-        <p:nvSpPr>
-          <p:cNvPr id="9" name="TextBox 8"/>
+              <a:t>LOTS</a:t>
+            </a:r>
+          </a:p>
+        </p:txBody>
+      </p:sp>
+      <p:sp>
+        <p:nvSpPr>
+          <p:cNvPr id="17418" name="TextBox 17417"/>
           <p:cNvSpPr txBox="1"/>
           <p:nvPr/>
         </p:nvSpPr>
         <p:spPr>
           <a:xfrm>
-            <a:off x="3154680" y="1874519"/>
-            <a:ext cx="2194560" cy="548640"/>
+            <a:off x="8481060" y="5102352"/>
+            <a:ext cx="1028700" cy="411480"/>
           </a:xfrm>
           <a:prstGeom prst="rect">
             <a:avLst/>
@@ -8454,79 +9720,34 @@
           <a:noFill/>
         </p:spPr>
         <p:txBody>
-          <a:bodyPr wrap="square">
+          <a:bodyPr wrap="square" anchor="t" lIns="0" rIns="0" tIns="0" bIns="0">
             <a:spAutoFit/>
           </a:bodyPr>
           <a:lstStyle/>
           <a:p>
             <a:pPr algn="ctr"/>
             <a:r>
-              <a:rPr sz="1000" b="0">
-                <a:solidFill>
-                  <a:srgbClr val="57534E"/>
-                </a:solidFill>
+              <a:rPr sz="2400" b="1">
+                <a:solidFill>
+                  <a:srgbClr val="3FCB94"/>
+                </a:solidFill>
+                <a:latin typeface="Calibri"/>
               </a:rPr>
-              <a:t>Crops tracked
-70 mandis</a:t>
-            </a:r>
-          </a:p>
-        </p:txBody>
-      </p:sp>
-      <p:sp>
-        <p:nvSpPr>
-          <p:cNvPr id="10" name="Rectangle 9"/>
-          <p:cNvSpPr/>
-          <p:nvPr/>
-        </p:nvSpPr>
-        <p:spPr>
-          <a:xfrm>
-            <a:off x="5669280" y="1280160"/>
-            <a:ext cx="2377440" cy="1280160"/>
-          </a:xfrm>
-          <a:prstGeom prst="rect">
-            <a:avLst/>
-          </a:prstGeom>
-          <a:solidFill>
-            <a:srgbClr val="ECFDF5"/>
-          </a:solidFill>
-          <a:ln w="12700">
-            <a:solidFill>
-              <a:srgbClr val="D1FAE5"/>
-            </a:solidFill>
-          </a:ln>
-        </p:spPr>
-        <p:style>
-          <a:lnRef idx="1">
-            <a:schemeClr val="accent1"/>
-          </a:lnRef>
-          <a:fillRef idx="3">
-            <a:schemeClr val="accent1"/>
-          </a:fillRef>
-          <a:effectRef idx="2">
-            <a:schemeClr val="accent1"/>
-          </a:effectRef>
-          <a:fontRef idx="minor">
-            <a:schemeClr val="lt1"/>
-          </a:fontRef>
-        </p:style>
-        <p:txBody>
-          <a:bodyPr rtlCol="0" anchor="ctr"/>
-          <a:lstStyle/>
-          <a:p>
-            <a:pPr algn="ctr"/>
-          </a:p>
-        </p:txBody>
-      </p:sp>
-      <p:sp>
-        <p:nvSpPr>
-          <p:cNvPr id="11" name="TextBox 10"/>
+              <a:t>10</a:t>
+            </a:r>
+          </a:p>
+        </p:txBody>
+      </p:sp>
+      <p:sp>
+        <p:nvSpPr>
+          <p:cNvPr id="17419" name="TextBox 17418"/>
           <p:cNvSpPr txBox="1"/>
           <p:nvPr/>
         </p:nvSpPr>
         <p:spPr>
           <a:xfrm>
-            <a:off x="5760720" y="1371600"/>
-            <a:ext cx="2194560" cy="548640"/>
+            <a:off x="8481060" y="5559552"/>
+            <a:ext cx="1028700" cy="457200"/>
           </a:xfrm>
           <a:prstGeom prst="rect">
             <a:avLst/>
@@ -8534,33 +9755,35 @@
           <a:noFill/>
         </p:spPr>
         <p:txBody>
-          <a:bodyPr wrap="square">
+          <a:bodyPr wrap="square" anchor="t" lIns="0" rIns="0" tIns="0" bIns="0">
             <a:spAutoFit/>
           </a:bodyPr>
           <a:lstStyle/>
           <a:p>
             <a:pPr algn="ctr"/>
             <a:r>
-              <a:rPr sz="3200" b="1">
-                <a:solidFill>
-                  <a:srgbClr val="047857"/>
-                </a:solidFill>
+              <a:rPr sz="850">
+                <a:solidFill>
+                  <a:srgbClr val="D6E0F0"/>
+                </a:solidFill>
+                <a:latin typeface="Calibri"/>
               </a:rPr>
-              <a:t>99.2%</a:t>
-            </a:r>
-          </a:p>
-        </p:txBody>
-      </p:sp>
-      <p:sp>
-        <p:nvSpPr>
-          <p:cNvPr id="12" name="TextBox 11"/>
+              <a:t>MATCHED
+BUYERS</a:t>
+            </a:r>
+          </a:p>
+        </p:txBody>
+      </p:sp>
+      <p:sp>
+        <p:nvSpPr>
+          <p:cNvPr id="17420" name="TextBox 17419"/>
           <p:cNvSpPr txBox="1"/>
           <p:nvPr/>
         </p:nvSpPr>
         <p:spPr>
           <a:xfrm>
-            <a:off x="5760720" y="1874519"/>
-            <a:ext cx="2194560" cy="548640"/>
+            <a:off x="9509760" y="5102352"/>
+            <a:ext cx="1028700" cy="411480"/>
           </a:xfrm>
           <a:prstGeom prst="rect">
             <a:avLst/>
@@ -8568,79 +9791,34 @@
           <a:noFill/>
         </p:spPr>
         <p:txBody>
-          <a:bodyPr wrap="square">
+          <a:bodyPr wrap="square" anchor="t" lIns="0" rIns="0" tIns="0" bIns="0">
             <a:spAutoFit/>
           </a:bodyPr>
           <a:lstStyle/>
           <a:p>
             <a:pPr algn="ctr"/>
             <a:r>
-              <a:rPr sz="1000" b="0">
-                <a:solidFill>
-                  <a:srgbClr val="57534E"/>
-                </a:solidFill>
+              <a:rPr sz="2400" b="1">
+                <a:solidFill>
+                  <a:srgbClr val="3FCB94"/>
+                </a:solidFill>
+                <a:latin typeface="Calibri"/>
               </a:rPr>
-              <a:t>ML accuracy
-23,609 images</a:t>
-            </a:r>
-          </a:p>
-        </p:txBody>
-      </p:sp>
-      <p:sp>
-        <p:nvSpPr>
-          <p:cNvPr id="13" name="Rectangle 12"/>
-          <p:cNvSpPr/>
-          <p:nvPr/>
-        </p:nvSpPr>
-        <p:spPr>
-          <a:xfrm>
-            <a:off x="8275320" y="1280160"/>
-            <a:ext cx="2377440" cy="1280160"/>
-          </a:xfrm>
-          <a:prstGeom prst="rect">
-            <a:avLst/>
-          </a:prstGeom>
-          <a:solidFill>
-            <a:srgbClr val="ECFDF5"/>
-          </a:solidFill>
-          <a:ln w="12700">
-            <a:solidFill>
-              <a:srgbClr val="D1FAE5"/>
-            </a:solidFill>
-          </a:ln>
-        </p:spPr>
-        <p:style>
-          <a:lnRef idx="1">
-            <a:schemeClr val="accent1"/>
-          </a:lnRef>
-          <a:fillRef idx="3">
-            <a:schemeClr val="accent1"/>
-          </a:fillRef>
-          <a:effectRef idx="2">
-            <a:schemeClr val="accent1"/>
-          </a:effectRef>
-          <a:fontRef idx="minor">
-            <a:schemeClr val="lt1"/>
-          </a:fontRef>
-        </p:style>
-        <p:txBody>
-          <a:bodyPr rtlCol="0" anchor="ctr"/>
-          <a:lstStyle/>
-          <a:p>
-            <a:pPr algn="ctr"/>
-          </a:p>
-        </p:txBody>
-      </p:sp>
-      <p:sp>
-        <p:nvSpPr>
-          <p:cNvPr id="14" name="TextBox 13"/>
+              <a:t>6</a:t>
+            </a:r>
+          </a:p>
+        </p:txBody>
+      </p:sp>
+      <p:sp>
+        <p:nvSpPr>
+          <p:cNvPr id="17421" name="TextBox 17420"/>
           <p:cNvSpPr txBox="1"/>
           <p:nvPr/>
         </p:nvSpPr>
         <p:spPr>
           <a:xfrm>
-            <a:off x="8366760" y="1371600"/>
-            <a:ext cx="2194560" cy="548640"/>
+            <a:off x="9509760" y="5559552"/>
+            <a:ext cx="1028700" cy="457200"/>
           </a:xfrm>
           <a:prstGeom prst="rect">
             <a:avLst/>
@@ -8648,33 +9826,35 @@
           <a:noFill/>
         </p:spPr>
         <p:txBody>
-          <a:bodyPr wrap="square">
+          <a:bodyPr wrap="square" anchor="t" lIns="0" rIns="0" tIns="0" bIns="0">
             <a:spAutoFit/>
           </a:bodyPr>
           <a:lstStyle/>
           <a:p>
             <a:pPr algn="ctr"/>
             <a:r>
-              <a:rPr sz="3200" b="1">
-                <a:solidFill>
-                  <a:srgbClr val="047857"/>
-                </a:solidFill>
+              <a:rPr sz="850">
+                <a:solidFill>
+                  <a:srgbClr val="D6E0F0"/>
+                </a:solidFill>
+                <a:latin typeface="Calibri"/>
               </a:rPr>
-              <a:t>1,221</a:t>
-            </a:r>
-          </a:p>
-        </p:txBody>
-      </p:sp>
-      <p:sp>
-        <p:nvSpPr>
-          <p:cNvPr id="15" name="TextBox 14"/>
+              <a:t>ACTIVE
+OFFERS</a:t>
+            </a:r>
+          </a:p>
+        </p:txBody>
+      </p:sp>
+      <p:sp>
+        <p:nvSpPr>
+          <p:cNvPr id="17422" name="TextBox 17421"/>
           <p:cNvSpPr txBox="1"/>
           <p:nvPr/>
         </p:nvSpPr>
         <p:spPr>
           <a:xfrm>
-            <a:off x="8366760" y="1874519"/>
-            <a:ext cx="2194560" cy="548640"/>
+            <a:off x="10538460" y="5102352"/>
+            <a:ext cx="1028700" cy="411480"/>
           </a:xfrm>
           <a:prstGeom prst="rect">
             <a:avLst/>
@@ -8682,34 +9862,34 @@
           <a:noFill/>
         </p:spPr>
         <p:txBody>
-          <a:bodyPr wrap="square">
+          <a:bodyPr wrap="square" anchor="t" lIns="0" rIns="0" tIns="0" bIns="0">
             <a:spAutoFit/>
           </a:bodyPr>
           <a:lstStyle/>
           <a:p>
             <a:pPr algn="ctr"/>
             <a:r>
-              <a:rPr sz="1000" b="0">
-                <a:solidFill>
-                  <a:srgbClr val="57534E"/>
-                </a:solidFill>
+              <a:rPr sz="2400" b="1">
+                <a:solidFill>
+                  <a:srgbClr val="3FCB94"/>
+                </a:solidFill>
+                <a:latin typeface="Calibri"/>
               </a:rPr>
-              <a:t>Keys per language
-3 languages</a:t>
-            </a:r>
-          </a:p>
-        </p:txBody>
-      </p:sp>
-      <p:sp>
-        <p:nvSpPr>
-          <p:cNvPr id="16" name="TextBox 15"/>
+              <a:t>3</a:t>
+            </a:r>
+          </a:p>
+        </p:txBody>
+      </p:sp>
+      <p:sp>
+        <p:nvSpPr>
+          <p:cNvPr id="17423" name="TextBox 17422"/>
           <p:cNvSpPr txBox="1"/>
           <p:nvPr/>
         </p:nvSpPr>
         <p:spPr>
           <a:xfrm>
-            <a:off x="457200" y="2926080"/>
-            <a:ext cx="5029200" cy="274320"/>
+            <a:off x="10538460" y="5559552"/>
+            <a:ext cx="1028700" cy="457200"/>
           </a:xfrm>
           <a:prstGeom prst="rect">
             <a:avLst/>
@@ -8717,175 +9897,21 @@
           <a:noFill/>
         </p:spPr>
         <p:txBody>
-          <a:bodyPr wrap="square">
+          <a:bodyPr wrap="square" anchor="t" lIns="0" rIns="0" tIns="0" bIns="0">
             <a:spAutoFit/>
           </a:bodyPr>
           <a:lstStyle/>
           <a:p>
-            <a:pPr algn="l"/>
-            <a:r>
-              <a:rPr sz="900" b="1">
-                <a:solidFill>
-                  <a:srgbClr val="047857"/>
-                </a:solidFill>
+            <a:pPr algn="ctr"/>
+            <a:r>
+              <a:rPr sz="850">
+                <a:solidFill>
+                  <a:srgbClr val="D6E0F0"/>
+                </a:solidFill>
+                <a:latin typeface="Calibri"/>
               </a:rPr>
-              <a:t>ARCHITECTURE</a:t>
-            </a:r>
-          </a:p>
-        </p:txBody>
-      </p:sp>
-      <p:sp>
-        <p:nvSpPr>
-          <p:cNvPr id="17" name="TextBox 16"/>
-          <p:cNvSpPr txBox="1"/>
-          <p:nvPr/>
-        </p:nvSpPr>
-        <p:spPr>
-          <a:xfrm>
-            <a:off x="457200" y="3200400"/>
-            <a:ext cx="5029200" cy="2286000"/>
-          </a:xfrm>
-          <a:prstGeom prst="rect">
-            <a:avLst/>
-          </a:prstGeom>
-          <a:noFill/>
-        </p:spPr>
-        <p:txBody>
-          <a:bodyPr wrap="square">
-            <a:spAutoFit/>
-          </a:bodyPr>
-          <a:lstStyle/>
-          <a:p>
-            <a:pPr>
-              <a:spcAft>
-                <a:spcPts val="400"/>
-              </a:spcAft>
-            </a:pPr>
-            <a:r>
-              <a:rPr sz="1000" b="0">
-                <a:solidFill>
-                  <a:srgbClr val="1C1917"/>
-                </a:solidFill>
-              </a:rPr>
-              <a:t>React + Vite + Tailwind + TF.js (in-browser grader)</a:t>
-            </a:r>
-          </a:p>
-          <a:p>
-            <a:pPr>
-              <a:spcAft>
-                <a:spcPts val="400"/>
-              </a:spcAft>
-            </a:pPr>
-            <a:r>
-              <a:rPr sz="1000" b="0">
-                <a:solidFill>
-                  <a:srgbClr val="1C1917"/>
-                </a:solidFill>
-              </a:rPr>
-              <a:t>Node/Express API — 22 routes, MongoDB Atlas</a:t>
-            </a:r>
-          </a:p>
-          <a:p>
-            <a:pPr>
-              <a:spcAft>
-                <a:spcPts val="400"/>
-              </a:spcAft>
-            </a:pPr>
-            <a:r>
-              <a:rPr sz="1000" b="0">
-                <a:solidFill>
-                  <a:srgbClr val="1C1917"/>
-                </a:solidFill>
-              </a:rPr>
-              <a:t>Python FastAPI: net-realization, disease CNN, advisory RAG</a:t>
-            </a:r>
-          </a:p>
-          <a:p>
-            <a:pPr>
-              <a:spcAft>
-                <a:spcPts val="400"/>
-              </a:spcAft>
-            </a:pPr>
-            <a:r>
-              <a:rPr sz="1000" b="0">
-                <a:solidFill>
-                  <a:srgbClr val="1C1917"/>
-                </a:solidFill>
-              </a:rPr>
-              <a:t>AGMARKNET live + stamped snapshot; Groq LLM explains only</a:t>
-            </a:r>
-          </a:p>
-          <a:p>
-            <a:pPr>
-              <a:spcAft>
-                <a:spcPts val="400"/>
-              </a:spcAft>
-            </a:pPr>
-            <a:r>
-              <a:rPr sz="1000" b="0">
-                <a:solidFill>
-                  <a:srgbClr val="1C1917"/>
-                </a:solidFill>
-              </a:rPr>
-              <a:t>3 services on Render: web (static), API (Node), calc (Python)</a:t>
-            </a:r>
-          </a:p>
-        </p:txBody>
-      </p:sp>
-      <p:pic>
-        <p:nvPicPr>
-          <p:cNvPr id="18" name="Picture 17" descr="ppt-grade.png"/>
-          <p:cNvPicPr>
-            <a:picLocks noChangeAspect="1"/>
-          </p:cNvPicPr>
-          <p:nvPr/>
-        </p:nvPicPr>
-        <p:blipFill>
-          <a:blip r:embed="rId6"/>
-          <a:stretch>
-            <a:fillRect/>
-          </a:stretch>
-        </p:blipFill>
-        <p:spPr>
-          <a:xfrm>
-            <a:off x="6217920" y="2926080"/>
-            <a:ext cx="4572000" cy="3017520"/>
-          </a:xfrm>
-          <a:prstGeom prst="rect">
-            <a:avLst/>
-          </a:prstGeom>
-        </p:spPr>
-      </p:pic>
-      <p:sp>
-        <p:nvSpPr>
-          <p:cNvPr id="19" name="TextBox 18"/>
-          <p:cNvSpPr txBox="1"/>
-          <p:nvPr/>
-        </p:nvSpPr>
-        <p:spPr>
-          <a:xfrm>
-            <a:off x="6217920" y="5577840"/>
-            <a:ext cx="4572000" cy="274320"/>
-          </a:xfrm>
-          <a:prstGeom prst="rect">
-            <a:avLst/>
-          </a:prstGeom>
-          <a:noFill/>
-        </p:spPr>
-        <p:txBody>
-          <a:bodyPr wrap="square">
-            <a:spAutoFit/>
-          </a:bodyPr>
-          <a:lstStyle/>
-          <a:p>
-            <a:pPr algn="ctr"/>
-            <a:r>
-              <a:rPr sz="800" b="0">
-                <a:solidFill>
-                  <a:srgbClr val="57534E"/>
-                </a:solidFill>
-              </a:rPr>
-              <a:t>AI Grading Model loaded — runs in-browser, zero server upload</a:t>
+              <a:t>SIMULATED
+PAYMENTS</a:t>
             </a:r>
           </a:p>
         </p:txBody>
@@ -8906,14 +9932,6 @@
 <file path=ppt/slides/slide5.xml><?xml version="1.0" encoding="utf-8"?>
 <p:sld xmlns:a="http://schemas.openxmlformats.org/drawingml/2006/main" xmlns:r="http://schemas.openxmlformats.org/officeDocument/2006/relationships" xmlns:p="http://schemas.openxmlformats.org/presentationml/2006/main">
   <p:cSld>
-    <p:bg>
-      <p:bgPr>
-        <a:solidFill>
-          <a:srgbClr val="FFFFFF"/>
-        </a:solidFill>
-        <a:effectLst/>
-      </p:bgPr>
-    </p:bg>
     <p:spTree>
       <p:nvGrpSpPr>
         <p:cNvPr id="1" name=""/>
@@ -8930,92 +9948,390 @@
       </p:grpSpPr>
       <p:sp>
         <p:nvSpPr>
-          <p:cNvPr id="2" name="TextBox 1"/>
-          <p:cNvSpPr txBox="1"/>
+          <p:cNvPr id="10" name="Rectangle 9">
+            <a:extLst>
+              <a:ext uri="{FF2B5EF4-FFF2-40B4-BE49-F238E27FC236}">
+                <a16:creationId xmlns:a16="http://schemas.microsoft.com/office/drawing/2014/main" id="{AD4F69D3-EEB0-4C4C-9434-B9960FB5854C}"/>
+              </a:ext>
+            </a:extLst>
+          </p:cNvPr>
+          <p:cNvSpPr>
+            <a:spLocks noChangeArrowheads="1"/>
+          </p:cNvSpPr>
           <p:nvPr/>
         </p:nvSpPr>
-        <p:spPr>
-          <a:xfrm>
-            <a:off x="457200" y="274320"/>
-            <a:ext cx="8229600" cy="274320"/>
-          </a:xfrm>
-          <a:prstGeom prst="rect">
-            <a:avLst/>
-          </a:prstGeom>
-          <a:noFill/>
-        </p:spPr>
-        <p:txBody>
-          <a:bodyPr wrap="square">
-            <a:spAutoFit/>
-          </a:bodyPr>
-          <a:lstStyle/>
-          <a:p>
-            <a:pPr algn="l"/>
-            <a:r>
-              <a:rPr sz="900" b="1">
-                <a:solidFill>
-                  <a:srgbClr val="047857"/>
-                </a:solidFill>
-              </a:rPr>
-              <a:t>LIVE PROOF &amp; FEASIBILITY</a:t>
-            </a:r>
-          </a:p>
-        </p:txBody>
-      </p:sp>
-      <p:sp>
-        <p:nvSpPr>
-          <p:cNvPr id="3" name="TextBox 2"/>
-          <p:cNvSpPr txBox="1"/>
-          <p:nvPr/>
-        </p:nvSpPr>
-        <p:spPr>
-          <a:xfrm>
-            <a:off x="457200" y="548640"/>
-            <a:ext cx="6400800" cy="548640"/>
-          </a:xfrm>
-          <a:prstGeom prst="rect">
-            <a:avLst/>
-          </a:prstGeom>
-          <a:noFill/>
-        </p:spPr>
-        <p:txBody>
-          <a:bodyPr wrap="square">
-            <a:spAutoFit/>
-          </a:bodyPr>
-          <a:lstStyle/>
-          <a:p>
-            <a:pPr algn="l"/>
-            <a:r>
-              <a:rPr sz="2200" b="1">
-                <a:solidFill>
-                  <a:srgbClr val="1C1917"/>
-                </a:solidFill>
-              </a:rPr>
-              <a:t>TRL 6 — deployed today</a:t>
-            </a:r>
-          </a:p>
-        </p:txBody>
-      </p:sp>
-      <p:sp>
-        <p:nvSpPr>
-          <p:cNvPr id="4" name="Rectangle 3"/>
-          <p:cNvSpPr/>
-          <p:nvPr/>
-        </p:nvSpPr>
-        <p:spPr>
-          <a:xfrm>
-            <a:off x="457200" y="1188720"/>
-            <a:ext cx="4572000" cy="411480"/>
+        <p:spPr bwMode="auto">
+          <a:xfrm>
+            <a:off x="0" y="6354762"/>
+            <a:ext cx="12191999" cy="503238"/>
           </a:xfrm>
           <a:prstGeom prst="rect">
             <a:avLst/>
           </a:prstGeom>
           <a:solidFill>
-            <a:srgbClr val="047857"/>
+            <a:srgbClr val="0070C0"/>
+          </a:solidFill>
+          <a:ln w="9525">
+            <a:noFill/>
+            <a:miter lim="800000"/>
+            <a:headEnd/>
+            <a:tailEnd/>
+          </a:ln>
+          <a:effectLst>
+            <a:outerShdw dist="23000" dir="5400000" rotWithShape="0">
+              <a:srgbClr val="808080">
+                <a:alpha val="34999"/>
+              </a:srgbClr>
+            </a:outerShdw>
+          </a:effectLst>
+        </p:spPr>
+        <p:txBody>
+          <a:bodyPr anchor="ctr"/>
+          <a:lstStyle/>
+          <a:p>
+            <a:pPr marL="0" marR="0" lvl="0" indent="0" algn="ctr" defTabSz="457200" rtl="0" eaLnBrk="1" fontAlgn="auto" latinLnBrk="0" hangingPunct="1">
+              <a:lnSpc>
+                <a:spcPct val="100000"/>
+              </a:lnSpc>
+              <a:spcBef>
+                <a:spcPts val="0"/>
+              </a:spcBef>
+              <a:spcAft>
+                <a:spcPts val="0"/>
+              </a:spcAft>
+              <a:buClrTx/>
+              <a:buSzTx/>
+              <a:buFontTx/>
+              <a:buNone/>
+              <a:tabLst/>
+              <a:defRPr/>
+            </a:pPr>
+            <a:endParaRPr kumimoji="0" lang="en-US" sz="1800" b="0" i="0" u="none" strike="noStrike" kern="1200" cap="none" spc="0" normalizeH="0" baseline="0" noProof="0" dirty="0">
+              <a:ln>
+                <a:noFill/>
+              </a:ln>
+              <a:solidFill>
+                <a:srgbClr val="C0504D">
+                  <a:lumMod val="75000"/>
+                </a:srgbClr>
+              </a:solidFill>
+              <a:effectLst/>
+              <a:uLnTx/>
+              <a:uFillTx/>
+              <a:latin typeface="Calibri"/>
+              <a:ea typeface="ＭＳ Ｐゴシック" pitchFamily="1" charset="-128"/>
+              <a:cs typeface="+mn-cs"/>
+            </a:endParaRPr>
+          </a:p>
+        </p:txBody>
+      </p:sp>
+      <p:sp>
+        <p:nvSpPr>
+          <p:cNvPr id="17409" name="Title 1"/>
+          <p:cNvSpPr>
+            <a:spLocks noGrp="1"/>
+          </p:cNvSpPr>
+          <p:nvPr>
+            <p:ph type="title"/>
+          </p:nvPr>
+        </p:nvSpPr>
+        <p:spPr>
+          <a:xfrm>
+            <a:off x="609904" y="-47548"/>
+            <a:ext cx="8778240" cy="1143000"/>
+          </a:xfrm>
+        </p:spPr>
+        <p:txBody>
+          <a:bodyPr/>
+          <a:lstStyle/>
+          <a:p>
+            <a:r>
+              <a:t>IMPACT AND BENEFITS</a:t>
+            </a:r>
+          </a:p>
+        </p:txBody>
+      </p:sp>
+      <p:sp>
+        <p:nvSpPr>
+          <p:cNvPr id="6" name="Slide Number Placeholder 5"/>
+          <p:cNvSpPr>
+            <a:spLocks noGrp="1"/>
+          </p:cNvSpPr>
+          <p:nvPr>
+            <p:ph type="sldNum" sz="quarter" idx="12"/>
+          </p:nvPr>
+        </p:nvSpPr>
+        <p:spPr/>
+        <p:txBody>
+          <a:bodyPr/>
+          <a:lstStyle/>
+          <a:p>
+            <a:pPr marL="0" marR="0" lvl="0" indent="0" algn="r" defTabSz="457200" rtl="0" eaLnBrk="1" fontAlgn="base" latinLnBrk="0" hangingPunct="1">
+              <a:lnSpc>
+                <a:spcPct val="100000"/>
+              </a:lnSpc>
+              <a:spcBef>
+                <a:spcPct val="0"/>
+              </a:spcBef>
+              <a:spcAft>
+                <a:spcPct val="0"/>
+              </a:spcAft>
+              <a:buClrTx/>
+              <a:buSzTx/>
+              <a:buFontTx/>
+              <a:buNone/>
+              <a:tabLst/>
+              <a:defRPr/>
+            </a:pPr>
+            <a:fld id="{677C3CE7-23F7-4828-823C-E0205DF2CF97}" type="slidenum">
+              <a:rPr kumimoji="0" lang="en-US" sz="1200" b="1" i="0" u="none" strike="noStrike" kern="1200" cap="none" spc="0" normalizeH="0" baseline="0" noProof="0">
+                <a:ln>
+                  <a:noFill/>
+                </a:ln>
+                <a:solidFill>
+                  <a:prstClr val="white"/>
+                </a:solidFill>
+                <a:effectLst/>
+                <a:uLnTx/>
+                <a:uFillTx/>
+                <a:latin typeface="TradeGothic" pitchFamily="1" charset="0"/>
+                <a:ea typeface="ＭＳ Ｐゴシック" pitchFamily="1" charset="-128"/>
+                <a:cs typeface="+mn-cs"/>
+              </a:rPr>
+              <a:pPr marL="0" marR="0" lvl="0" indent="0" algn="r" defTabSz="457200" rtl="0" eaLnBrk="1" fontAlgn="base" latinLnBrk="0" hangingPunct="1">
+                <a:lnSpc>
+                  <a:spcPct val="100000"/>
+                </a:lnSpc>
+                <a:spcBef>
+                  <a:spcPct val="0"/>
+                </a:spcBef>
+                <a:spcAft>
+                  <a:spcPct val="0"/>
+                </a:spcAft>
+                <a:buClrTx/>
+                <a:buSzTx/>
+                <a:buFontTx/>
+                <a:buNone/>
+                <a:tabLst/>
+                <a:defRPr/>
+              </a:pPr>
+              <a:t>5</a:t>
+            </a:fld>
+            <a:endParaRPr kumimoji="0" lang="en-US" sz="1200" b="1" i="0" u="none" strike="noStrike" kern="1200" cap="none" spc="0" normalizeH="0" baseline="0" noProof="0" dirty="0">
+              <a:ln>
+                <a:noFill/>
+              </a:ln>
+              <a:solidFill>
+                <a:prstClr val="white"/>
+              </a:solidFill>
+              <a:effectLst/>
+              <a:uLnTx/>
+              <a:uFillTx/>
+              <a:latin typeface="TradeGothic" pitchFamily="1" charset="0"/>
+              <a:ea typeface="ＭＳ Ｐゴシック" pitchFamily="1" charset="-128"/>
+              <a:cs typeface="+mn-cs"/>
+            </a:endParaRPr>
+          </a:p>
+        </p:txBody>
+      </p:sp>
+      <p:sp>
+        <p:nvSpPr>
+          <p:cNvPr id="7" name="Footer Placeholder 6"/>
+          <p:cNvSpPr>
+            <a:spLocks noGrp="1"/>
+          </p:cNvSpPr>
+          <p:nvPr>
+            <p:ph type="ftr" sz="quarter" idx="11"/>
+          </p:nvPr>
+        </p:nvSpPr>
+        <p:spPr>
+          <a:xfrm>
+            <a:off x="4648200" y="6356353"/>
+            <a:ext cx="3204000" cy="365125"/>
+          </a:xfrm>
+        </p:spPr>
+        <p:txBody>
+          <a:bodyPr/>
+          <a:lstStyle/>
+          <a:p>
+            <a:pPr marL="0" marR="0" lvl="0" indent="0" algn="ctr" defTabSz="457200" rtl="0" eaLnBrk="1" fontAlgn="auto" latinLnBrk="0" hangingPunct="1">
+              <a:lnSpc>
+                <a:spcPct val="100000"/>
+              </a:lnSpc>
+              <a:spcBef>
+                <a:spcPts val="0"/>
+              </a:spcBef>
+              <a:spcAft>
+                <a:spcPts val="0"/>
+              </a:spcAft>
+              <a:buClrTx/>
+              <a:buSzTx/>
+              <a:buFontTx/>
+              <a:buNone/>
+              <a:tabLst/>
+              <a:defRPr/>
+            </a:pPr>
+            <a:r>
+              <a:rPr kumimoji="0" lang="en-US" sz="1200" b="0" i="0" u="none" strike="noStrike" kern="1200" cap="none" spc="0" normalizeH="0" baseline="0" noProof="0">
+                <a:ln>
+                  <a:noFill/>
+                </a:ln>
+                <a:solidFill>
+                  <a:prstClr val="white"/>
+                </a:solidFill>
+                <a:effectLst/>
+                <a:uLnTx/>
+                <a:uFillTx/>
+                <a:latin typeface="TradeGothic"/>
+                <a:ea typeface="+mn-ea"/>
+                <a:cs typeface="+mn-cs"/>
+              </a:rPr>
+              <a:t>@SIH Idea submission- Template</a:t>
+            </a:r>
+            <a:endParaRPr kumimoji="0" lang="en-US" sz="1200" b="0" i="0" u="none" strike="noStrike" kern="1200" cap="none" spc="0" normalizeH="0" baseline="0" noProof="0" dirty="0">
+              <a:ln>
+                <a:noFill/>
+              </a:ln>
+              <a:solidFill>
+                <a:prstClr val="white"/>
+              </a:solidFill>
+              <a:effectLst/>
+              <a:uLnTx/>
+              <a:uFillTx/>
+              <a:latin typeface="TradeGothic"/>
+              <a:ea typeface="+mn-ea"/>
+              <a:cs typeface="+mn-cs"/>
+            </a:endParaRPr>
+          </a:p>
+        </p:txBody>
+      </p:sp>
+      <p:sp>
+        <p:nvSpPr>
+          <p:cNvPr id="12" name="Oval 11" descr="Your startup LOGO">
+            <a:extLst>
+              <a:ext uri="{FF2B5EF4-FFF2-40B4-BE49-F238E27FC236}">
+                <a16:creationId xmlns:a16="http://schemas.microsoft.com/office/drawing/2014/main" id="{5DBCE864-823D-4A13-9607-5DA1F0ED5FB8}"/>
+              </a:ext>
+              <a:ext uri="{C183D7F6-B498-43B3-948B-1728B52AA6E4}">
+                <adec:decorative xmlns:adec="http://schemas.microsoft.com/office/drawing/2017/decorative" val="0"/>
+              </a:ext>
+            </a:extLst>
+          </p:cNvPr>
+          <p:cNvSpPr/>
+          <p:nvPr/>
+        </p:nvSpPr>
+        <p:spPr>
+          <a:xfrm>
+            <a:off x="329773" y="252246"/>
+            <a:ext cx="1417320" cy="807334"/>
+          </a:xfrm>
+          <a:prstGeom prst="ellipse">
+            <a:avLst/>
+          </a:prstGeom>
+        </p:spPr>
+        <p:style>
+          <a:lnRef idx="2">
+            <a:schemeClr val="accent4"/>
+          </a:lnRef>
+          <a:fillRef idx="1">
+            <a:schemeClr val="lt1"/>
+          </a:fillRef>
+          <a:effectRef idx="0">
+            <a:schemeClr val="accent4"/>
+          </a:effectRef>
+          <a:fontRef idx="minor">
+            <a:schemeClr val="dk1"/>
+          </a:fontRef>
+        </p:style>
+        <p:txBody>
+          <a:bodyPr rtlCol="0" anchor="ctr" wrap="none"/>
+          <a:lstStyle/>
+          <a:p>
+            <a:pPr algn="ctr"/>
+            <a:r>
+              <a:rPr sz="1300"/>
+              <a:t>Kisan360</a:t>
+            </a:r>
+          </a:p>
+        </p:txBody>
+      </p:sp>
+      <p:pic>
+        <p:nvPicPr>
+          <p:cNvPr id="11" name="Picture 10"/>
+          <p:cNvPicPr>
+            <a:picLocks noChangeAspect="1"/>
+          </p:cNvPicPr>
+          <p:nvPr/>
+        </p:nvPicPr>
+        <p:blipFill>
+          <a:blip r:embed="rId3">
+            <a:extLst>
+              <a:ext uri="{28A0092B-C50C-407E-A947-70E740481C1C}">
+                <a14:useLocalDpi xmlns:a14="http://schemas.microsoft.com/office/drawing/2010/main" val="0"/>
+              </a:ext>
+            </a:extLst>
+          </a:blip>
+          <a:stretch>
+            <a:fillRect/>
+          </a:stretch>
+        </p:blipFill>
+        <p:spPr>
+          <a:xfrm>
+            <a:off x="9780086" y="1500"/>
+            <a:ext cx="2249850" cy="1062337"/>
+          </a:xfrm>
+          <a:prstGeom prst="rect">
+            <a:avLst/>
+          </a:prstGeom>
+        </p:spPr>
+      </p:pic>
+      <p:pic>
+        <p:nvPicPr>
+          <p:cNvPr id="17411" name="Picture 17410" descr="kisan360-mark.png"/>
+          <p:cNvPicPr>
+            <a:picLocks noChangeAspect="1"/>
+          </p:cNvPicPr>
+          <p:nvPr/>
+        </p:nvPicPr>
+        <p:blipFill>
+          <a:blip r:embed="rId4"/>
+          <a:stretch>
+            <a:fillRect/>
+          </a:stretch>
+        </p:blipFill>
+        <p:spPr>
+          <a:xfrm>
+            <a:off x="11631168" y="6327648"/>
+            <a:ext cx="411480" cy="411480"/>
+          </a:xfrm>
+          <a:prstGeom prst="rect">
+            <a:avLst/>
+          </a:prstGeom>
+        </p:spPr>
+      </p:pic>
+      <p:sp>
+        <p:nvSpPr>
+          <p:cNvPr id="17412" name="Rounded Rectangle 17411"/>
+          <p:cNvSpPr/>
+          <p:nvPr/>
+        </p:nvSpPr>
+        <p:spPr>
+          <a:xfrm>
+            <a:off x="548640" y="1371600"/>
+            <a:ext cx="5120640" cy="1554480"/>
+          </a:xfrm>
+          <a:prstGeom prst="roundRect">
+            <a:avLst>
+              <a:gd name="adj" fmla="val 8000"/>
+            </a:avLst>
+          </a:prstGeom>
+          <a:solidFill>
+            <a:srgbClr val="1F3864"/>
           </a:solidFill>
           <a:ln>
             <a:noFill/>
           </a:ln>
+          <a:effectLst/>
         </p:spPr>
         <p:style>
           <a:lnRef idx="1">
@@ -9041,14 +10357,14 @@
       </p:sp>
       <p:sp>
         <p:nvSpPr>
-          <p:cNvPr id="5" name="TextBox 4"/>
+          <p:cNvPr id="17413" name="TextBox 17412"/>
           <p:cNvSpPr txBox="1"/>
           <p:nvPr/>
         </p:nvSpPr>
         <p:spPr>
           <a:xfrm>
-            <a:off x="640080" y="1216152"/>
-            <a:ext cx="4114800" cy="365760"/>
+            <a:off x="822960" y="1508760"/>
+            <a:ext cx="4572000" cy="237744"/>
           </a:xfrm>
           <a:prstGeom prst="rect">
             <a:avLst/>
@@ -9056,57 +10372,34 @@
           <a:noFill/>
         </p:spPr>
         <p:txBody>
-          <a:bodyPr wrap="square">
+          <a:bodyPr wrap="square" anchor="t" lIns="0" rIns="0" tIns="0" bIns="0">
             <a:spAutoFit/>
           </a:bodyPr>
           <a:lstStyle/>
           <a:p>
             <a:pPr algn="l"/>
             <a:r>
-              <a:rPr sz="1400" b="1">
-                <a:solidFill>
-                  <a:srgbClr val="FFFFFF"/>
-                </a:solidFill>
+              <a:rPr sz="1000" b="1">
+                <a:solidFill>
+                  <a:srgbClr val="9FB3D1"/>
+                </a:solidFill>
+                <a:latin typeface="Calibri"/>
               </a:rPr>
-              <a:t>kisan360-web.onrender.com</a:t>
-            </a:r>
-          </a:p>
-        </p:txBody>
-      </p:sp>
-      <p:pic>
-        <p:nvPicPr>
-          <p:cNvPr id="6" name="Picture 5" descr="ppt-dashboard.png"/>
-          <p:cNvPicPr>
-            <a:picLocks noChangeAspect="1"/>
-          </p:cNvPicPr>
-          <p:nvPr/>
-        </p:nvPicPr>
-        <p:blipFill>
-          <a:blip r:embed="rId5"/>
-          <a:stretch>
-            <a:fillRect/>
-          </a:stretch>
-        </p:blipFill>
-        <p:spPr>
-          <a:xfrm>
-            <a:off x="457200" y="1828800"/>
-            <a:ext cx="3291840" cy="2011680"/>
-          </a:xfrm>
-          <a:prstGeom prst="rect">
-            <a:avLst/>
-          </a:prstGeom>
-        </p:spPr>
-      </p:pic>
-      <p:sp>
-        <p:nvSpPr>
-          <p:cNvPr id="7" name="TextBox 6"/>
+              <a:t>ESTIMATED TAKE-HOME · ONION · NAGPUR · 10 q</a:t>
+            </a:r>
+          </a:p>
+        </p:txBody>
+      </p:sp>
+      <p:sp>
+        <p:nvSpPr>
+          <p:cNvPr id="17414" name="TextBox 17413"/>
           <p:cNvSpPr txBox="1"/>
           <p:nvPr/>
         </p:nvSpPr>
         <p:spPr>
           <a:xfrm>
-            <a:off x="457200" y="3886200"/>
-            <a:ext cx="3291840" cy="274320"/>
+            <a:off x="822960" y="1755648"/>
+            <a:ext cx="4572000" cy="640080"/>
           </a:xfrm>
           <a:prstGeom prst="rect">
             <a:avLst/>
@@ -9114,57 +10407,137 @@
           <a:noFill/>
         </p:spPr>
         <p:txBody>
-          <a:bodyPr wrap="square">
+          <a:bodyPr wrap="square" anchor="t" lIns="0" rIns="0" tIns="0" bIns="0">
             <a:spAutoFit/>
           </a:bodyPr>
           <a:lstStyle/>
           <a:p>
+            <a:pPr algn="l"/>
+            <a:r>
+              <a:rPr sz="4000" b="1">
+                <a:solidFill>
+                  <a:srgbClr val="3FCB94"/>
+                </a:solidFill>
+                <a:latin typeface="Calibri"/>
+              </a:rPr>
+              <a:t>₹40,432</a:t>
+            </a:r>
+          </a:p>
+        </p:txBody>
+      </p:sp>
+      <p:sp>
+        <p:nvSpPr>
+          <p:cNvPr id="17415" name="Rounded Rectangle 17414"/>
+          <p:cNvSpPr/>
+          <p:nvPr/>
+        </p:nvSpPr>
+        <p:spPr>
+          <a:xfrm>
+            <a:off x="822960" y="2487168"/>
+            <a:ext cx="3200400" cy="292608"/>
+          </a:xfrm>
+          <a:prstGeom prst="roundRect">
+            <a:avLst>
+              <a:gd name="adj" fmla="val 50000"/>
+            </a:avLst>
+          </a:prstGeom>
+          <a:solidFill>
+            <a:srgbClr val="5C3B12"/>
+          </a:solidFill>
+          <a:ln>
+            <a:noFill/>
+          </a:ln>
+          <a:effectLst/>
+        </p:spPr>
+        <p:style>
+          <a:lnRef idx="1">
+            <a:schemeClr val="accent1"/>
+          </a:lnRef>
+          <a:fillRef idx="3">
+            <a:schemeClr val="accent1"/>
+          </a:fillRef>
+          <a:effectRef idx="2">
+            <a:schemeClr val="accent1"/>
+          </a:effectRef>
+          <a:fontRef idx="minor">
+            <a:schemeClr val="lt1"/>
+          </a:fontRef>
+        </p:style>
+        <p:txBody>
+          <a:bodyPr rtlCol="0" anchor="ctr" lIns="0" rIns="0" tIns="0" bIns="0" wrap="none"/>
+          <a:lstStyle/>
+          <a:p>
             <a:pPr algn="ctr"/>
             <a:r>
-              <a:rPr sz="900" b="0">
-                <a:solidFill>
-                  <a:srgbClr val="57534E"/>
-                </a:solidFill>
+              <a:rPr sz="1000" b="1">
+                <a:solidFill>
+                  <a:srgbClr val="F79646"/>
+                </a:solidFill>
+                <a:latin typeface="Calibri"/>
               </a:rPr>
-              <a:t>Dashboard — live AGMARKNET pulse</a:t>
-            </a:r>
-          </a:p>
-        </p:txBody>
-      </p:sp>
-      <p:pic>
-        <p:nvPicPr>
-          <p:cNvPr id="8" name="Picture 7" descr="ppt-netreal.png"/>
-          <p:cNvPicPr>
-            <a:picLocks noChangeAspect="1"/>
-          </p:cNvPicPr>
+              <a:t>⚠ ESTIMATED — NOT GUARANTEED</a:t>
+            </a:r>
+          </a:p>
+        </p:txBody>
+      </p:sp>
+      <p:sp>
+        <p:nvSpPr>
+          <p:cNvPr id="17416" name="Rounded Rectangle 17415"/>
+          <p:cNvSpPr/>
           <p:nvPr/>
-        </p:nvPicPr>
-        <p:blipFill>
-          <a:blip r:embed="rId6"/>
-          <a:stretch>
-            <a:fillRect/>
-          </a:stretch>
-        </p:blipFill>
-        <p:spPr>
-          <a:xfrm>
-            <a:off x="4023360" y="1828800"/>
-            <a:ext cx="3291840" cy="2011680"/>
-          </a:xfrm>
-          <a:prstGeom prst="rect">
-            <a:avLst/>
+        </p:nvSpPr>
+        <p:spPr>
+          <a:xfrm>
+            <a:off x="5852160" y="1371600"/>
+            <a:ext cx="5788152" cy="1554480"/>
+          </a:xfrm>
+          <a:prstGeom prst="roundRect">
+            <a:avLst>
+              <a:gd name="adj" fmla="val 8000"/>
+            </a:avLst>
           </a:prstGeom>
-        </p:spPr>
-      </p:pic>
-      <p:sp>
-        <p:nvSpPr>
-          <p:cNvPr id="9" name="TextBox 8"/>
+          <a:solidFill>
+            <a:srgbClr val="FDEEDA"/>
+          </a:solidFill>
+          <a:ln w="12700">
+            <a:solidFill>
+              <a:srgbClr val="F79646"/>
+            </a:solidFill>
+          </a:ln>
+          <a:effectLst/>
+        </p:spPr>
+        <p:style>
+          <a:lnRef idx="1">
+            <a:schemeClr val="accent1"/>
+          </a:lnRef>
+          <a:fillRef idx="3">
+            <a:schemeClr val="accent1"/>
+          </a:fillRef>
+          <a:effectRef idx="2">
+            <a:schemeClr val="accent1"/>
+          </a:effectRef>
+          <a:fontRef idx="minor">
+            <a:schemeClr val="lt1"/>
+          </a:fontRef>
+        </p:style>
+        <p:txBody>
+          <a:bodyPr rtlCol="0" anchor="ctr"/>
+          <a:lstStyle/>
+          <a:p>
+            <a:pPr algn="ctr"/>
+          </a:p>
+        </p:txBody>
+      </p:sp>
+      <p:sp>
+        <p:nvSpPr>
+          <p:cNvPr id="17417" name="TextBox 17416"/>
           <p:cNvSpPr txBox="1"/>
           <p:nvPr/>
         </p:nvSpPr>
         <p:spPr>
           <a:xfrm>
-            <a:off x="4023360" y="3886200"/>
-            <a:ext cx="3291840" cy="274320"/>
+            <a:off x="6108192" y="1444752"/>
+            <a:ext cx="5303520" cy="777240"/>
           </a:xfrm>
           <a:prstGeom prst="rect">
             <a:avLst/>
@@ -9172,57 +10545,34 @@
           <a:noFill/>
         </p:spPr>
         <p:txBody>
-          <a:bodyPr wrap="square">
+          <a:bodyPr wrap="square" anchor="t" lIns="0" rIns="0" tIns="0" bIns="0">
             <a:spAutoFit/>
           </a:bodyPr>
           <a:lstStyle/>
           <a:p>
-            <a:pPr algn="ctr"/>
-            <a:r>
-              <a:rPr sz="900" b="0">
-                <a:solidFill>
-                  <a:srgbClr val="57534E"/>
-                </a:solidFill>
+            <a:pPr algn="l"/>
+            <a:r>
+              <a:rPr sz="1700" b="1" i="1">
+                <a:solidFill>
+                  <a:srgbClr val="B45309"/>
+                </a:solidFill>
+                <a:latin typeface="Calibri"/>
               </a:rPr>
-              <a:t>Net Realization — deterministic ranking</a:t>
-            </a:r>
-          </a:p>
-        </p:txBody>
-      </p:sp>
-      <p:pic>
-        <p:nvPicPr>
-          <p:cNvPr id="10" name="Picture 9" descr="ppt-trade.png"/>
-          <p:cNvPicPr>
-            <a:picLocks noChangeAspect="1"/>
-          </p:cNvPicPr>
-          <p:nvPr/>
-        </p:nvPicPr>
-        <p:blipFill>
-          <a:blip r:embed="rId7"/>
-          <a:stretch>
-            <a:fillRect/>
-          </a:stretch>
-        </p:blipFill>
-        <p:spPr>
-          <a:xfrm>
-            <a:off x="7589520" y="1828800"/>
-            <a:ext cx="3291840" cy="2011680"/>
-          </a:xfrm>
-          <a:prstGeom prst="rect">
-            <a:avLst/>
-          </a:prstGeom>
-        </p:spPr>
-      </p:pic>
-      <p:sp>
-        <p:nvSpPr>
-          <p:cNvPr id="11" name="TextBox 10"/>
+              <a:t>“Estimated decision difference — not an income guarantee.”</a:t>
+            </a:r>
+          </a:p>
+        </p:txBody>
+      </p:sp>
+      <p:sp>
+        <p:nvSpPr>
+          <p:cNvPr id="17418" name="TextBox 17417"/>
           <p:cNvSpPr txBox="1"/>
           <p:nvPr/>
         </p:nvSpPr>
         <p:spPr>
           <a:xfrm>
-            <a:off x="7589520" y="3886200"/>
-            <a:ext cx="3291840" cy="274320"/>
+            <a:off x="6108192" y="2212848"/>
+            <a:ext cx="5303520" cy="621792"/>
           </a:xfrm>
           <a:prstGeom prst="rect">
             <a:avLst/>
@@ -9230,7 +10580,7 @@
           <a:noFill/>
         </p:spPr>
         <p:txBody>
-          <a:bodyPr wrap="square">
+          <a:bodyPr wrap="square" anchor="t" lIns="0" rIns="0" tIns="0" bIns="0">
             <a:spAutoFit/>
           </a:bodyPr>
           <a:lstStyle/>
@@ -9242,21 +10592,117 @@
                   <a:srgbClr val="57534E"/>
                 </a:solidFill>
               </a:rPr>
-              <a:t>Trade — lots, buyers, offers</a:t>
-            </a:r>
-          </a:p>
-        </p:txBody>
-      </p:sp>
-      <p:sp>
-        <p:nvSpPr>
-          <p:cNvPr id="12" name="TextBox 11"/>
+              <a:t>Every metric labeled: Live, Estimated, Assumption, or Simulated — never a guaranteed benefit.</a:t>
+            </a:r>
+          </a:p>
+        </p:txBody>
+      </p:sp>
+      <p:sp>
+        <p:nvSpPr>
+          <p:cNvPr id="17419" name="Rounded Rectangle 17418"/>
+          <p:cNvSpPr/>
+          <p:nvPr/>
+        </p:nvSpPr>
+        <p:spPr>
+          <a:xfrm>
+            <a:off x="591159" y="3200400"/>
+            <a:ext cx="2615184" cy="1691640"/>
+          </a:xfrm>
+          <a:prstGeom prst="roundRect">
+            <a:avLst>
+              <a:gd name="adj" fmla="val 6000"/>
+            </a:avLst>
+          </a:prstGeom>
+          <a:solidFill>
+            <a:srgbClr val="F5F7FA"/>
+          </a:solidFill>
+          <a:ln w="12700">
+            <a:solidFill>
+              <a:srgbClr val="D9D9D9"/>
+            </a:solidFill>
+          </a:ln>
+          <a:effectLst/>
+        </p:spPr>
+        <p:style>
+          <a:lnRef idx="1">
+            <a:schemeClr val="accent1"/>
+          </a:lnRef>
+          <a:fillRef idx="3">
+            <a:schemeClr val="accent1"/>
+          </a:fillRef>
+          <a:effectRef idx="2">
+            <a:schemeClr val="accent1"/>
+          </a:effectRef>
+          <a:fontRef idx="minor">
+            <a:schemeClr val="lt1"/>
+          </a:fontRef>
+        </p:style>
+        <p:txBody>
+          <a:bodyPr rtlCol="0" anchor="ctr"/>
+          <a:lstStyle/>
+          <a:p>
+            <a:pPr algn="ctr"/>
+          </a:p>
+        </p:txBody>
+      </p:sp>
+      <p:sp>
+        <p:nvSpPr>
+          <p:cNvPr id="17420" name="Rounded Rectangle 17419"/>
+          <p:cNvSpPr/>
+          <p:nvPr/>
+        </p:nvSpPr>
+        <p:spPr>
+          <a:xfrm>
+            <a:off x="774039" y="3364992"/>
+            <a:ext cx="365760" cy="365760"/>
+          </a:xfrm>
+          <a:prstGeom prst="roundRect">
+            <a:avLst>
+              <a:gd name="adj" fmla="val 50000"/>
+            </a:avLst>
+          </a:prstGeom>
+          <a:solidFill>
+            <a:srgbClr val="E7F5EE"/>
+          </a:solidFill>
+          <a:ln w="12700">
+            <a:solidFill>
+              <a:srgbClr val="047857"/>
+            </a:solidFill>
+          </a:ln>
+          <a:effectLst/>
+        </p:spPr>
+        <p:style>
+          <a:lnRef idx="1">
+            <a:schemeClr val="accent1"/>
+          </a:lnRef>
+          <a:fillRef idx="3">
+            <a:schemeClr val="accent1"/>
+          </a:fillRef>
+          <a:effectRef idx="2">
+            <a:schemeClr val="accent1"/>
+          </a:effectRef>
+          <a:fontRef idx="minor">
+            <a:schemeClr val="lt1"/>
+          </a:fontRef>
+        </p:style>
+        <p:txBody>
+          <a:bodyPr rtlCol="0" anchor="ctr"/>
+          <a:lstStyle/>
+          <a:p>
+            <a:pPr algn="ctr"/>
+          </a:p>
+        </p:txBody>
+      </p:sp>
+      <p:sp>
+        <p:nvSpPr>
+          <p:cNvPr id="17421" name="TextBox 17420"/>
           <p:cNvSpPr txBox="1"/>
           <p:nvPr/>
         </p:nvSpPr>
         <p:spPr>
           <a:xfrm>
-            <a:off x="457200" y="4389120"/>
-            <a:ext cx="10058400" cy="274320"/>
+            <a:off x="774039" y="3364992"/>
+            <a:ext cx="365760" cy="365760"/>
           </a:xfrm>
           <a:prstGeom prst="rect">
             <a:avLst/>
@@ -9264,33 +10710,34 @@
           <a:noFill/>
         </p:spPr>
         <p:txBody>
-          <a:bodyPr wrap="square">
+          <a:bodyPr wrap="square" anchor="ctr" lIns="0" rIns="0" tIns="0" bIns="0">
             <a:spAutoFit/>
           </a:bodyPr>
           <a:lstStyle/>
           <a:p>
-            <a:pPr algn="l"/>
-            <a:r>
-              <a:rPr sz="900" b="1">
+            <a:pPr algn="ctr"/>
+            <a:r>
+              <a:rPr sz="1300" b="1">
                 <a:solidFill>
                   <a:srgbClr val="047857"/>
                 </a:solidFill>
+                <a:latin typeface="Calibri"/>
               </a:rPr>
-              <a:t>RISKS &amp; MITIGATIONS</a:t>
-            </a:r>
-          </a:p>
-        </p:txBody>
-      </p:sp>
-      <p:sp>
-        <p:nvSpPr>
-          <p:cNvPr id="13" name="TextBox 12"/>
+              <a:t>1</a:t>
+            </a:r>
+          </a:p>
+        </p:txBody>
+      </p:sp>
+      <p:sp>
+        <p:nvSpPr>
+          <p:cNvPr id="17422" name="TextBox 17421"/>
           <p:cNvSpPr txBox="1"/>
           <p:nvPr/>
         </p:nvSpPr>
         <p:spPr>
           <a:xfrm>
-            <a:off x="457200" y="4663440"/>
-            <a:ext cx="1828800" cy="228600"/>
+            <a:off x="774039" y="3803904"/>
+            <a:ext cx="2249424" cy="292608"/>
           </a:xfrm>
           <a:prstGeom prst="rect">
             <a:avLst/>
@@ -9298,33 +10745,34 @@
           <a:noFill/>
         </p:spPr>
         <p:txBody>
-          <a:bodyPr wrap="square">
+          <a:bodyPr wrap="square" anchor="t" lIns="0" rIns="0" tIns="0" bIns="0">
             <a:spAutoFit/>
           </a:bodyPr>
           <a:lstStyle/>
           <a:p>
             <a:pPr algn="l"/>
             <a:r>
-              <a:rPr sz="900" b="1">
-                <a:solidFill>
-                  <a:srgbClr val="1C1917"/>
-                </a:solidFill>
+              <a:rPr sz="1500" b="1">
+                <a:solidFill>
+                  <a:srgbClr val="1F497D"/>
+                </a:solidFill>
+                <a:latin typeface="Calibri"/>
               </a:rPr>
-              <a:t>AGMARKNET down:</a:t>
-            </a:r>
-          </a:p>
-        </p:txBody>
-      </p:sp>
-      <p:sp>
-        <p:nvSpPr>
-          <p:cNvPr id="14" name="TextBox 13"/>
+              <a:t>Farmer</a:t>
+            </a:r>
+          </a:p>
+        </p:txBody>
+      </p:sp>
+      <p:sp>
+        <p:nvSpPr>
+          <p:cNvPr id="17423" name="TextBox 17422"/>
           <p:cNvSpPr txBox="1"/>
           <p:nvPr/>
         </p:nvSpPr>
         <p:spPr>
           <a:xfrm>
-            <a:off x="2286000" y="4663440"/>
-            <a:ext cx="3200400" cy="228600"/>
+            <a:off x="774039" y="4114800"/>
+            <a:ext cx="2249424" cy="713232"/>
           </a:xfrm>
           <a:prstGeom prst="rect">
             <a:avLst/>
@@ -9332,33 +10780,133 @@
           <a:noFill/>
         </p:spPr>
         <p:txBody>
-          <a:bodyPr wrap="square">
+          <a:bodyPr wrap="square" anchor="t" lIns="0" rIns="0" tIns="0" bIns="0">
             <a:spAutoFit/>
           </a:bodyPr>
           <a:lstStyle/>
           <a:p>
-            <a:pPr algn="l"/>
+            <a:pPr algn="l">
+              <a:lnSpc>
+                <a:spcPct val="110000"/>
+              </a:lnSpc>
+            </a:pPr>
             <a:r>
               <a:rPr sz="900" b="0">
                 <a:solidFill>
                   <a:srgbClr val="57534E"/>
                 </a:solidFill>
               </a:rPr>
-              <a:t>Stamped snapshot fallback, UI says CACHED</a:t>
-            </a:r>
-          </a:p>
-        </p:txBody>
-      </p:sp>
-      <p:sp>
-        <p:nvSpPr>
-          <p:cNvPr id="15" name="TextBox 14"/>
+              <a:t>Better sale choice per lot, backed by transparent net-realization evidence.</a:t>
+            </a:r>
+          </a:p>
+        </p:txBody>
+      </p:sp>
+      <p:sp>
+        <p:nvSpPr>
+          <p:cNvPr id="17424" name="Rounded Rectangle 17423"/>
+          <p:cNvSpPr/>
+          <p:nvPr/>
+        </p:nvSpPr>
+        <p:spPr>
+          <a:xfrm>
+            <a:off x="3389223" y="3200400"/>
+            <a:ext cx="2615184" cy="1691640"/>
+          </a:xfrm>
+          <a:prstGeom prst="roundRect">
+            <a:avLst>
+              <a:gd name="adj" fmla="val 6000"/>
+            </a:avLst>
+          </a:prstGeom>
+          <a:solidFill>
+            <a:srgbClr val="F5F7FA"/>
+          </a:solidFill>
+          <a:ln w="12700">
+            <a:solidFill>
+              <a:srgbClr val="D9D9D9"/>
+            </a:solidFill>
+          </a:ln>
+          <a:effectLst/>
+        </p:spPr>
+        <p:style>
+          <a:lnRef idx="1">
+            <a:schemeClr val="accent1"/>
+          </a:lnRef>
+          <a:fillRef idx="3">
+            <a:schemeClr val="accent1"/>
+          </a:fillRef>
+          <a:effectRef idx="2">
+            <a:schemeClr val="accent1"/>
+          </a:effectRef>
+          <a:fontRef idx="minor">
+            <a:schemeClr val="lt1"/>
+          </a:fontRef>
+        </p:style>
+        <p:txBody>
+          <a:bodyPr rtlCol="0" anchor="ctr"/>
+          <a:lstStyle/>
+          <a:p>
+            <a:pPr algn="ctr"/>
+          </a:p>
+        </p:txBody>
+      </p:sp>
+      <p:sp>
+        <p:nvSpPr>
+          <p:cNvPr id="17425" name="Rounded Rectangle 17424"/>
+          <p:cNvSpPr/>
+          <p:nvPr/>
+        </p:nvSpPr>
+        <p:spPr>
+          <a:xfrm>
+            <a:off x="3572103" y="3364992"/>
+            <a:ext cx="365760" cy="365760"/>
+          </a:xfrm>
+          <a:prstGeom prst="roundRect">
+            <a:avLst>
+              <a:gd name="adj" fmla="val 50000"/>
+            </a:avLst>
+          </a:prstGeom>
+          <a:solidFill>
+            <a:srgbClr val="E7F5EE"/>
+          </a:solidFill>
+          <a:ln w="12700">
+            <a:solidFill>
+              <a:srgbClr val="047857"/>
+            </a:solidFill>
+          </a:ln>
+          <a:effectLst/>
+        </p:spPr>
+        <p:style>
+          <a:lnRef idx="1">
+            <a:schemeClr val="accent1"/>
+          </a:lnRef>
+          <a:fillRef idx="3">
+            <a:schemeClr val="accent1"/>
+          </a:fillRef>
+          <a:effectRef idx="2">
+            <a:schemeClr val="accent1"/>
+          </a:effectRef>
+          <a:fontRef idx="minor">
+            <a:schemeClr val="lt1"/>
+          </a:fontRef>
+        </p:style>
+        <p:txBody>
+          <a:bodyPr rtlCol="0" anchor="ctr"/>
+          <a:lstStyle/>
+          <a:p>
+            <a:pPr algn="ctr"/>
+          </a:p>
+        </p:txBody>
+      </p:sp>
+      <p:sp>
+        <p:nvSpPr>
+          <p:cNvPr id="17426" name="TextBox 17425"/>
           <p:cNvSpPr txBox="1"/>
           <p:nvPr/>
         </p:nvSpPr>
         <p:spPr>
           <a:xfrm>
-            <a:off x="5760720" y="4663440"/>
-            <a:ext cx="1828800" cy="228600"/>
+            <a:off x="3572103" y="3364992"/>
+            <a:ext cx="365760" cy="365760"/>
           </a:xfrm>
           <a:prstGeom prst="rect">
             <a:avLst/>
@@ -9366,33 +10914,34 @@
           <a:noFill/>
         </p:spPr>
         <p:txBody>
-          <a:bodyPr wrap="square">
+          <a:bodyPr wrap="square" anchor="ctr" lIns="0" rIns="0" tIns="0" bIns="0">
             <a:spAutoFit/>
           </a:bodyPr>
           <a:lstStyle/>
           <a:p>
-            <a:pPr algn="l"/>
-            <a:r>
-              <a:rPr sz="900" b="1">
-                <a:solidFill>
-                  <a:srgbClr val="1C1917"/>
-                </a:solidFill>
+            <a:pPr algn="ctr"/>
+            <a:r>
+              <a:rPr sz="1300" b="1">
+                <a:solidFill>
+                  <a:srgbClr val="047857"/>
+                </a:solidFill>
+                <a:latin typeface="Calibri"/>
               </a:rPr>
-              <a:t>Atlas unreachable:</a:t>
-            </a:r>
-          </a:p>
-        </p:txBody>
-      </p:sp>
-      <p:sp>
-        <p:nvSpPr>
-          <p:cNvPr id="16" name="TextBox 15"/>
+              <a:t>2</a:t>
+            </a:r>
+          </a:p>
+        </p:txBody>
+      </p:sp>
+      <p:sp>
+        <p:nvSpPr>
+          <p:cNvPr id="17427" name="TextBox 17426"/>
           <p:cNvSpPr txBox="1"/>
           <p:nvPr/>
         </p:nvSpPr>
         <p:spPr>
           <a:xfrm>
-            <a:off x="7589520" y="4663440"/>
-            <a:ext cx="3200400" cy="228600"/>
+            <a:off x="3572103" y="3803904"/>
+            <a:ext cx="2249424" cy="292608"/>
           </a:xfrm>
           <a:prstGeom prst="rect">
             <a:avLst/>
@@ -9400,33 +10949,33 @@
           <a:noFill/>
         </p:spPr>
         <p:txBody>
-          <a:bodyPr wrap="square">
+          <a:bodyPr wrap="square" anchor="t" lIns="0" rIns="0" tIns="0" bIns="0">
             <a:spAutoFit/>
           </a:bodyPr>
           <a:lstStyle/>
           <a:p>
             <a:pPr algn="l"/>
             <a:r>
-              <a:rPr sz="900" b="0">
-                <a:solidFill>
-                  <a:srgbClr val="57534E"/>
+              <a:rPr sz="1100" b="1">
+                <a:solidFill>
+                  <a:srgbClr val="1C1917"/>
                 </a:solidFill>
               </a:rPr>
-              <a:t>Memory DB + reseed on restart</a:t>
-            </a:r>
-          </a:p>
-        </p:txBody>
-      </p:sp>
-      <p:sp>
-        <p:nvSpPr>
-          <p:cNvPr id="17" name="TextBox 16"/>
+              <a:t>FPO</a:t>
+            </a:r>
+          </a:p>
+        </p:txBody>
+      </p:sp>
+      <p:sp>
+        <p:nvSpPr>
+          <p:cNvPr id="17428" name="TextBox 17427"/>
           <p:cNvSpPr txBox="1"/>
           <p:nvPr/>
         </p:nvSpPr>
         <p:spPr>
           <a:xfrm>
-            <a:off x="457200" y="5166359"/>
-            <a:ext cx="1828800" cy="228600"/>
+            <a:off x="3572103" y="4114800"/>
+            <a:ext cx="2249424" cy="713232"/>
           </a:xfrm>
           <a:prstGeom prst="rect">
             <a:avLst/>
@@ -9434,33 +10983,133 @@
           <a:noFill/>
         </p:spPr>
         <p:txBody>
-          <a:bodyPr wrap="square">
+          <a:bodyPr wrap="square" anchor="t" lIns="0" rIns="0" tIns="0" bIns="0">
             <a:spAutoFit/>
           </a:bodyPr>
           <a:lstStyle/>
           <a:p>
-            <a:pPr algn="l"/>
-            <a:r>
-              <a:rPr sz="900" b="1">
-                <a:solidFill>
-                  <a:srgbClr val="1C1917"/>
+            <a:pPr algn="l">
+              <a:lnSpc>
+                <a:spcPct val="110000"/>
+              </a:lnSpc>
+            </a:pPr>
+            <a:r>
+              <a:rPr sz="900" b="0">
+                <a:solidFill>
+                  <a:srgbClr val="57534E"/>
                 </a:solidFill>
               </a:rPr>
-              <a:t>Buyers simulated:</a:t>
-            </a:r>
-          </a:p>
-        </p:txBody>
-      </p:sp>
-      <p:sp>
-        <p:nvSpPr>
-          <p:cNvPr id="18" name="TextBox 17"/>
+              <a:t>Bulk transport tier + buyer minimums unlocked through 50q+ pooling.</a:t>
+            </a:r>
+          </a:p>
+        </p:txBody>
+      </p:sp>
+      <p:sp>
+        <p:nvSpPr>
+          <p:cNvPr id="17429" name="Rounded Rectangle 17428"/>
+          <p:cNvSpPr/>
+          <p:nvPr/>
+        </p:nvSpPr>
+        <p:spPr>
+          <a:xfrm>
+            <a:off x="6187287" y="3200400"/>
+            <a:ext cx="2615184" cy="1691640"/>
+          </a:xfrm>
+          <a:prstGeom prst="roundRect">
+            <a:avLst>
+              <a:gd name="adj" fmla="val 6000"/>
+            </a:avLst>
+          </a:prstGeom>
+          <a:solidFill>
+            <a:srgbClr val="F5F7FA"/>
+          </a:solidFill>
+          <a:ln w="12700">
+            <a:solidFill>
+              <a:srgbClr val="D9D9D9"/>
+            </a:solidFill>
+          </a:ln>
+          <a:effectLst/>
+        </p:spPr>
+        <p:style>
+          <a:lnRef idx="1">
+            <a:schemeClr val="accent1"/>
+          </a:lnRef>
+          <a:fillRef idx="3">
+            <a:schemeClr val="accent1"/>
+          </a:fillRef>
+          <a:effectRef idx="2">
+            <a:schemeClr val="accent1"/>
+          </a:effectRef>
+          <a:fontRef idx="minor">
+            <a:schemeClr val="lt1"/>
+          </a:fontRef>
+        </p:style>
+        <p:txBody>
+          <a:bodyPr rtlCol="0" anchor="ctr"/>
+          <a:lstStyle/>
+          <a:p>
+            <a:pPr algn="ctr"/>
+          </a:p>
+        </p:txBody>
+      </p:sp>
+      <p:sp>
+        <p:nvSpPr>
+          <p:cNvPr id="17430" name="Rounded Rectangle 17429"/>
+          <p:cNvSpPr/>
+          <p:nvPr/>
+        </p:nvSpPr>
+        <p:spPr>
+          <a:xfrm>
+            <a:off x="6370167" y="3364992"/>
+            <a:ext cx="365760" cy="365760"/>
+          </a:xfrm>
+          <a:prstGeom prst="roundRect">
+            <a:avLst>
+              <a:gd name="adj" fmla="val 50000"/>
+            </a:avLst>
+          </a:prstGeom>
+          <a:solidFill>
+            <a:srgbClr val="E7F5EE"/>
+          </a:solidFill>
+          <a:ln w="12700">
+            <a:solidFill>
+              <a:srgbClr val="047857"/>
+            </a:solidFill>
+          </a:ln>
+          <a:effectLst/>
+        </p:spPr>
+        <p:style>
+          <a:lnRef idx="1">
+            <a:schemeClr val="accent1"/>
+          </a:lnRef>
+          <a:fillRef idx="3">
+            <a:schemeClr val="accent1"/>
+          </a:fillRef>
+          <a:effectRef idx="2">
+            <a:schemeClr val="accent1"/>
+          </a:effectRef>
+          <a:fontRef idx="minor">
+            <a:schemeClr val="lt1"/>
+          </a:fontRef>
+        </p:style>
+        <p:txBody>
+          <a:bodyPr rtlCol="0" anchor="ctr"/>
+          <a:lstStyle/>
+          <a:p>
+            <a:pPr algn="ctr"/>
+          </a:p>
+        </p:txBody>
+      </p:sp>
+      <p:sp>
+        <p:nvSpPr>
+          <p:cNvPr id="17431" name="TextBox 17430"/>
           <p:cNvSpPr txBox="1"/>
           <p:nvPr/>
         </p:nvSpPr>
         <p:spPr>
           <a:xfrm>
-            <a:off x="2286000" y="5166359"/>
-            <a:ext cx="3200400" cy="228600"/>
+            <a:off x="6370167" y="3364992"/>
+            <a:ext cx="365760" cy="365760"/>
           </a:xfrm>
           <a:prstGeom prst="rect">
             <a:avLst/>
@@ -9468,33 +11117,34 @@
           <a:noFill/>
         </p:spPr>
         <p:txBody>
-          <a:bodyPr wrap="square">
+          <a:bodyPr wrap="square" anchor="ctr" lIns="0" rIns="0" tIns="0" bIns="0">
             <a:spAutoFit/>
           </a:bodyPr>
           <a:lstStyle/>
           <a:p>
-            <a:pPr algn="l"/>
-            <a:r>
-              <a:rPr sz="900" b="0">
-                <a:solidFill>
-                  <a:srgbClr val="57534E"/>
-                </a:solidFill>
+            <a:pPr algn="ctr"/>
+            <a:r>
+              <a:rPr sz="1300" b="1">
+                <a:solidFill>
+                  <a:srgbClr val="047857"/>
+                </a:solidFill>
+                <a:latin typeface="Calibri"/>
               </a:rPr>
-              <a:t>4-tier trust labels + SIMULATED banners everywhere</a:t>
-            </a:r>
-          </a:p>
-        </p:txBody>
-      </p:sp>
-      <p:sp>
-        <p:nvSpPr>
-          <p:cNvPr id="19" name="TextBox 18"/>
+              <a:t>3</a:t>
+            </a:r>
+          </a:p>
+        </p:txBody>
+      </p:sp>
+      <p:sp>
+        <p:nvSpPr>
+          <p:cNvPr id="17432" name="TextBox 17431"/>
           <p:cNvSpPr txBox="1"/>
           <p:nvPr/>
         </p:nvSpPr>
         <p:spPr>
           <a:xfrm>
-            <a:off x="5760720" y="5166359"/>
-            <a:ext cx="1828800" cy="228600"/>
+            <a:off x="6370167" y="3803904"/>
+            <a:ext cx="2249424" cy="292608"/>
           </a:xfrm>
           <a:prstGeom prst="rect">
             <a:avLst/>
@@ -9502,33 +11152,33 @@
           <a:noFill/>
         </p:spPr>
         <p:txBody>
-          <a:bodyPr wrap="square">
+          <a:bodyPr wrap="square" anchor="t" lIns="0" rIns="0" tIns="0" bIns="0">
             <a:spAutoFit/>
           </a:bodyPr>
           <a:lstStyle/>
           <a:p>
             <a:pPr algn="l"/>
             <a:r>
-              <a:rPr sz="900" b="1">
+              <a:rPr sz="1100" b="1">
                 <a:solidFill>
                   <a:srgbClr val="1C1917"/>
                 </a:solidFill>
               </a:rPr>
-              <a:t>Calculator sleeps:</a:t>
-            </a:r>
-          </a:p>
-        </p:txBody>
-      </p:sp>
-      <p:sp>
-        <p:nvSpPr>
-          <p:cNvPr id="20" name="TextBox 19"/>
+              <a:t>Buyer</a:t>
+            </a:r>
+          </a:p>
+        </p:txBody>
+      </p:sp>
+      <p:sp>
+        <p:nvSpPr>
+          <p:cNvPr id="17433" name="TextBox 17432"/>
           <p:cNvSpPr txBox="1"/>
           <p:nvPr/>
         </p:nvSpPr>
         <p:spPr>
           <a:xfrm>
-            <a:off x="7589520" y="5166359"/>
-            <a:ext cx="3200400" cy="228600"/>
+            <a:off x="6370167" y="4114800"/>
+            <a:ext cx="2249424" cy="713232"/>
           </a:xfrm>
           <a:prstGeom prst="rect">
             <a:avLst/>
@@ -9536,19 +11186,307 @@
           <a:noFill/>
         </p:spPr>
         <p:txBody>
-          <a:bodyPr wrap="square">
+          <a:bodyPr wrap="square" anchor="t" lIns="0" rIns="0" tIns="0" bIns="0">
             <a:spAutoFit/>
           </a:bodyPr>
           <a:lstStyle/>
           <a:p>
+            <a:pPr algn="l">
+              <a:lnSpc>
+                <a:spcPct val="110000"/>
+              </a:lnSpc>
+            </a:pPr>
+            <a:r>
+              <a:rPr sz="900" b="0">
+                <a:solidFill>
+                  <a:srgbClr val="57534E"/>
+                </a:solidFill>
+              </a:rPr>
+              <a:t>Aggregated, AGMARK-graded lots — lower sourcing risk.</a:t>
+            </a:r>
+          </a:p>
+        </p:txBody>
+      </p:sp>
+      <p:sp>
+        <p:nvSpPr>
+          <p:cNvPr id="17434" name="Rounded Rectangle 17433"/>
+          <p:cNvSpPr/>
+          <p:nvPr/>
+        </p:nvSpPr>
+        <p:spPr>
+          <a:xfrm>
+            <a:off x="8985351" y="3200400"/>
+            <a:ext cx="2615184" cy="1691640"/>
+          </a:xfrm>
+          <a:prstGeom prst="roundRect">
+            <a:avLst>
+              <a:gd name="adj" fmla="val 6000"/>
+            </a:avLst>
+          </a:prstGeom>
+          <a:solidFill>
+            <a:srgbClr val="F5F7FA"/>
+          </a:solidFill>
+          <a:ln w="12700">
+            <a:solidFill>
+              <a:srgbClr val="D9D9D9"/>
+            </a:solidFill>
+          </a:ln>
+          <a:effectLst/>
+        </p:spPr>
+        <p:style>
+          <a:lnRef idx="1">
+            <a:schemeClr val="accent1"/>
+          </a:lnRef>
+          <a:fillRef idx="3">
+            <a:schemeClr val="accent1"/>
+          </a:fillRef>
+          <a:effectRef idx="2">
+            <a:schemeClr val="accent1"/>
+          </a:effectRef>
+          <a:fontRef idx="minor">
+            <a:schemeClr val="lt1"/>
+          </a:fontRef>
+        </p:style>
+        <p:txBody>
+          <a:bodyPr rtlCol="0" anchor="ctr"/>
+          <a:lstStyle/>
+          <a:p>
+            <a:pPr algn="ctr"/>
+          </a:p>
+        </p:txBody>
+      </p:sp>
+      <p:sp>
+        <p:nvSpPr>
+          <p:cNvPr id="17435" name="Rounded Rectangle 17434"/>
+          <p:cNvSpPr/>
+          <p:nvPr/>
+        </p:nvSpPr>
+        <p:spPr>
+          <a:xfrm>
+            <a:off x="9168231" y="3364992"/>
+            <a:ext cx="365760" cy="365760"/>
+          </a:xfrm>
+          <a:prstGeom prst="roundRect">
+            <a:avLst>
+              <a:gd name="adj" fmla="val 50000"/>
+            </a:avLst>
+          </a:prstGeom>
+          <a:solidFill>
+            <a:srgbClr val="E7F5EE"/>
+          </a:solidFill>
+          <a:ln w="12700">
+            <a:solidFill>
+              <a:srgbClr val="047857"/>
+            </a:solidFill>
+          </a:ln>
+          <a:effectLst/>
+        </p:spPr>
+        <p:style>
+          <a:lnRef idx="1">
+            <a:schemeClr val="accent1"/>
+          </a:lnRef>
+          <a:fillRef idx="3">
+            <a:schemeClr val="accent1"/>
+          </a:fillRef>
+          <a:effectRef idx="2">
+            <a:schemeClr val="accent1"/>
+          </a:effectRef>
+          <a:fontRef idx="minor">
+            <a:schemeClr val="lt1"/>
+          </a:fontRef>
+        </p:style>
+        <p:txBody>
+          <a:bodyPr rtlCol="0" anchor="ctr"/>
+          <a:lstStyle/>
+          <a:p>
+            <a:pPr algn="ctr"/>
+          </a:p>
+        </p:txBody>
+      </p:sp>
+      <p:sp>
+        <p:nvSpPr>
+          <p:cNvPr id="17436" name="TextBox 17435"/>
+          <p:cNvSpPr txBox="1"/>
+          <p:nvPr/>
+        </p:nvSpPr>
+        <p:spPr>
+          <a:xfrm>
+            <a:off x="9168231" y="3364992"/>
+            <a:ext cx="365760" cy="365760"/>
+          </a:xfrm>
+          <a:prstGeom prst="rect">
+            <a:avLst/>
+          </a:prstGeom>
+          <a:noFill/>
+        </p:spPr>
+        <p:txBody>
+          <a:bodyPr wrap="square" anchor="ctr" lIns="0" rIns="0" tIns="0" bIns="0">
+            <a:spAutoFit/>
+          </a:bodyPr>
+          <a:lstStyle/>
+          <a:p>
+            <a:pPr algn="ctr"/>
+            <a:r>
+              <a:rPr sz="1300" b="1">
+                <a:solidFill>
+                  <a:srgbClr val="047857"/>
+                </a:solidFill>
+                <a:latin typeface="Calibri"/>
+              </a:rPr>
+              <a:t>4</a:t>
+            </a:r>
+          </a:p>
+        </p:txBody>
+      </p:sp>
+      <p:sp>
+        <p:nvSpPr>
+          <p:cNvPr id="17437" name="TextBox 17436"/>
+          <p:cNvSpPr txBox="1"/>
+          <p:nvPr/>
+        </p:nvSpPr>
+        <p:spPr>
+          <a:xfrm>
+            <a:off x="9168231" y="3803904"/>
+            <a:ext cx="2249424" cy="292608"/>
+          </a:xfrm>
+          <a:prstGeom prst="rect">
+            <a:avLst/>
+          </a:prstGeom>
+          <a:noFill/>
+        </p:spPr>
+        <p:txBody>
+          <a:bodyPr wrap="square" anchor="t" lIns="0" rIns="0" tIns="0" bIns="0">
+            <a:spAutoFit/>
+          </a:bodyPr>
+          <a:lstStyle/>
+          <a:p>
             <a:pPr algn="l"/>
             <a:r>
+              <a:rPr sz="1100" b="1">
+                <a:solidFill>
+                  <a:srgbClr val="1C1917"/>
+                </a:solidFill>
+              </a:rPr>
+              <a:t>Government</a:t>
+            </a:r>
+          </a:p>
+        </p:txBody>
+      </p:sp>
+      <p:sp>
+        <p:nvSpPr>
+          <p:cNvPr id="17438" name="TextBox 17437"/>
+          <p:cNvSpPr txBox="1"/>
+          <p:nvPr/>
+        </p:nvSpPr>
+        <p:spPr>
+          <a:xfrm>
+            <a:off x="9168231" y="4114800"/>
+            <a:ext cx="2249424" cy="713232"/>
+          </a:xfrm>
+          <a:prstGeom prst="rect">
+            <a:avLst/>
+          </a:prstGeom>
+          <a:noFill/>
+        </p:spPr>
+        <p:txBody>
+          <a:bodyPr wrap="square" anchor="t" lIns="0" rIns="0" tIns="0" bIns="0">
+            <a:spAutoFit/>
+          </a:bodyPr>
+          <a:lstStyle/>
+          <a:p>
+            <a:pPr algn="l">
+              <a:lnSpc>
+                <a:spcPct val="110000"/>
+              </a:lnSpc>
+            </a:pPr>
+            <a:r>
               <a:rPr sz="900" b="0">
                 <a:solidFill>
                   <a:srgbClr val="57534E"/>
                 </a:solidFill>
               </a:rPr>
-              <a:t>90s cold-start timeout, 'waking up' message</a:t>
+              <a:t>Decision layer built on public AGMARKNET data; new district = data entry.</a:t>
+            </a:r>
+          </a:p>
+        </p:txBody>
+      </p:sp>
+      <p:sp>
+        <p:nvSpPr>
+          <p:cNvPr id="17439" name="Rounded Rectangle 17438"/>
+          <p:cNvSpPr/>
+          <p:nvPr/>
+        </p:nvSpPr>
+        <p:spPr>
+          <a:xfrm>
+            <a:off x="548640" y="5166360"/>
+            <a:ext cx="11091672" cy="658368"/>
+          </a:xfrm>
+          <a:prstGeom prst="roundRect">
+            <a:avLst>
+              <a:gd name="adj" fmla="val 8000"/>
+            </a:avLst>
+          </a:prstGeom>
+          <a:solidFill>
+            <a:srgbClr val="047857"/>
+          </a:solidFill>
+          <a:ln>
+            <a:noFill/>
+          </a:ln>
+          <a:effectLst/>
+        </p:spPr>
+        <p:style>
+          <a:lnRef idx="1">
+            <a:schemeClr val="accent1"/>
+          </a:lnRef>
+          <a:fillRef idx="3">
+            <a:schemeClr val="accent1"/>
+          </a:fillRef>
+          <a:effectRef idx="2">
+            <a:schemeClr val="accent1"/>
+          </a:effectRef>
+          <a:fontRef idx="minor">
+            <a:schemeClr val="lt1"/>
+          </a:fontRef>
+        </p:style>
+        <p:txBody>
+          <a:bodyPr rtlCol="0" anchor="ctr"/>
+          <a:lstStyle/>
+          <a:p>
+            <a:pPr algn="ctr"/>
+          </a:p>
+        </p:txBody>
+      </p:sp>
+      <p:sp>
+        <p:nvSpPr>
+          <p:cNvPr id="17440" name="TextBox 17439"/>
+          <p:cNvSpPr txBox="1"/>
+          <p:nvPr/>
+        </p:nvSpPr>
+        <p:spPr>
+          <a:xfrm>
+            <a:off x="548640" y="5166360"/>
+            <a:ext cx="11091672" cy="658368"/>
+          </a:xfrm>
+          <a:prstGeom prst="rect">
+            <a:avLst/>
+          </a:prstGeom>
+          <a:noFill/>
+        </p:spPr>
+        <p:txBody>
+          <a:bodyPr wrap="square" anchor="ctr" lIns="0" rIns="0" tIns="0" bIns="0">
+            <a:spAutoFit/>
+          </a:bodyPr>
+          <a:lstStyle/>
+          <a:p>
+            <a:pPr algn="ctr"/>
+            <a:r>
+              <a:rPr sz="1700" b="1">
+                <a:solidFill>
+                  <a:srgbClr val="FFFFFF"/>
+                </a:solidFill>
+                <a:latin typeface="Calibri"/>
+              </a:rPr>
+              <a:t>New crop, district, mandi or buyer = data entry, not a rebuild.</a:t>
             </a:r>
           </a:p>
         </p:txBody>
@@ -9569,14 +11507,6 @@
 <file path=ppt/slides/slide6.xml><?xml version="1.0" encoding="utf-8"?>
 <p:sld xmlns:a="http://schemas.openxmlformats.org/drawingml/2006/main" xmlns:r="http://schemas.openxmlformats.org/officeDocument/2006/relationships" xmlns:p="http://schemas.openxmlformats.org/presentationml/2006/main">
   <p:cSld>
-    <p:bg>
-      <p:bgPr>
-        <a:solidFill>
-          <a:srgbClr val="FFFFFF"/>
-        </a:solidFill>
-        <a:effectLst/>
-      </p:bgPr>
-    </p:bg>
     <p:spTree>
       <p:nvGrpSpPr>
         <p:cNvPr id="1" name=""/>
@@ -9593,19 +11523,133 @@
       </p:grpSpPr>
       <p:sp>
         <p:nvSpPr>
-          <p:cNvPr id="2" name="TextBox 1"/>
-          <p:cNvSpPr txBox="1"/>
+          <p:cNvPr id="10" name="Rectangle 9">
+            <a:extLst>
+              <a:ext uri="{FF2B5EF4-FFF2-40B4-BE49-F238E27FC236}">
+                <a16:creationId xmlns:a16="http://schemas.microsoft.com/office/drawing/2014/main" id="{AD4F69D3-EEB0-4C4C-9434-B9960FB5854C}"/>
+              </a:ext>
+            </a:extLst>
+          </p:cNvPr>
+          <p:cNvSpPr>
+            <a:spLocks noChangeArrowheads="1"/>
+          </p:cNvSpPr>
           <p:nvPr/>
         </p:nvSpPr>
-        <p:spPr>
-          <a:xfrm>
-            <a:off x="457200" y="274320"/>
-            <a:ext cx="8229600" cy="274320"/>
+        <p:spPr bwMode="auto">
+          <a:xfrm>
+            <a:off x="0" y="6354762"/>
+            <a:ext cx="12191999" cy="503238"/>
+          </a:xfrm>
+          <a:prstGeom prst="rect">
+            <a:avLst/>
+          </a:prstGeom>
+          <a:solidFill>
+            <a:srgbClr val="0070C0"/>
+          </a:solidFill>
+          <a:ln w="9525">
+            <a:noFill/>
+            <a:miter lim="800000"/>
+            <a:headEnd/>
+            <a:tailEnd/>
+          </a:ln>
+          <a:effectLst>
+            <a:outerShdw dist="23000" dir="5400000" rotWithShape="0">
+              <a:srgbClr val="808080">
+                <a:alpha val="34999"/>
+              </a:srgbClr>
+            </a:outerShdw>
+          </a:effectLst>
+        </p:spPr>
+        <p:txBody>
+          <a:bodyPr anchor="ctr"/>
+          <a:lstStyle/>
+          <a:p>
+            <a:pPr marL="0" marR="0" lvl="0" indent="0" algn="ctr" defTabSz="457200" rtl="0" eaLnBrk="1" fontAlgn="auto" latinLnBrk="0" hangingPunct="1">
+              <a:lnSpc>
+                <a:spcPct val="100000"/>
+              </a:lnSpc>
+              <a:spcBef>
+                <a:spcPts val="0"/>
+              </a:spcBef>
+              <a:spcAft>
+                <a:spcPts val="0"/>
+              </a:spcAft>
+              <a:buClrTx/>
+              <a:buSzTx/>
+              <a:buFontTx/>
+              <a:buNone/>
+              <a:tabLst/>
+              <a:defRPr/>
+            </a:pPr>
+            <a:endParaRPr kumimoji="0" lang="en-US" sz="1800" b="0" i="0" u="none" strike="noStrike" kern="1200" cap="none" spc="0" normalizeH="0" baseline="0" noProof="0" dirty="0">
+              <a:ln>
+                <a:noFill/>
+              </a:ln>
+              <a:solidFill>
+                <a:srgbClr val="C0504D">
+                  <a:lumMod val="75000"/>
+                </a:srgbClr>
+              </a:solidFill>
+              <a:effectLst/>
+              <a:uLnTx/>
+              <a:uFillTx/>
+              <a:latin typeface="Calibri"/>
+              <a:ea typeface="ＭＳ Ｐゴシック" pitchFamily="1" charset="-128"/>
+              <a:cs typeface="+mn-cs"/>
+            </a:endParaRPr>
+          </a:p>
+        </p:txBody>
+      </p:sp>
+      <p:sp>
+        <p:nvSpPr>
+          <p:cNvPr id="17409" name="Title 1"/>
+          <p:cNvSpPr>
+            <a:spLocks noGrp="1"/>
+          </p:cNvSpPr>
+          <p:nvPr>
+            <p:ph type="title"/>
+          </p:nvPr>
+        </p:nvSpPr>
+        <p:spPr>
+          <a:xfrm>
+            <a:off x="609904" y="-47548"/>
+            <a:ext cx="8778240" cy="1143000"/>
+          </a:xfrm>
+        </p:spPr>
+        <p:txBody>
+          <a:bodyPr/>
+          <a:lstStyle/>
+          <a:p>
+            <a:r>
+              <a:rPr sz="3200"/>
+              <a:t>RESEARCH  AND REFERENCES</a:t>
+            </a:r>
+          </a:p>
+        </p:txBody>
+      </p:sp>
+      <p:sp>
+        <p:nvSpPr>
+          <p:cNvPr id="17410" name="TextBox 8"/>
+          <p:cNvSpPr txBox="1">
+            <a:spLocks noChangeArrowheads="1"/>
+          </p:cNvSpPr>
+          <p:nvPr/>
+        </p:nvSpPr>
+        <p:spPr bwMode="auto">
+          <a:xfrm>
+            <a:off x="609600" y="1463040"/>
+            <a:ext cx="9385300" cy="4206240"/>
           </a:xfrm>
           <a:prstGeom prst="rect">
             <a:avLst/>
           </a:prstGeom>
           <a:noFill/>
+          <a:ln w="9525">
+            <a:noFill/>
+            <a:miter lim="800000"/>
+            <a:headEnd/>
+            <a:tailEnd/>
+          </a:ln>
         </p:spPr>
         <p:txBody>
           <a:bodyPr wrap="square">
@@ -9613,778 +11657,419 @@
           </a:bodyPr>
           <a:lstStyle/>
           <a:p>
-            <a:pPr algn="l"/>
-            <a:r>
-              <a:rPr sz="900" b="1">
-                <a:solidFill>
-                  <a:srgbClr val="047857"/>
-                </a:solidFill>
+            <a:pPr marL="342900" marR="0" indent="-342900" algn="just" defTabSz="457200" rtl="0" eaLnBrk="1" fontAlgn="base" latinLnBrk="0" hangingPunct="1">
+              <a:lnSpc>
+                <a:spcPct val="100000"/>
+              </a:lnSpc>
+              <a:spcBef>
+                <a:spcPct val="0"/>
+              </a:spcBef>
+              <a:spcAft>
+                <a:spcPts val="1000"/>
+              </a:spcAft>
+              <a:buClrTx/>
+              <a:buSzTx/>
+              <a:buFont typeface="Arial" panose="020B0604020202020204" pitchFamily="34" charset="0"/>
+              <a:buChar char="•"/>
+              <a:tabLst/>
+              <a:defRPr/>
+            </a:pPr>
+            <a:r>
+              <a:rPr sz="2150" b="1">
+                <a:solidFill>
+                  <a:srgbClr val="1F3864"/>
+                </a:solidFill>
+                <a:latin typeface="Arial"/>
               </a:rPr>
-              <a:t>IMPACT &amp; ROADMAP</a:t>
-            </a:r>
-          </a:p>
-        </p:txBody>
-      </p:sp>
-      <p:sp>
-        <p:nvSpPr>
-          <p:cNvPr id="3" name="TextBox 2"/>
-          <p:cNvSpPr txBox="1"/>
+              <a:t>Data &amp; standards</a:t>
+            </a:r>
+            <a:endParaRPr kumimoji="0" lang="en-US" sz="2800" b="0" i="0" u="none" strike="noStrike" kern="1200" cap="none" spc="0" normalizeH="0" baseline="0" noProof="0" dirty="0">
+              <a:ln>
+                <a:noFill/>
+              </a:ln>
+              <a:solidFill>
+                <a:prstClr val="black"/>
+              </a:solidFill>
+              <a:effectLst/>
+              <a:uLnTx/>
+              <a:uFillTx/>
+              <a:latin typeface="Arial" pitchFamily="34" charset="0"/>
+              <a:ea typeface="ＭＳ Ｐゴシック" pitchFamily="1" charset="-128"/>
+              <a:cs typeface="Arial" pitchFamily="34" charset="0"/>
+            </a:endParaRPr>
+          </a:p>
+          <a:p>
+            <a:pPr lvl="1">
+              <a:spcAft>
+                <a:spcPts val="1000"/>
+              </a:spcAft>
+            </a:pPr>
+            <a:r>
+              <a:rPr sz="1650" b="0">
+                <a:solidFill>
+                  <a:srgbClr val="262626"/>
+                </a:solidFill>
+                <a:latin typeface="Arial"/>
+              </a:rPr>
+              <a:t>AGMARKNET via data.gov.in API — live mandi price source behind the engine.</a:t>
+            </a:r>
+          </a:p>
+          <a:p>
+            <a:pPr lvl="1">
+              <a:spcAft>
+                <a:spcPts val="1000"/>
+              </a:spcAft>
+            </a:pPr>
+            <a:r>
+              <a:rPr sz="1650" b="0">
+                <a:solidFill>
+                  <a:srgbClr val="262626"/>
+                </a:solidFill>
+                <a:latin typeface="Arial"/>
+              </a:rPr>
+              <a:t>eNAM (National Agriculture Market) — digital trading-channel integration reference.</a:t>
+            </a:r>
+          </a:p>
+          <a:p>
+            <a:pPr lvl="1">
+              <a:spcAft>
+                <a:spcPts val="1000"/>
+              </a:spcAft>
+            </a:pPr>
+            <a:r>
+              <a:rPr sz="1650" b="0">
+                <a:solidFill>
+                  <a:srgbClr val="262626"/>
+                </a:solidFill>
+                <a:latin typeface="Arial"/>
+              </a:rPr>
+              <a:t>AGMARK standards, Directorate of Marketing &amp; Inspection (DMI) — grade thresholds in the rule engine (7 crops × 3 grades).</a:t>
+            </a:r>
+          </a:p>
+          <a:p>
+            <a:pPr>
+              <a:spcAft>
+                <a:spcPts val="1000"/>
+              </a:spcAft>
+            </a:pPr>
+            <a:r>
+              <a:rPr sz="2150" b="1">
+                <a:solidFill>
+                  <a:srgbClr val="1F3864"/>
+                </a:solidFill>
+                <a:latin typeface="Arial"/>
+              </a:rPr>
+              <a:t>Models &amp; research</a:t>
+            </a:r>
+          </a:p>
+          <a:p>
+            <a:pPr lvl="1">
+              <a:spcAft>
+                <a:spcPts val="1000"/>
+              </a:spcAft>
+            </a:pPr>
+            <a:r>
+              <a:rPr sz="1650" b="0">
+                <a:solidFill>
+                  <a:srgbClr val="262626"/>
+                </a:solidFill>
+                <a:latin typeface="Arial"/>
+              </a:rPr>
+              <a:t>MobileNetV2 (Sandler et al., 2018) — backbone of the shipped freshness grader (99.2% fresh/rotten, 6,738-image split) and the 38-class disease model.</a:t>
+            </a:r>
+          </a:p>
+          <a:p>
+            <a:pPr lvl="1">
+              <a:spcAft>
+                <a:spcPts val="1000"/>
+              </a:spcAft>
+            </a:pPr>
+            <a:r>
+              <a:rPr sz="1650" b="0">
+                <a:solidFill>
+                  <a:srgbClr val="262626"/>
+                </a:solidFill>
+                <a:latin typeface="Arial"/>
+              </a:rPr>
+              <a:t>Agriculture Census 2015-16 — 86.2% holdings small &amp; marginal (&lt;2 ha): the core beneficiary group.</a:t>
+            </a:r>
+          </a:p>
+          <a:p>
+            <a:pPr lvl="1">
+              <a:spcAft>
+                <a:spcPts val="1000"/>
+              </a:spcAft>
+            </a:pPr>
+            <a:r>
+              <a:rPr sz="1650" b="0">
+                <a:solidFill>
+                  <a:srgbClr val="262626"/>
+                </a:solidFill>
+                <a:latin typeface="Arial"/>
+              </a:rPr>
+              <a:t>Groq llama-3.3-70b-versatile — explanation-only LLM with deterministic template fallback.</a:t>
+            </a:r>
+          </a:p>
+        </p:txBody>
+      </p:sp>
+      <p:sp>
+        <p:nvSpPr>
+          <p:cNvPr id="6" name="Slide Number Placeholder 5"/>
+          <p:cNvSpPr>
+            <a:spLocks noGrp="1"/>
+          </p:cNvSpPr>
+          <p:nvPr>
+            <p:ph type="sldNum" sz="quarter" idx="12"/>
+          </p:nvPr>
+        </p:nvSpPr>
+        <p:spPr/>
+        <p:txBody>
+          <a:bodyPr/>
+          <a:lstStyle/>
+          <a:p>
+            <a:pPr marL="0" marR="0" lvl="0" indent="0" algn="r" defTabSz="457200" rtl="0" eaLnBrk="1" fontAlgn="base" latinLnBrk="0" hangingPunct="1">
+              <a:lnSpc>
+                <a:spcPct val="100000"/>
+              </a:lnSpc>
+              <a:spcBef>
+                <a:spcPct val="0"/>
+              </a:spcBef>
+              <a:spcAft>
+                <a:spcPct val="0"/>
+              </a:spcAft>
+              <a:buClrTx/>
+              <a:buSzTx/>
+              <a:buFontTx/>
+              <a:buNone/>
+              <a:tabLst/>
+              <a:defRPr/>
+            </a:pPr>
+            <a:fld id="{677C3CE7-23F7-4828-823C-E0205DF2CF97}" type="slidenum">
+              <a:rPr kumimoji="0" lang="en-US" sz="1200" b="1" i="0" u="none" strike="noStrike" kern="1200" cap="none" spc="0" normalizeH="0" baseline="0" noProof="0">
+                <a:ln>
+                  <a:noFill/>
+                </a:ln>
+                <a:solidFill>
+                  <a:prstClr val="white"/>
+                </a:solidFill>
+                <a:effectLst/>
+                <a:uLnTx/>
+                <a:uFillTx/>
+                <a:latin typeface="TradeGothic" pitchFamily="1" charset="0"/>
+                <a:ea typeface="ＭＳ Ｐゴシック" pitchFamily="1" charset="-128"/>
+                <a:cs typeface="+mn-cs"/>
+              </a:rPr>
+              <a:pPr marL="0" marR="0" lvl="0" indent="0" algn="r" defTabSz="457200" rtl="0" eaLnBrk="1" fontAlgn="base" latinLnBrk="0" hangingPunct="1">
+                <a:lnSpc>
+                  <a:spcPct val="100000"/>
+                </a:lnSpc>
+                <a:spcBef>
+                  <a:spcPct val="0"/>
+                </a:spcBef>
+                <a:spcAft>
+                  <a:spcPct val="0"/>
+                </a:spcAft>
+                <a:buClrTx/>
+                <a:buSzTx/>
+                <a:buFontTx/>
+                <a:buNone/>
+                <a:tabLst/>
+                <a:defRPr/>
+              </a:pPr>
+              <a:t>6</a:t>
+            </a:fld>
+            <a:endParaRPr kumimoji="0" lang="en-US" sz="1200" b="1" i="0" u="none" strike="noStrike" kern="1200" cap="none" spc="0" normalizeH="0" baseline="0" noProof="0" dirty="0">
+              <a:ln>
+                <a:noFill/>
+              </a:ln>
+              <a:solidFill>
+                <a:prstClr val="white"/>
+              </a:solidFill>
+              <a:effectLst/>
+              <a:uLnTx/>
+              <a:uFillTx/>
+              <a:latin typeface="TradeGothic" pitchFamily="1" charset="0"/>
+              <a:ea typeface="ＭＳ Ｐゴシック" pitchFamily="1" charset="-128"/>
+              <a:cs typeface="+mn-cs"/>
+            </a:endParaRPr>
+          </a:p>
+        </p:txBody>
+      </p:sp>
+      <p:sp>
+        <p:nvSpPr>
+          <p:cNvPr id="7" name="Footer Placeholder 6"/>
+          <p:cNvSpPr>
+            <a:spLocks noGrp="1"/>
+          </p:cNvSpPr>
+          <p:nvPr>
+            <p:ph type="ftr" sz="quarter" idx="11"/>
+          </p:nvPr>
+        </p:nvSpPr>
+        <p:spPr>
+          <a:xfrm>
+            <a:off x="4648200" y="6356353"/>
+            <a:ext cx="3204000" cy="365125"/>
+          </a:xfrm>
+        </p:spPr>
+        <p:txBody>
+          <a:bodyPr/>
+          <a:lstStyle/>
+          <a:p>
+            <a:pPr marL="0" marR="0" lvl="0" indent="0" algn="ctr" defTabSz="457200" rtl="0" eaLnBrk="1" fontAlgn="auto" latinLnBrk="0" hangingPunct="1">
+              <a:lnSpc>
+                <a:spcPct val="100000"/>
+              </a:lnSpc>
+              <a:spcBef>
+                <a:spcPts val="0"/>
+              </a:spcBef>
+              <a:spcAft>
+                <a:spcPts val="0"/>
+              </a:spcAft>
+              <a:buClrTx/>
+              <a:buSzTx/>
+              <a:buFontTx/>
+              <a:buNone/>
+              <a:tabLst/>
+              <a:defRPr/>
+            </a:pPr>
+            <a:r>
+              <a:rPr kumimoji="0" lang="en-US" sz="1200" b="0" i="0" u="none" strike="noStrike" kern="1200" cap="none" spc="0" normalizeH="0" baseline="0" noProof="0">
+                <a:ln>
+                  <a:noFill/>
+                </a:ln>
+                <a:solidFill>
+                  <a:prstClr val="white"/>
+                </a:solidFill>
+                <a:effectLst/>
+                <a:uLnTx/>
+                <a:uFillTx/>
+                <a:latin typeface="TradeGothic"/>
+                <a:ea typeface="+mn-ea"/>
+                <a:cs typeface="+mn-cs"/>
+              </a:rPr>
+              <a:t>@SIH Idea submission- Template</a:t>
+            </a:r>
+            <a:endParaRPr kumimoji="0" lang="en-US" sz="1200" b="0" i="0" u="none" strike="noStrike" kern="1200" cap="none" spc="0" normalizeH="0" baseline="0" noProof="0" dirty="0">
+              <a:ln>
+                <a:noFill/>
+              </a:ln>
+              <a:solidFill>
+                <a:prstClr val="white"/>
+              </a:solidFill>
+              <a:effectLst/>
+              <a:uLnTx/>
+              <a:uFillTx/>
+              <a:latin typeface="TradeGothic"/>
+              <a:ea typeface="+mn-ea"/>
+              <a:cs typeface="+mn-cs"/>
+            </a:endParaRPr>
+          </a:p>
+        </p:txBody>
+      </p:sp>
+      <p:sp>
+        <p:nvSpPr>
+          <p:cNvPr id="9" name="Oval 8" descr="Your startup LOGO">
+            <a:extLst>
+              <a:ext uri="{FF2B5EF4-FFF2-40B4-BE49-F238E27FC236}">
+                <a16:creationId xmlns:a16="http://schemas.microsoft.com/office/drawing/2014/main" id="{5DBCE864-823D-4A13-9607-5DA1F0ED5FB8}"/>
+              </a:ext>
+              <a:ext uri="{C183D7F6-B498-43B3-948B-1728B52AA6E4}">
+                <adec:decorative xmlns:adec="http://schemas.microsoft.com/office/drawing/2017/decorative" val="0"/>
+              </a:ext>
+            </a:extLst>
+          </p:cNvPr>
+          <p:cNvSpPr/>
           <p:nvPr/>
         </p:nvSpPr>
         <p:spPr>
           <a:xfrm>
-            <a:off x="457200" y="548640"/>
-            <a:ext cx="10058400" cy="548640"/>
+            <a:off x="329773" y="252246"/>
+            <a:ext cx="1417320" cy="807334"/>
+          </a:xfrm>
+          <a:prstGeom prst="ellipse">
+            <a:avLst/>
+          </a:prstGeom>
+        </p:spPr>
+        <p:style>
+          <a:lnRef idx="2">
+            <a:schemeClr val="accent4"/>
+          </a:lnRef>
+          <a:fillRef idx="1">
+            <a:schemeClr val="lt1"/>
+          </a:fillRef>
+          <a:effectRef idx="0">
+            <a:schemeClr val="accent4"/>
+          </a:effectRef>
+          <a:fontRef idx="minor">
+            <a:schemeClr val="dk1"/>
+          </a:fontRef>
+        </p:style>
+        <p:txBody>
+          <a:bodyPr rtlCol="0" anchor="ctr" wrap="none"/>
+          <a:lstStyle/>
+          <a:p>
+            <a:pPr algn="ctr"/>
+            <a:r>
+              <a:rPr sz="1300"/>
+              <a:t>Kisan360</a:t>
+            </a:r>
+          </a:p>
+        </p:txBody>
+      </p:sp>
+      <p:pic>
+        <p:nvPicPr>
+          <p:cNvPr id="12" name="Picture 11"/>
+          <p:cNvPicPr>
+            <a:picLocks noChangeAspect="1"/>
+          </p:cNvPicPr>
+          <p:nvPr/>
+        </p:nvPicPr>
+        <p:blipFill>
+          <a:blip r:embed="rId3">
+            <a:extLst>
+              <a:ext uri="{28A0092B-C50C-407E-A947-70E740481C1C}">
+                <a14:useLocalDpi xmlns:a14="http://schemas.microsoft.com/office/drawing/2010/main" val="0"/>
+              </a:ext>
+            </a:extLst>
+          </a:blip>
+          <a:stretch>
+            <a:fillRect/>
+          </a:stretch>
+        </p:blipFill>
+        <p:spPr>
+          <a:xfrm>
+            <a:off x="9780086" y="1500"/>
+            <a:ext cx="2249850" cy="1062337"/>
           </a:xfrm>
           <a:prstGeom prst="rect">
             <a:avLst/>
           </a:prstGeom>
-          <a:noFill/>
-        </p:spPr>
-        <p:txBody>
-          <a:bodyPr wrap="square">
-            <a:spAutoFit/>
-          </a:bodyPr>
-          <a:lstStyle/>
-          <a:p>
-            <a:pPr algn="l"/>
-            <a:r>
-              <a:rPr sz="2200" b="1">
-                <a:solidFill>
-                  <a:srgbClr val="1C1917"/>
-                </a:solidFill>
-              </a:rPr>
-              <a:t>Who benefits and what comes next</a:t>
-            </a:r>
-          </a:p>
-        </p:txBody>
-      </p:sp>
-      <p:sp>
-        <p:nvSpPr>
-          <p:cNvPr id="4" name="TextBox 3"/>
-          <p:cNvSpPr txBox="1"/>
+        </p:spPr>
+      </p:pic>
+      <p:pic>
+        <p:nvPicPr>
+          <p:cNvPr id="17411" name="Picture 17410" descr="kisan360-mark.png"/>
+          <p:cNvPicPr>
+            <a:picLocks noChangeAspect="1"/>
+          </p:cNvPicPr>
           <p:nvPr/>
-        </p:nvSpPr>
-        <p:spPr>
-          <a:xfrm>
-            <a:off x="457200" y="1280160"/>
-            <a:ext cx="5029200" cy="274320"/>
+        </p:nvPicPr>
+        <p:blipFill>
+          <a:blip r:embed="rId4"/>
+          <a:stretch>
+            <a:fillRect/>
+          </a:stretch>
+        </p:blipFill>
+        <p:spPr>
+          <a:xfrm>
+            <a:off x="11631168" y="6327648"/>
+            <a:ext cx="411480" cy="411480"/>
           </a:xfrm>
           <a:prstGeom prst="rect">
             <a:avLst/>
           </a:prstGeom>
-          <a:noFill/>
-        </p:spPr>
-        <p:txBody>
-          <a:bodyPr wrap="square">
-            <a:spAutoFit/>
-          </a:bodyPr>
-          <a:lstStyle/>
-          <a:p>
-            <a:pPr algn="l"/>
-            <a:r>
-              <a:rPr sz="900" b="1">
-                <a:solidFill>
-                  <a:srgbClr val="047857"/>
-                </a:solidFill>
-              </a:rPr>
-              <a:t>BENEFICIARIES</a:t>
-            </a:r>
-          </a:p>
-        </p:txBody>
-      </p:sp>
-      <p:sp>
-        <p:nvSpPr>
-          <p:cNvPr id="5" name="TextBox 4"/>
-          <p:cNvSpPr txBox="1"/>
-          <p:nvPr/>
-        </p:nvSpPr>
-        <p:spPr>
-          <a:xfrm>
-            <a:off x="457200" y="1554480"/>
-            <a:ext cx="1097280" cy="228600"/>
-          </a:xfrm>
-          <a:prstGeom prst="rect">
-            <a:avLst/>
-          </a:prstGeom>
-          <a:noFill/>
-        </p:spPr>
-        <p:txBody>
-          <a:bodyPr wrap="square">
-            <a:spAutoFit/>
-          </a:bodyPr>
-          <a:lstStyle/>
-          <a:p>
-            <a:pPr algn="l"/>
-            <a:r>
-              <a:rPr sz="1100" b="1">
-                <a:solidFill>
-                  <a:srgbClr val="047857"/>
-                </a:solidFill>
-              </a:rPr>
-              <a:t>Farmer</a:t>
-            </a:r>
-          </a:p>
-        </p:txBody>
-      </p:sp>
-      <p:sp>
-        <p:nvSpPr>
-          <p:cNvPr id="6" name="TextBox 5"/>
-          <p:cNvSpPr txBox="1"/>
-          <p:nvPr/>
-        </p:nvSpPr>
-        <p:spPr>
-          <a:xfrm>
-            <a:off x="1645920" y="1554480"/>
-            <a:ext cx="3840480" cy="457200"/>
-          </a:xfrm>
-          <a:prstGeom prst="rect">
-            <a:avLst/>
-          </a:prstGeom>
-          <a:noFill/>
-        </p:spPr>
-        <p:txBody>
-          <a:bodyPr wrap="square">
-            <a:spAutoFit/>
-          </a:bodyPr>
-          <a:lstStyle/>
-          <a:p>
-            <a:pPr algn="l"/>
-            <a:r>
-              <a:rPr sz="1000" b="0">
-                <a:solidFill>
-                  <a:srgbClr val="57534E"/>
-                </a:solidFill>
-              </a:rPr>
-              <a:t>Better sale choice per lot, backed by transparent evidence and net-realization math</a:t>
-            </a:r>
-          </a:p>
-        </p:txBody>
-      </p:sp>
-      <p:sp>
-        <p:nvSpPr>
-          <p:cNvPr id="7" name="TextBox 6"/>
-          <p:cNvSpPr txBox="1"/>
-          <p:nvPr/>
-        </p:nvSpPr>
-        <p:spPr>
-          <a:xfrm>
-            <a:off x="457200" y="2194560"/>
-            <a:ext cx="1097280" cy="228600"/>
-          </a:xfrm>
-          <a:prstGeom prst="rect">
-            <a:avLst/>
-          </a:prstGeom>
-          <a:noFill/>
-        </p:spPr>
-        <p:txBody>
-          <a:bodyPr wrap="square">
-            <a:spAutoFit/>
-          </a:bodyPr>
-          <a:lstStyle/>
-          <a:p>
-            <a:pPr algn="l"/>
-            <a:r>
-              <a:rPr sz="1100" b="1">
-                <a:solidFill>
-                  <a:srgbClr val="047857"/>
-                </a:solidFill>
-              </a:rPr>
-              <a:t>FPO</a:t>
-            </a:r>
-          </a:p>
-        </p:txBody>
-      </p:sp>
-      <p:sp>
-        <p:nvSpPr>
-          <p:cNvPr id="8" name="TextBox 7"/>
-          <p:cNvSpPr txBox="1"/>
-          <p:nvPr/>
-        </p:nvSpPr>
-        <p:spPr>
-          <a:xfrm>
-            <a:off x="1645920" y="2194560"/>
-            <a:ext cx="3840480" cy="457200"/>
-          </a:xfrm>
-          <a:prstGeom prst="rect">
-            <a:avLst/>
-          </a:prstGeom>
-          <a:noFill/>
-        </p:spPr>
-        <p:txBody>
-          <a:bodyPr wrap="square">
-            <a:spAutoFit/>
-          </a:bodyPr>
-          <a:lstStyle/>
-          <a:p>
-            <a:pPr algn="l"/>
-            <a:r>
-              <a:rPr sz="1000" b="0">
-                <a:solidFill>
-                  <a:srgbClr val="57534E"/>
-                </a:solidFill>
-              </a:rPr>
-              <a:t>Bulk transport tier + buyer minimums unlocked through 50q+ pooling</a:t>
-            </a:r>
-          </a:p>
-        </p:txBody>
-      </p:sp>
-      <p:sp>
-        <p:nvSpPr>
-          <p:cNvPr id="9" name="TextBox 8"/>
-          <p:cNvSpPr txBox="1"/>
-          <p:nvPr/>
-        </p:nvSpPr>
-        <p:spPr>
-          <a:xfrm>
-            <a:off x="457200" y="2834639"/>
-            <a:ext cx="1097280" cy="228600"/>
-          </a:xfrm>
-          <a:prstGeom prst="rect">
-            <a:avLst/>
-          </a:prstGeom>
-          <a:noFill/>
-        </p:spPr>
-        <p:txBody>
-          <a:bodyPr wrap="square">
-            <a:spAutoFit/>
-          </a:bodyPr>
-          <a:lstStyle/>
-          <a:p>
-            <a:pPr algn="l"/>
-            <a:r>
-              <a:rPr sz="1100" b="1">
-                <a:solidFill>
-                  <a:srgbClr val="047857"/>
-                </a:solidFill>
-              </a:rPr>
-              <a:t>Buyer</a:t>
-            </a:r>
-          </a:p>
-        </p:txBody>
-      </p:sp>
-      <p:sp>
-        <p:nvSpPr>
-          <p:cNvPr id="10" name="TextBox 9"/>
-          <p:cNvSpPr txBox="1"/>
-          <p:nvPr/>
-        </p:nvSpPr>
-        <p:spPr>
-          <a:xfrm>
-            <a:off x="1645920" y="2834639"/>
-            <a:ext cx="3840480" cy="457200"/>
-          </a:xfrm>
-          <a:prstGeom prst="rect">
-            <a:avLst/>
-          </a:prstGeom>
-          <a:noFill/>
-        </p:spPr>
-        <p:txBody>
-          <a:bodyPr wrap="square">
-            <a:spAutoFit/>
-          </a:bodyPr>
-          <a:lstStyle/>
-          <a:p>
-            <a:pPr algn="l"/>
-            <a:r>
-              <a:rPr sz="1000" b="0">
-                <a:solidFill>
-                  <a:srgbClr val="57534E"/>
-                </a:solidFill>
-              </a:rPr>
-              <a:t>Aggregated, AGMARK-graded lots — lower sourcing risk, consistent volume</a:t>
-            </a:r>
-          </a:p>
-        </p:txBody>
-      </p:sp>
-      <p:sp>
-        <p:nvSpPr>
-          <p:cNvPr id="11" name="TextBox 10"/>
-          <p:cNvSpPr txBox="1"/>
-          <p:nvPr/>
-        </p:nvSpPr>
-        <p:spPr>
-          <a:xfrm>
-            <a:off x="457200" y="3474720"/>
-            <a:ext cx="1097280" cy="228600"/>
-          </a:xfrm>
-          <a:prstGeom prst="rect">
-            <a:avLst/>
-          </a:prstGeom>
-          <a:noFill/>
-        </p:spPr>
-        <p:txBody>
-          <a:bodyPr wrap="square">
-            <a:spAutoFit/>
-          </a:bodyPr>
-          <a:lstStyle/>
-          <a:p>
-            <a:pPr algn="l"/>
-            <a:r>
-              <a:rPr sz="1100" b="1">
-                <a:solidFill>
-                  <a:srgbClr val="047857"/>
-                </a:solidFill>
-              </a:rPr>
-              <a:t>Government</a:t>
-            </a:r>
-          </a:p>
-        </p:txBody>
-      </p:sp>
-      <p:sp>
-        <p:nvSpPr>
-          <p:cNvPr id="12" name="TextBox 11"/>
-          <p:cNvSpPr txBox="1"/>
-          <p:nvPr/>
-        </p:nvSpPr>
-        <p:spPr>
-          <a:xfrm>
-            <a:off x="1645920" y="3474720"/>
-            <a:ext cx="3840480" cy="457200"/>
-          </a:xfrm>
-          <a:prstGeom prst="rect">
-            <a:avLst/>
-          </a:prstGeom>
-          <a:noFill/>
-        </p:spPr>
-        <p:txBody>
-          <a:bodyPr wrap="square">
-            <a:spAutoFit/>
-          </a:bodyPr>
-          <a:lstStyle/>
-          <a:p>
-            <a:pPr algn="l"/>
-            <a:r>
-              <a:rPr sz="1000" b="0">
-                <a:solidFill>
-                  <a:srgbClr val="57534E"/>
-                </a:solidFill>
-              </a:rPr>
-              <a:t>Decision layer built on public AGMARKNET data; new district = data entry, not rebuild</a:t>
-            </a:r>
-          </a:p>
-        </p:txBody>
-      </p:sp>
-      <p:sp>
-        <p:nvSpPr>
-          <p:cNvPr id="13" name="TextBox 12"/>
-          <p:cNvSpPr txBox="1"/>
-          <p:nvPr/>
-        </p:nvSpPr>
-        <p:spPr>
-          <a:xfrm>
-            <a:off x="6217920" y="1280160"/>
-            <a:ext cx="4572000" cy="274320"/>
-          </a:xfrm>
-          <a:prstGeom prst="rect">
-            <a:avLst/>
-          </a:prstGeom>
-          <a:noFill/>
-        </p:spPr>
-        <p:txBody>
-          <a:bodyPr wrap="square">
-            <a:spAutoFit/>
-          </a:bodyPr>
-          <a:lstStyle/>
-          <a:p>
-            <a:pPr algn="l"/>
-            <a:r>
-              <a:rPr sz="900" b="1">
-                <a:solidFill>
-                  <a:srgbClr val="047857"/>
-                </a:solidFill>
-              </a:rPr>
-              <a:t>TRL 7+ ROADMAP</a:t>
-            </a:r>
-          </a:p>
-        </p:txBody>
-      </p:sp>
-      <p:sp>
-        <p:nvSpPr>
-          <p:cNvPr id="14" name="TextBox 13"/>
-          <p:cNvSpPr txBox="1"/>
-          <p:nvPr/>
-        </p:nvSpPr>
-        <p:spPr>
-          <a:xfrm>
-            <a:off x="6217920" y="1554480"/>
-            <a:ext cx="1371600" cy="228600"/>
-          </a:xfrm>
-          <a:prstGeom prst="rect">
-            <a:avLst/>
-          </a:prstGeom>
-          <a:noFill/>
-        </p:spPr>
-        <p:txBody>
-          <a:bodyPr wrap="square">
-            <a:spAutoFit/>
-          </a:bodyPr>
-          <a:lstStyle/>
-          <a:p>
-            <a:pPr algn="l"/>
-            <a:r>
-              <a:rPr sz="1100" b="1">
-                <a:solidFill>
-                  <a:srgbClr val="1C1917"/>
-                </a:solidFill>
-              </a:rPr>
-              <a:t>Real payments</a:t>
-            </a:r>
-          </a:p>
-        </p:txBody>
-      </p:sp>
-      <p:sp>
-        <p:nvSpPr>
-          <p:cNvPr id="15" name="TextBox 14"/>
-          <p:cNvSpPr txBox="1"/>
-          <p:nvPr/>
-        </p:nvSpPr>
-        <p:spPr>
-          <a:xfrm>
-            <a:off x="7589520" y="1554480"/>
-            <a:ext cx="3200400" cy="457200"/>
-          </a:xfrm>
-          <a:prstGeom prst="rect">
-            <a:avLst/>
-          </a:prstGeom>
-          <a:noFill/>
-        </p:spPr>
-        <p:txBody>
-          <a:bodyPr wrap="square">
-            <a:spAutoFit/>
-          </a:bodyPr>
-          <a:lstStyle/>
-          <a:p>
-            <a:pPr algn="l"/>
-            <a:r>
-              <a:rPr sz="1000" b="0">
-                <a:solidFill>
-                  <a:srgbClr val="57534E"/>
-                </a:solidFill>
-              </a:rPr>
-              <a:t>Razorpay/UPI integration, Aadhaar eKYC, RBI licensing</a:t>
-            </a:r>
-          </a:p>
-        </p:txBody>
-      </p:sp>
-      <p:sp>
-        <p:nvSpPr>
-          <p:cNvPr id="16" name="TextBox 15"/>
-          <p:cNvSpPr txBox="1"/>
-          <p:nvPr/>
-        </p:nvSpPr>
-        <p:spPr>
-          <a:xfrm>
-            <a:off x="6217920" y="2194560"/>
-            <a:ext cx="1371600" cy="228600"/>
-          </a:xfrm>
-          <a:prstGeom prst="rect">
-            <a:avLst/>
-          </a:prstGeom>
-          <a:noFill/>
-        </p:spPr>
-        <p:txBody>
-          <a:bodyPr wrap="square">
-            <a:spAutoFit/>
-          </a:bodyPr>
-          <a:lstStyle/>
-          <a:p>
-            <a:pPr algn="l"/>
-            <a:r>
-              <a:rPr sz="1100" b="1">
-                <a:solidFill>
-                  <a:srgbClr val="1C1917"/>
-                </a:solidFill>
-              </a:rPr>
-              <a:t>Multi-state</a:t>
-            </a:r>
-          </a:p>
-        </p:txBody>
-      </p:sp>
-      <p:sp>
-        <p:nvSpPr>
-          <p:cNvPr id="17" name="TextBox 16"/>
-          <p:cNvSpPr txBox="1"/>
-          <p:nvPr/>
-        </p:nvSpPr>
-        <p:spPr>
-          <a:xfrm>
-            <a:off x="7589520" y="2194560"/>
-            <a:ext cx="3200400" cy="457200"/>
-          </a:xfrm>
-          <a:prstGeom prst="rect">
-            <a:avLst/>
-          </a:prstGeom>
-          <a:noFill/>
-        </p:spPr>
-        <p:txBody>
-          <a:bodyPr wrap="square">
-            <a:spAutoFit/>
-          </a:bodyPr>
-          <a:lstStyle/>
-          <a:p>
-            <a:pPr algn="l"/>
-            <a:r>
-              <a:rPr sz="1000" b="0">
-                <a:solidFill>
-                  <a:srgbClr val="57534E"/>
-                </a:solidFill>
-              </a:rPr>
-              <a:t>Andhra Pradesh, Karnataka data expansion beyond Maharashtra</a:t>
-            </a:r>
-          </a:p>
-        </p:txBody>
-      </p:sp>
-      <p:sp>
-        <p:nvSpPr>
-          <p:cNvPr id="18" name="TextBox 17"/>
-          <p:cNvSpPr txBox="1"/>
-          <p:nvPr/>
-        </p:nvSpPr>
-        <p:spPr>
-          <a:xfrm>
-            <a:off x="6217920" y="2834639"/>
-            <a:ext cx="1371600" cy="228600"/>
-          </a:xfrm>
-          <a:prstGeom prst="rect">
-            <a:avLst/>
-          </a:prstGeom>
-          <a:noFill/>
-        </p:spPr>
-        <p:txBody>
-          <a:bodyPr wrap="square">
-            <a:spAutoFit/>
-          </a:bodyPr>
-          <a:lstStyle/>
-          <a:p>
-            <a:pPr algn="l"/>
-            <a:r>
-              <a:rPr sz="1100" b="1">
-                <a:solidFill>
-                  <a:srgbClr val="1C1917"/>
-                </a:solidFill>
-              </a:rPr>
-              <a:t>Offline PWA</a:t>
-            </a:r>
-          </a:p>
-        </p:txBody>
-      </p:sp>
-      <p:sp>
-        <p:nvSpPr>
-          <p:cNvPr id="19" name="TextBox 18"/>
-          <p:cNvSpPr txBox="1"/>
-          <p:nvPr/>
-        </p:nvSpPr>
-        <p:spPr>
-          <a:xfrm>
-            <a:off x="7589520" y="2834639"/>
-            <a:ext cx="3200400" cy="457200"/>
-          </a:xfrm>
-          <a:prstGeom prst="rect">
-            <a:avLst/>
-          </a:prstGeom>
-          <a:noFill/>
-        </p:spPr>
-        <p:txBody>
-          <a:bodyPr wrap="square">
-            <a:spAutoFit/>
-          </a:bodyPr>
-          <a:lstStyle/>
-          <a:p>
-            <a:pPr algn="l"/>
-            <a:r>
-              <a:rPr sz="1000" b="0">
-                <a:solidFill>
-                  <a:srgbClr val="57534E"/>
-                </a:solidFill>
-              </a:rPr>
-              <a:t>Service worker sync, USSD/IVR for feature phones</a:t>
-            </a:r>
-          </a:p>
-        </p:txBody>
-      </p:sp>
-      <p:sp>
-        <p:nvSpPr>
-          <p:cNvPr id="20" name="TextBox 19"/>
-          <p:cNvSpPr txBox="1"/>
-          <p:nvPr/>
-        </p:nvSpPr>
-        <p:spPr>
-          <a:xfrm>
-            <a:off x="6217920" y="3474720"/>
-            <a:ext cx="1371600" cy="228600"/>
-          </a:xfrm>
-          <a:prstGeom prst="rect">
-            <a:avLst/>
-          </a:prstGeom>
-          <a:noFill/>
-        </p:spPr>
-        <p:txBody>
-          <a:bodyPr wrap="square">
-            <a:spAutoFit/>
-          </a:bodyPr>
-          <a:lstStyle/>
-          <a:p>
-            <a:pPr algn="l"/>
-            <a:r>
-              <a:rPr sz="1100" b="1">
-                <a:solidFill>
-                  <a:srgbClr val="1C1917"/>
-                </a:solidFill>
-              </a:rPr>
-              <a:t>Per-crop vision</a:t>
-            </a:r>
-          </a:p>
-        </p:txBody>
-      </p:sp>
-      <p:sp>
-        <p:nvSpPr>
-          <p:cNvPr id="21" name="TextBox 20"/>
-          <p:cNvSpPr txBox="1"/>
-          <p:nvPr/>
-        </p:nvSpPr>
-        <p:spPr>
-          <a:xfrm>
-            <a:off x="7589520" y="3474720"/>
-            <a:ext cx="3200400" cy="457200"/>
-          </a:xfrm>
-          <a:prstGeom prst="rect">
-            <a:avLst/>
-          </a:prstGeom>
-          <a:noFill/>
-        </p:spPr>
-        <p:txBody>
-          <a:bodyPr wrap="square">
-            <a:spAutoFit/>
-          </a:bodyPr>
-          <a:lstStyle/>
-          <a:p>
-            <a:pPr algn="l"/>
-            <a:r>
-              <a:rPr sz="1000" b="0">
-                <a:solidFill>
-                  <a:srgbClr val="57534E"/>
-                </a:solidFill>
-              </a:rPr>
-              <a:t>Extend grader from 9 to 20+ crops (PS requirement)</a:t>
-            </a:r>
-          </a:p>
-        </p:txBody>
-      </p:sp>
-      <p:sp>
-        <p:nvSpPr>
-          <p:cNvPr id="22" name="Rectangle 21"/>
-          <p:cNvSpPr/>
-          <p:nvPr/>
-        </p:nvSpPr>
-        <p:spPr>
-          <a:xfrm>
-            <a:off x="457200" y="4206240"/>
-            <a:ext cx="10241280" cy="731520"/>
-          </a:xfrm>
-          <a:prstGeom prst="rect">
-            <a:avLst/>
-          </a:prstGeom>
-          <a:solidFill>
-            <a:srgbClr val="ECFDF5"/>
-          </a:solidFill>
-          <a:ln w="12700">
-            <a:solidFill>
-              <a:srgbClr val="D1FAE5"/>
-            </a:solidFill>
-          </a:ln>
-        </p:spPr>
-        <p:style>
-          <a:lnRef idx="1">
-            <a:schemeClr val="accent1"/>
-          </a:lnRef>
-          <a:fillRef idx="3">
-            <a:schemeClr val="accent1"/>
-          </a:fillRef>
-          <a:effectRef idx="2">
-            <a:schemeClr val="accent1"/>
-          </a:effectRef>
-          <a:fontRef idx="minor">
-            <a:schemeClr val="lt1"/>
-          </a:fontRef>
-        </p:style>
-        <p:txBody>
-          <a:bodyPr rtlCol="0" anchor="ctr"/>
-          <a:lstStyle/>
-          <a:p>
-            <a:pPr algn="ctr"/>
-          </a:p>
-        </p:txBody>
-      </p:sp>
-      <p:sp>
-        <p:nvSpPr>
-          <p:cNvPr id="23" name="TextBox 22"/>
-          <p:cNvSpPr txBox="1"/>
-          <p:nvPr/>
-        </p:nvSpPr>
-        <p:spPr>
-          <a:xfrm>
-            <a:off x="731520" y="4297680"/>
-            <a:ext cx="9692640" cy="457200"/>
-          </a:xfrm>
-          <a:prstGeom prst="rect">
-            <a:avLst/>
-          </a:prstGeom>
-          <a:noFill/>
-        </p:spPr>
-        <p:txBody>
-          <a:bodyPr wrap="square">
-            <a:spAutoFit/>
-          </a:bodyPr>
-          <a:lstStyle/>
-          <a:p>
-            <a:pPr algn="ctr"/>
-            <a:r>
-              <a:rPr sz="1400" b="1">
-                <a:solidFill>
-                  <a:srgbClr val="047857"/>
-                </a:solidFill>
-              </a:rPr>
-              <a:t>"New crop, district, mandi or buyer = data entry, not a rebuild."</a:t>
-            </a:r>
-          </a:p>
-        </p:txBody>
-      </p:sp>
-      <p:sp>
-        <p:nvSpPr>
-          <p:cNvPr id="24" name="TextBox 23"/>
-          <p:cNvSpPr txBox="1"/>
-          <p:nvPr/>
-        </p:nvSpPr>
-        <p:spPr>
-          <a:xfrm>
-            <a:off x="457200" y="5212080"/>
-            <a:ext cx="10241280" cy="365760"/>
-          </a:xfrm>
-          <a:prstGeom prst="rect">
-            <a:avLst/>
-          </a:prstGeom>
-          <a:noFill/>
-        </p:spPr>
-        <p:txBody>
-          <a:bodyPr wrap="square">
-            <a:spAutoFit/>
-          </a:bodyPr>
-          <a:lstStyle/>
-          <a:p>
-            <a:pPr algn="ctr"/>
-            <a:r>
-              <a:rPr sz="1000" b="0">
-                <a:solidFill>
-                  <a:srgbClr val="57534E"/>
-                </a:solidFill>
-              </a:rPr>
-              <a:t>Team Kisan360 | CMR University | Prof. Bhagya (Mentor)
-Rian Hussain, Nishant Sutariya, Keerthan M S, Musalareddy Chaitna, Koneti Praneeth Kumar, Muruga Santhosh</a:t>
-            </a:r>
-          </a:p>
-        </p:txBody>
-      </p:sp>
+        </p:spPr>
+      </p:pic>
     </p:spTree>
     <p:extLst>
       <p:ext uri="{BB962C8B-B14F-4D97-AF65-F5344CB8AC3E}">
